--- a/docs/IT0206_IBSU_Lunch_Ordering_System_Presentation.pptx
+++ b/docs/IT0206_IBSU_Lunch_Ordering_System_Presentation.pptx
@@ -2,26 +2,26 @@
 <file path=ppt/presentation.xml><?xml version="1.0" encoding="utf-8"?>
 <p:presentation xmlns:a="http://schemas.openxmlformats.org/drawingml/2006/main" xmlns:r="http://schemas.openxmlformats.org/officeDocument/2006/relationships" xmlns:p="http://schemas.openxmlformats.org/presentationml/2006/main" saveSubsetFonts="1" autoCompressPictures="0">
   <p:sldMasterIdLst>
-    <p:sldMasterId id="2147483648" r:id="rId1"/>
+    <p:sldMasterId id="2147483929" r:id="rId1"/>
   </p:sldMasterIdLst>
   <p:sldIdLst>
-    <p:sldId id="256" r:id="rId7"/>
-    <p:sldId id="257" r:id="rId8"/>
-    <p:sldId id="258" r:id="rId9"/>
-    <p:sldId id="259" r:id="rId10"/>
-    <p:sldId id="260" r:id="rId11"/>
-    <p:sldId id="261" r:id="rId12"/>
-    <p:sldId id="262" r:id="rId13"/>
-    <p:sldId id="263" r:id="rId14"/>
-    <p:sldId id="264" r:id="rId15"/>
-    <p:sldId id="265" r:id="rId16"/>
-    <p:sldId id="266" r:id="rId17"/>
-    <p:sldId id="267" r:id="rId18"/>
-    <p:sldId id="268" r:id="rId19"/>
-    <p:sldId id="269" r:id="rId20"/>
-    <p:sldId id="270" r:id="rId21"/>
+    <p:sldId id="256" r:id="rId2"/>
+    <p:sldId id="257" r:id="rId3"/>
+    <p:sldId id="258" r:id="rId4"/>
+    <p:sldId id="259" r:id="rId5"/>
+    <p:sldId id="260" r:id="rId6"/>
+    <p:sldId id="261" r:id="rId7"/>
+    <p:sldId id="262" r:id="rId8"/>
+    <p:sldId id="263" r:id="rId9"/>
+    <p:sldId id="264" r:id="rId10"/>
+    <p:sldId id="265" r:id="rId11"/>
+    <p:sldId id="266" r:id="rId12"/>
+    <p:sldId id="267" r:id="rId13"/>
+    <p:sldId id="268" r:id="rId14"/>
+    <p:sldId id="269" r:id="rId15"/>
+    <p:sldId id="270" r:id="rId16"/>
   </p:sldIdLst>
-  <p:sldSz cx="12191695" cy="6858000" type="screen4x3"/>
+  <p:sldSz cx="12192000" cy="6858000"/>
   <p:notesSz cx="6858000" cy="9144000"/>
   <p:defaultTextStyle>
     <a:defPPr>
@@ -118,11 +118,161 @@
       </a:defRPr>
     </a:lvl9pPr>
   </p:defaultTextStyle>
+  <p:extLst>
+    <p:ext uri="{EFAFB233-063F-42B5-8137-9DF3F51BA10A}">
+      <p15:sldGuideLst xmlns:p15="http://schemas.microsoft.com/office/powerpoint/2012/main">
+        <p15:guide id="1" orient="horz" pos="2160">
+          <p15:clr>
+            <a:srgbClr val="A4A3A4"/>
+          </p15:clr>
+        </p15:guide>
+        <p15:guide id="2" pos="2880">
+          <p15:clr>
+            <a:srgbClr val="A4A3A4"/>
+          </p15:clr>
+        </p15:guide>
+      </p15:sldGuideLst>
+    </p:ext>
+  </p:extLst>
 </p:presentation>
 </file>
 
+<file path=ppt/changesInfos/changesInfo1.xml><?xml version="1.0" encoding="utf-8"?>
+<pc:chgInfo xmlns:a="http://schemas.openxmlformats.org/drawingml/2006/main" xmlns:r="http://schemas.openxmlformats.org/officeDocument/2006/relationships" xmlns:ac="http://schemas.microsoft.com/office/drawing/2013/main/command" xmlns:pc="http://schemas.microsoft.com/office/powerpoint/2013/main/command">
+  <pc:docChgLst>
+    <pc:chgData name="Gunther Darius" userId="8d2b46eae991de6c" providerId="LiveId" clId="{A6C91EE9-2DD3-49A5-8165-D560F60A6B62}"/>
+    <pc:docChg chg="custSel modSld">
+      <pc:chgData name="Gunther Darius" userId="8d2b46eae991de6c" providerId="LiveId" clId="{A6C91EE9-2DD3-49A5-8165-D560F60A6B62}" dt="2026-09-23T02:47:13.160" v="31" actId="14100"/>
+      <pc:docMkLst>
+        <pc:docMk/>
+      </pc:docMkLst>
+      <pc:sldChg chg="modSp mod">
+        <pc:chgData name="Gunther Darius" userId="8d2b46eae991de6c" providerId="LiveId" clId="{A6C91EE9-2DD3-49A5-8165-D560F60A6B62}" dt="2026-09-23T02:41:47.103" v="21" actId="20577"/>
+        <pc:sldMkLst>
+          <pc:docMk/>
+          <pc:sldMk cId="0" sldId="256"/>
+        </pc:sldMkLst>
+        <pc:spChg chg="mod">
+          <ac:chgData name="Gunther Darius" userId="8d2b46eae991de6c" providerId="LiveId" clId="{A6C91EE9-2DD3-49A5-8165-D560F60A6B62}" dt="2026-09-23T02:41:47.103" v="21" actId="20577"/>
+          <ac:spMkLst>
+            <pc:docMk/>
+            <pc:sldMk cId="0" sldId="256"/>
+            <ac:spMk id="2" creationId="{00000000-0000-0000-0000-000000000000}"/>
+          </ac:spMkLst>
+        </pc:spChg>
+      </pc:sldChg>
+      <pc:sldChg chg="modSp mod">
+        <pc:chgData name="Gunther Darius" userId="8d2b46eae991de6c" providerId="LiveId" clId="{A6C91EE9-2DD3-49A5-8165-D560F60A6B62}" dt="2026-09-23T02:45:38.162" v="25" actId="14100"/>
+        <pc:sldMkLst>
+          <pc:docMk/>
+          <pc:sldMk cId="0" sldId="260"/>
+        </pc:sldMkLst>
+        <pc:picChg chg="mod">
+          <ac:chgData name="Gunther Darius" userId="8d2b46eae991de6c" providerId="LiveId" clId="{A6C91EE9-2DD3-49A5-8165-D560F60A6B62}" dt="2026-09-23T02:45:38.162" v="25" actId="14100"/>
+          <ac:picMkLst>
+            <pc:docMk/>
+            <pc:sldMk cId="0" sldId="260"/>
+            <ac:picMk id="3" creationId="{00000000-0000-0000-0000-000000000000}"/>
+          </ac:picMkLst>
+        </pc:picChg>
+      </pc:sldChg>
+      <pc:sldChg chg="modSp mod">
+        <pc:chgData name="Gunther Darius" userId="8d2b46eae991de6c" providerId="LiveId" clId="{A6C91EE9-2DD3-49A5-8165-D560F60A6B62}" dt="2026-09-23T02:45:51.814" v="26" actId="14100"/>
+        <pc:sldMkLst>
+          <pc:docMk/>
+          <pc:sldMk cId="0" sldId="261"/>
+        </pc:sldMkLst>
+        <pc:picChg chg="mod">
+          <ac:chgData name="Gunther Darius" userId="8d2b46eae991de6c" providerId="LiveId" clId="{A6C91EE9-2DD3-49A5-8165-D560F60A6B62}" dt="2026-09-23T02:45:51.814" v="26" actId="14100"/>
+          <ac:picMkLst>
+            <pc:docMk/>
+            <pc:sldMk cId="0" sldId="261"/>
+            <ac:picMk id="3" creationId="{00000000-0000-0000-0000-000000000000}"/>
+          </ac:picMkLst>
+        </pc:picChg>
+      </pc:sldChg>
+      <pc:sldChg chg="modSp mod">
+        <pc:chgData name="Gunther Darius" userId="8d2b46eae991de6c" providerId="LiveId" clId="{A6C91EE9-2DD3-49A5-8165-D560F60A6B62}" dt="2026-09-23T02:46:22.100" v="27" actId="14100"/>
+        <pc:sldMkLst>
+          <pc:docMk/>
+          <pc:sldMk cId="0" sldId="262"/>
+        </pc:sldMkLst>
+        <pc:picChg chg="mod">
+          <ac:chgData name="Gunther Darius" userId="8d2b46eae991de6c" providerId="LiveId" clId="{A6C91EE9-2DD3-49A5-8165-D560F60A6B62}" dt="2026-09-23T02:46:22.100" v="27" actId="14100"/>
+          <ac:picMkLst>
+            <pc:docMk/>
+            <pc:sldMk cId="0" sldId="262"/>
+            <ac:picMk id="3" creationId="{00000000-0000-0000-0000-000000000000}"/>
+          </ac:picMkLst>
+        </pc:picChg>
+      </pc:sldChg>
+      <pc:sldChg chg="modSp mod">
+        <pc:chgData name="Gunther Darius" userId="8d2b46eae991de6c" providerId="LiveId" clId="{A6C91EE9-2DD3-49A5-8165-D560F60A6B62}" dt="2026-09-23T02:46:53.475" v="28" actId="14100"/>
+        <pc:sldMkLst>
+          <pc:docMk/>
+          <pc:sldMk cId="0" sldId="263"/>
+        </pc:sldMkLst>
+        <pc:picChg chg="mod">
+          <ac:chgData name="Gunther Darius" userId="8d2b46eae991de6c" providerId="LiveId" clId="{A6C91EE9-2DD3-49A5-8165-D560F60A6B62}" dt="2026-09-23T02:46:53.475" v="28" actId="14100"/>
+          <ac:picMkLst>
+            <pc:docMk/>
+            <pc:sldMk cId="0" sldId="263"/>
+            <ac:picMk id="3" creationId="{00000000-0000-0000-0000-000000000000}"/>
+          </ac:picMkLst>
+        </pc:picChg>
+      </pc:sldChg>
+      <pc:sldChg chg="modSp mod">
+        <pc:chgData name="Gunther Darius" userId="8d2b46eae991de6c" providerId="LiveId" clId="{A6C91EE9-2DD3-49A5-8165-D560F60A6B62}" dt="2026-09-23T02:46:59.228" v="29" actId="1076"/>
+        <pc:sldMkLst>
+          <pc:docMk/>
+          <pc:sldMk cId="0" sldId="264"/>
+        </pc:sldMkLst>
+        <pc:picChg chg="mod">
+          <ac:chgData name="Gunther Darius" userId="8d2b46eae991de6c" providerId="LiveId" clId="{A6C91EE9-2DD3-49A5-8165-D560F60A6B62}" dt="2026-09-23T02:46:59.228" v="29" actId="1076"/>
+          <ac:picMkLst>
+            <pc:docMk/>
+            <pc:sldMk cId="0" sldId="264"/>
+            <ac:picMk id="3" creationId="{00000000-0000-0000-0000-000000000000}"/>
+          </ac:picMkLst>
+        </pc:picChg>
+      </pc:sldChg>
+      <pc:sldChg chg="modSp mod">
+        <pc:chgData name="Gunther Darius" userId="8d2b46eae991de6c" providerId="LiveId" clId="{A6C91EE9-2DD3-49A5-8165-D560F60A6B62}" dt="2026-09-23T02:47:07.951" v="30" actId="14100"/>
+        <pc:sldMkLst>
+          <pc:docMk/>
+          <pc:sldMk cId="0" sldId="265"/>
+        </pc:sldMkLst>
+        <pc:picChg chg="mod">
+          <ac:chgData name="Gunther Darius" userId="8d2b46eae991de6c" providerId="LiveId" clId="{A6C91EE9-2DD3-49A5-8165-D560F60A6B62}" dt="2026-09-23T02:47:07.951" v="30" actId="14100"/>
+          <ac:picMkLst>
+            <pc:docMk/>
+            <pc:sldMk cId="0" sldId="265"/>
+            <ac:picMk id="3" creationId="{00000000-0000-0000-0000-000000000000}"/>
+          </ac:picMkLst>
+        </pc:picChg>
+      </pc:sldChg>
+      <pc:sldChg chg="modSp mod">
+        <pc:chgData name="Gunther Darius" userId="8d2b46eae991de6c" providerId="LiveId" clId="{A6C91EE9-2DD3-49A5-8165-D560F60A6B62}" dt="2026-09-23T02:47:13.160" v="31" actId="14100"/>
+        <pc:sldMkLst>
+          <pc:docMk/>
+          <pc:sldMk cId="0" sldId="266"/>
+        </pc:sldMkLst>
+        <pc:picChg chg="mod">
+          <ac:chgData name="Gunther Darius" userId="8d2b46eae991de6c" providerId="LiveId" clId="{A6C91EE9-2DD3-49A5-8165-D560F60A6B62}" dt="2026-09-23T02:47:13.160" v="31" actId="14100"/>
+          <ac:picMkLst>
+            <pc:docMk/>
+            <pc:sldMk cId="0" sldId="266"/>
+            <ac:picMk id="3" creationId="{00000000-0000-0000-0000-000000000000}"/>
+          </ac:picMkLst>
+        </pc:picChg>
+      </pc:sldChg>
+    </pc:docChg>
+  </pc:docChgLst>
+</pc:chgInfo>
+</file>
+
 <file path=ppt/slideLayouts/slideLayout1.xml><?xml version="1.0" encoding="utf-8"?>
-<p:sldLayout xmlns:a="http://schemas.openxmlformats.org/drawingml/2006/main" xmlns:r="http://schemas.openxmlformats.org/officeDocument/2006/relationships" xmlns:p="http://schemas.openxmlformats.org/presentationml/2006/main" type="title" preserve="1">
+<p:sldLayout xmlns:a="http://schemas.openxmlformats.org/drawingml/2006/main" xmlns:r="http://schemas.openxmlformats.org/officeDocument/2006/relationships" xmlns:p="http://schemas.openxmlformats.org/presentationml/2006/main" showMasterSp="0" type="title" preserve="1">
   <p:cSld name="Title Slide">
     <p:spTree>
       <p:nvGrpSpPr>
@@ -150,19 +300,27 @@
         </p:nvSpPr>
         <p:spPr>
           <a:xfrm>
-            <a:off x="685800" y="2130425"/>
-            <a:ext cx="7772400" cy="1470025"/>
-          </a:xfrm>
-        </p:spPr>
-        <p:txBody>
-          <a:bodyPr/>
-          <a:lstStyle/>
-          <a:p>
-            <a:r>
-              <a:rPr lang="en-US" smtClean="0"/>
+            <a:off x="684212" y="685799"/>
+            <a:ext cx="8001000" cy="2971801"/>
+          </a:xfrm>
+        </p:spPr>
+        <p:txBody>
+          <a:bodyPr anchor="b">
+            <a:normAutofit/>
+          </a:bodyPr>
+          <a:lstStyle>
+            <a:lvl1pPr algn="l">
+              <a:defRPr sz="4800">
+                <a:effectLst/>
+              </a:defRPr>
+            </a:lvl1pPr>
+          </a:lstStyle>
+          <a:p>
+            <a:r>
+              <a:rPr lang="en-US"/>
               <a:t>Click to edit Master title style</a:t>
             </a:r>
-            <a:endParaRPr lang="en-US"/>
+            <a:endParaRPr lang="en-US" dirty="0"/>
           </a:p>
         </p:txBody>
       </p:sp>
@@ -178,19 +336,21 @@
         </p:nvSpPr>
         <p:spPr>
           <a:xfrm>
-            <a:off x="1371600" y="3886200"/>
-            <a:ext cx="6400800" cy="1752600"/>
-          </a:xfrm>
-        </p:spPr>
-        <p:txBody>
-          <a:bodyPr/>
+            <a:off x="684212" y="3843867"/>
+            <a:ext cx="6400800" cy="1947333"/>
+          </a:xfrm>
+        </p:spPr>
+        <p:txBody>
+          <a:bodyPr anchor="t">
+            <a:normAutofit/>
+          </a:bodyPr>
           <a:lstStyle>
-            <a:lvl1pPr marL="0" indent="0" algn="ctr">
-              <a:buNone/>
-              <a:defRPr>
+            <a:lvl1pPr marL="0" indent="0" algn="l">
+              <a:buNone/>
+              <a:defRPr sz="2100">
                 <a:solidFill>
-                  <a:schemeClr val="tx1">
-                    <a:tint val="75000"/>
+                  <a:schemeClr val="bg2">
+                    <a:lumMod val="50000"/>
                   </a:schemeClr>
                 </a:solidFill>
               </a:defRPr>
@@ -278,10 +438,10 @@
           </a:lstStyle>
           <a:p>
             <a:r>
-              <a:rPr lang="en-US" smtClean="0"/>
+              <a:rPr lang="en-US"/>
               <a:t>Click to edit Master subtitle style</a:t>
             </a:r>
-            <a:endParaRPr lang="en-US"/>
+            <a:endParaRPr lang="en-US" dirty="0"/>
           </a:p>
         </p:txBody>
       </p:sp>
@@ -302,7 +462,7 @@
           <a:p>
             <a:fld id="{5BCAD085-E8A6-8845-BD4E-CB4CCA059FC4}" type="datetimeFigureOut">
               <a:rPr lang="en-US" smtClean="0"/>
-              <a:t>1/27/13</a:t>
+              <a:t>9/23/2026</a:t>
             </a:fld>
             <a:endParaRPr lang="en-US"/>
           </a:p>
@@ -350,10 +510,185 @@
           </a:p>
         </p:txBody>
       </p:sp>
+      <p:cxnSp>
+        <p:nvCxnSpPr>
+          <p:cNvPr id="16" name="Straight Connector 15"/>
+          <p:cNvCxnSpPr/>
+          <p:nvPr/>
+        </p:nvCxnSpPr>
+        <p:spPr>
+          <a:xfrm flipH="1">
+            <a:off x="8228012" y="8467"/>
+            <a:ext cx="3810000" cy="3810000"/>
+          </a:xfrm>
+          <a:prstGeom prst="line">
+            <a:avLst/>
+          </a:prstGeom>
+          <a:ln w="12700">
+            <a:solidFill>
+              <a:schemeClr val="tx1"/>
+            </a:solidFill>
+          </a:ln>
+        </p:spPr>
+        <p:style>
+          <a:lnRef idx="2">
+            <a:schemeClr val="accent1"/>
+          </a:lnRef>
+          <a:fillRef idx="0">
+            <a:schemeClr val="accent1"/>
+          </a:fillRef>
+          <a:effectRef idx="1">
+            <a:schemeClr val="accent1"/>
+          </a:effectRef>
+          <a:fontRef idx="minor">
+            <a:schemeClr val="tx1"/>
+          </a:fontRef>
+        </p:style>
+      </p:cxnSp>
+      <p:cxnSp>
+        <p:nvCxnSpPr>
+          <p:cNvPr id="17" name="Straight Connector 16"/>
+          <p:cNvCxnSpPr/>
+          <p:nvPr/>
+        </p:nvCxnSpPr>
+        <p:spPr>
+          <a:xfrm flipH="1">
+            <a:off x="6108170" y="91545"/>
+            <a:ext cx="6080655" cy="6080655"/>
+          </a:xfrm>
+          <a:prstGeom prst="line">
+            <a:avLst/>
+          </a:prstGeom>
+          <a:ln w="12700">
+            <a:solidFill>
+              <a:schemeClr val="tx1"/>
+            </a:solidFill>
+          </a:ln>
+        </p:spPr>
+        <p:style>
+          <a:lnRef idx="2">
+            <a:schemeClr val="accent1"/>
+          </a:lnRef>
+          <a:fillRef idx="0">
+            <a:schemeClr val="accent1"/>
+          </a:fillRef>
+          <a:effectRef idx="1">
+            <a:schemeClr val="accent1"/>
+          </a:effectRef>
+          <a:fontRef idx="minor">
+            <a:schemeClr val="tx1"/>
+          </a:fontRef>
+        </p:style>
+      </p:cxnSp>
+      <p:cxnSp>
+        <p:nvCxnSpPr>
+          <p:cNvPr id="19" name="Straight Connector 18"/>
+          <p:cNvCxnSpPr/>
+          <p:nvPr/>
+        </p:nvCxnSpPr>
+        <p:spPr>
+          <a:xfrm flipH="1">
+            <a:off x="7235825" y="228600"/>
+            <a:ext cx="4953000" cy="4953000"/>
+          </a:xfrm>
+          <a:prstGeom prst="line">
+            <a:avLst/>
+          </a:prstGeom>
+          <a:ln w="12700">
+            <a:solidFill>
+              <a:schemeClr val="tx1"/>
+            </a:solidFill>
+          </a:ln>
+        </p:spPr>
+        <p:style>
+          <a:lnRef idx="2">
+            <a:schemeClr val="accent1"/>
+          </a:lnRef>
+          <a:fillRef idx="0">
+            <a:schemeClr val="accent1"/>
+          </a:fillRef>
+          <a:effectRef idx="1">
+            <a:schemeClr val="accent1"/>
+          </a:effectRef>
+          <a:fontRef idx="minor">
+            <a:schemeClr val="tx1"/>
+          </a:fontRef>
+        </p:style>
+      </p:cxnSp>
+      <p:cxnSp>
+        <p:nvCxnSpPr>
+          <p:cNvPr id="21" name="Straight Connector 20"/>
+          <p:cNvCxnSpPr/>
+          <p:nvPr/>
+        </p:nvCxnSpPr>
+        <p:spPr>
+          <a:xfrm flipH="1">
+            <a:off x="7335837" y="32278"/>
+            <a:ext cx="4852989" cy="4852989"/>
+          </a:xfrm>
+          <a:prstGeom prst="line">
+            <a:avLst/>
+          </a:prstGeom>
+          <a:ln w="31750">
+            <a:solidFill>
+              <a:schemeClr val="tx1"/>
+            </a:solidFill>
+          </a:ln>
+        </p:spPr>
+        <p:style>
+          <a:lnRef idx="2">
+            <a:schemeClr val="accent1"/>
+          </a:lnRef>
+          <a:fillRef idx="0">
+            <a:schemeClr val="accent1"/>
+          </a:fillRef>
+          <a:effectRef idx="1">
+            <a:schemeClr val="accent1"/>
+          </a:effectRef>
+          <a:fontRef idx="minor">
+            <a:schemeClr val="tx1"/>
+          </a:fontRef>
+        </p:style>
+      </p:cxnSp>
+      <p:cxnSp>
+        <p:nvCxnSpPr>
+          <p:cNvPr id="23" name="Straight Connector 22"/>
+          <p:cNvCxnSpPr/>
+          <p:nvPr/>
+        </p:nvCxnSpPr>
+        <p:spPr>
+          <a:xfrm flipH="1">
+            <a:off x="7845426" y="609601"/>
+            <a:ext cx="4343399" cy="4343399"/>
+          </a:xfrm>
+          <a:prstGeom prst="line">
+            <a:avLst/>
+          </a:prstGeom>
+          <a:ln w="31750">
+            <a:solidFill>
+              <a:schemeClr val="tx1"/>
+            </a:solidFill>
+          </a:ln>
+        </p:spPr>
+        <p:style>
+          <a:lnRef idx="2">
+            <a:schemeClr val="accent1"/>
+          </a:lnRef>
+          <a:fillRef idx="0">
+            <a:schemeClr val="accent1"/>
+          </a:fillRef>
+          <a:effectRef idx="1">
+            <a:schemeClr val="accent1"/>
+          </a:effectRef>
+          <a:fontRef idx="minor">
+            <a:schemeClr val="tx1"/>
+          </a:fontRef>
+        </p:style>
+      </p:cxnSp>
     </p:spTree>
     <p:extLst>
       <p:ext uri="{BB962C8B-B14F-4D97-AF65-F5344CB8AC3E}">
-        <p14:creationId xmlns:p14="http://schemas.microsoft.com/office/powerpoint/2010/main" val="3168075583"/>
+        <p14:creationId xmlns:p14="http://schemas.microsoft.com/office/powerpoint/2010/main" val="2281455708"/>
       </p:ext>
     </p:extLst>
   </p:cSld>
@@ -364,6 +699,1812 @@
 </file>
 
 <file path=ppt/slideLayouts/slideLayout10.xml><?xml version="1.0" encoding="utf-8"?>
+<p:sldLayout xmlns:a="http://schemas.openxmlformats.org/drawingml/2006/main" xmlns:r="http://schemas.openxmlformats.org/officeDocument/2006/relationships" xmlns:p="http://schemas.openxmlformats.org/presentationml/2006/main" preserve="1">
+  <p:cSld name="Panoramic Picture with Caption">
+    <p:spTree>
+      <p:nvGrpSpPr>
+        <p:cNvPr id="1" name=""/>
+        <p:cNvGrpSpPr/>
+        <p:nvPr/>
+      </p:nvGrpSpPr>
+      <p:grpSpPr>
+        <a:xfrm>
+          <a:off x="0" y="0"/>
+          <a:ext cx="0" cy="0"/>
+          <a:chOff x="0" y="0"/>
+          <a:chExt cx="0" cy="0"/>
+        </a:xfrm>
+      </p:grpSpPr>
+      <p:sp>
+        <p:nvSpPr>
+          <p:cNvPr id="2" name="Title 1"/>
+          <p:cNvSpPr>
+            <a:spLocks noGrp="1"/>
+          </p:cNvSpPr>
+          <p:nvPr>
+            <p:ph type="title"/>
+          </p:nvPr>
+        </p:nvSpPr>
+        <p:spPr/>
+        <p:txBody>
+          <a:bodyPr/>
+          <a:lstStyle/>
+          <a:p>
+            <a:r>
+              <a:rPr lang="en-US"/>
+              <a:t>Click to edit Master title style</a:t>
+            </a:r>
+            <a:endParaRPr lang="en-US" dirty="0"/>
+          </a:p>
+        </p:txBody>
+      </p:sp>
+      <p:sp>
+        <p:nvSpPr>
+          <p:cNvPr id="17" name="Picture Placeholder 2"/>
+          <p:cNvSpPr>
+            <a:spLocks noGrp="1" noChangeAspect="1"/>
+          </p:cNvSpPr>
+          <p:nvPr>
+            <p:ph type="pic" idx="13"/>
+          </p:nvPr>
+        </p:nvSpPr>
+        <p:spPr>
+          <a:xfrm>
+            <a:off x="685800" y="533400"/>
+            <a:ext cx="10818812" cy="3124200"/>
+          </a:xfrm>
+          <a:prstGeom prst="snip2DiagRect">
+            <a:avLst>
+              <a:gd name="adj1" fmla="val 10815"/>
+              <a:gd name="adj2" fmla="val 0"/>
+            </a:avLst>
+          </a:prstGeom>
+          <a:ln w="15875">
+            <a:solidFill>
+              <a:schemeClr val="tx1">
+                <a:alpha val="40000"/>
+              </a:schemeClr>
+            </a:solidFill>
+          </a:ln>
+          <a:effectLst>
+            <a:innerShdw blurRad="57150" dist="38100" dir="14460000">
+              <a:srgbClr val="000000">
+                <a:alpha val="70000"/>
+              </a:srgbClr>
+            </a:innerShdw>
+          </a:effectLst>
+        </p:spPr>
+        <p:txBody>
+          <a:bodyPr anchor="t">
+            <a:normAutofit/>
+          </a:bodyPr>
+          <a:lstStyle>
+            <a:lvl1pPr marL="0" indent="0" algn="ctr">
+              <a:buNone/>
+              <a:defRPr sz="1600"/>
+            </a:lvl1pPr>
+            <a:lvl2pPr marL="457200" indent="0">
+              <a:buNone/>
+              <a:defRPr sz="1600"/>
+            </a:lvl2pPr>
+            <a:lvl3pPr marL="914400" indent="0">
+              <a:buNone/>
+              <a:defRPr sz="1600"/>
+            </a:lvl3pPr>
+            <a:lvl4pPr marL="1371600" indent="0">
+              <a:buNone/>
+              <a:defRPr sz="1600"/>
+            </a:lvl4pPr>
+            <a:lvl5pPr marL="1828800" indent="0">
+              <a:buNone/>
+              <a:defRPr sz="1600"/>
+            </a:lvl5pPr>
+            <a:lvl6pPr marL="2286000" indent="0">
+              <a:buNone/>
+              <a:defRPr sz="1600"/>
+            </a:lvl6pPr>
+            <a:lvl7pPr marL="2743200" indent="0">
+              <a:buNone/>
+              <a:defRPr sz="1600"/>
+            </a:lvl7pPr>
+            <a:lvl8pPr marL="3200400" indent="0">
+              <a:buNone/>
+              <a:defRPr sz="1600"/>
+            </a:lvl8pPr>
+            <a:lvl9pPr marL="3657600" indent="0">
+              <a:buNone/>
+              <a:defRPr sz="1600"/>
+            </a:lvl9pPr>
+          </a:lstStyle>
+          <a:p>
+            <a:r>
+              <a:rPr lang="en-US"/>
+              <a:t>Click icon to add picture</a:t>
+            </a:r>
+            <a:endParaRPr lang="en-US" dirty="0"/>
+          </a:p>
+        </p:txBody>
+      </p:sp>
+      <p:sp>
+        <p:nvSpPr>
+          <p:cNvPr id="16" name="Text Placeholder 9"/>
+          <p:cNvSpPr>
+            <a:spLocks noGrp="1"/>
+          </p:cNvSpPr>
+          <p:nvPr>
+            <p:ph type="body" sz="quarter" idx="14"/>
+          </p:nvPr>
+        </p:nvSpPr>
+        <p:spPr>
+          <a:xfrm>
+            <a:off x="914402" y="3843867"/>
+            <a:ext cx="8304210" cy="457200"/>
+          </a:xfrm>
+        </p:spPr>
+        <p:txBody>
+          <a:bodyPr anchor="t">
+            <a:normAutofit/>
+          </a:bodyPr>
+          <a:lstStyle>
+            <a:lvl1pPr marL="0" indent="0">
+              <a:buFontTx/>
+              <a:buNone/>
+              <a:defRPr sz="1600"/>
+            </a:lvl1pPr>
+            <a:lvl2pPr marL="457200" indent="0">
+              <a:buFontTx/>
+              <a:buNone/>
+              <a:defRPr/>
+            </a:lvl2pPr>
+            <a:lvl3pPr marL="914400" indent="0">
+              <a:buFontTx/>
+              <a:buNone/>
+              <a:defRPr/>
+            </a:lvl3pPr>
+            <a:lvl4pPr marL="1371600" indent="0">
+              <a:buFontTx/>
+              <a:buNone/>
+              <a:defRPr/>
+            </a:lvl4pPr>
+            <a:lvl5pPr marL="1828800" indent="0">
+              <a:buFontTx/>
+              <a:buNone/>
+              <a:defRPr/>
+            </a:lvl5pPr>
+          </a:lstStyle>
+          <a:p>
+            <a:pPr lvl="0"/>
+            <a:r>
+              <a:rPr lang="en-US"/>
+              <a:t>Click to edit Master text styles</a:t>
+            </a:r>
+          </a:p>
+        </p:txBody>
+      </p:sp>
+      <p:sp>
+        <p:nvSpPr>
+          <p:cNvPr id="3" name="Date Placeholder 2"/>
+          <p:cNvSpPr>
+            <a:spLocks noGrp="1"/>
+          </p:cNvSpPr>
+          <p:nvPr>
+            <p:ph type="dt" sz="half" idx="10"/>
+          </p:nvPr>
+        </p:nvSpPr>
+        <p:spPr/>
+        <p:txBody>
+          <a:bodyPr/>
+          <a:lstStyle/>
+          <a:p>
+            <a:fld id="{5BCAD085-E8A6-8845-BD4E-CB4CCA059FC4}" type="datetimeFigureOut">
+              <a:rPr lang="en-US" smtClean="0"/>
+              <a:t>9/23/2026</a:t>
+            </a:fld>
+            <a:endParaRPr lang="en-US"/>
+          </a:p>
+        </p:txBody>
+      </p:sp>
+      <p:sp>
+        <p:nvSpPr>
+          <p:cNvPr id="4" name="Footer Placeholder 3"/>
+          <p:cNvSpPr>
+            <a:spLocks noGrp="1"/>
+          </p:cNvSpPr>
+          <p:nvPr>
+            <p:ph type="ftr" sz="quarter" idx="11"/>
+          </p:nvPr>
+        </p:nvSpPr>
+        <p:spPr/>
+        <p:txBody>
+          <a:bodyPr/>
+          <a:lstStyle/>
+          <a:p>
+            <a:endParaRPr lang="en-US"/>
+          </a:p>
+        </p:txBody>
+      </p:sp>
+      <p:sp>
+        <p:nvSpPr>
+          <p:cNvPr id="5" name="Slide Number Placeholder 4"/>
+          <p:cNvSpPr>
+            <a:spLocks noGrp="1"/>
+          </p:cNvSpPr>
+          <p:nvPr>
+            <p:ph type="sldNum" sz="quarter" idx="12"/>
+          </p:nvPr>
+        </p:nvSpPr>
+        <p:spPr/>
+        <p:txBody>
+          <a:bodyPr/>
+          <a:lstStyle/>
+          <a:p>
+            <a:fld id="{C1FF6DA9-008F-8B48-92A6-B652298478BF}" type="slidenum">
+              <a:rPr lang="en-US" smtClean="0"/>
+              <a:t>‹#›</a:t>
+            </a:fld>
+            <a:endParaRPr lang="en-US"/>
+          </a:p>
+        </p:txBody>
+      </p:sp>
+    </p:spTree>
+    <p:extLst>
+      <p:ext uri="{BB962C8B-B14F-4D97-AF65-F5344CB8AC3E}">
+        <p14:creationId xmlns:p14="http://schemas.microsoft.com/office/powerpoint/2010/main" val="719654160"/>
+      </p:ext>
+    </p:extLst>
+  </p:cSld>
+  <p:clrMapOvr>
+    <a:masterClrMapping/>
+  </p:clrMapOvr>
+</p:sldLayout>
+</file>
+
+<file path=ppt/slideLayouts/slideLayout11.xml><?xml version="1.0" encoding="utf-8"?>
+<p:sldLayout xmlns:a="http://schemas.openxmlformats.org/drawingml/2006/main" xmlns:r="http://schemas.openxmlformats.org/officeDocument/2006/relationships" xmlns:p="http://schemas.openxmlformats.org/presentationml/2006/main" preserve="1">
+  <p:cSld name="Title and Caption">
+    <p:spTree>
+      <p:nvGrpSpPr>
+        <p:cNvPr id="1" name=""/>
+        <p:cNvGrpSpPr/>
+        <p:nvPr/>
+      </p:nvGrpSpPr>
+      <p:grpSpPr>
+        <a:xfrm>
+          <a:off x="0" y="0"/>
+          <a:ext cx="0" cy="0"/>
+          <a:chOff x="0" y="0"/>
+          <a:chExt cx="0" cy="0"/>
+        </a:xfrm>
+      </p:grpSpPr>
+      <p:sp>
+        <p:nvSpPr>
+          <p:cNvPr id="2" name="Title 1"/>
+          <p:cNvSpPr>
+            <a:spLocks noGrp="1"/>
+          </p:cNvSpPr>
+          <p:nvPr>
+            <p:ph type="title"/>
+          </p:nvPr>
+        </p:nvSpPr>
+        <p:spPr>
+          <a:xfrm>
+            <a:off x="684213" y="685800"/>
+            <a:ext cx="10058400" cy="2743200"/>
+          </a:xfrm>
+        </p:spPr>
+        <p:txBody>
+          <a:bodyPr anchor="ctr">
+            <a:normAutofit/>
+          </a:bodyPr>
+          <a:lstStyle>
+            <a:lvl1pPr algn="l">
+              <a:defRPr sz="3200" b="0" cap="all"/>
+            </a:lvl1pPr>
+          </a:lstStyle>
+          <a:p>
+            <a:r>
+              <a:rPr lang="en-US"/>
+              <a:t>Click to edit Master title style</a:t>
+            </a:r>
+            <a:endParaRPr lang="en-US" dirty="0"/>
+          </a:p>
+        </p:txBody>
+      </p:sp>
+      <p:sp>
+        <p:nvSpPr>
+          <p:cNvPr id="3" name="Text Placeholder 2"/>
+          <p:cNvSpPr>
+            <a:spLocks noGrp="1"/>
+          </p:cNvSpPr>
+          <p:nvPr>
+            <p:ph type="body" idx="1"/>
+          </p:nvPr>
+        </p:nvSpPr>
+        <p:spPr>
+          <a:xfrm>
+            <a:off x="684212" y="4114800"/>
+            <a:ext cx="8535988" cy="1879600"/>
+          </a:xfrm>
+        </p:spPr>
+        <p:txBody>
+          <a:bodyPr anchor="ctr">
+            <a:normAutofit/>
+          </a:bodyPr>
+          <a:lstStyle>
+            <a:lvl1pPr marL="0" indent="0" algn="l">
+              <a:buNone/>
+              <a:defRPr sz="2000">
+                <a:solidFill>
+                  <a:schemeClr val="bg2">
+                    <a:lumMod val="50000"/>
+                  </a:schemeClr>
+                </a:solidFill>
+              </a:defRPr>
+            </a:lvl1pPr>
+            <a:lvl2pPr marL="457200" indent="0">
+              <a:buNone/>
+              <a:defRPr sz="1800">
+                <a:solidFill>
+                  <a:schemeClr val="tx1">
+                    <a:tint val="75000"/>
+                  </a:schemeClr>
+                </a:solidFill>
+              </a:defRPr>
+            </a:lvl2pPr>
+            <a:lvl3pPr marL="914400" indent="0">
+              <a:buNone/>
+              <a:defRPr sz="1600">
+                <a:solidFill>
+                  <a:schemeClr val="tx1">
+                    <a:tint val="75000"/>
+                  </a:schemeClr>
+                </a:solidFill>
+              </a:defRPr>
+            </a:lvl3pPr>
+            <a:lvl4pPr marL="1371600" indent="0">
+              <a:buNone/>
+              <a:defRPr sz="1400">
+                <a:solidFill>
+                  <a:schemeClr val="tx1">
+                    <a:tint val="75000"/>
+                  </a:schemeClr>
+                </a:solidFill>
+              </a:defRPr>
+            </a:lvl4pPr>
+            <a:lvl5pPr marL="1828800" indent="0">
+              <a:buNone/>
+              <a:defRPr sz="1400">
+                <a:solidFill>
+                  <a:schemeClr val="tx1">
+                    <a:tint val="75000"/>
+                  </a:schemeClr>
+                </a:solidFill>
+              </a:defRPr>
+            </a:lvl5pPr>
+            <a:lvl6pPr marL="2286000" indent="0">
+              <a:buNone/>
+              <a:defRPr sz="1400">
+                <a:solidFill>
+                  <a:schemeClr val="tx1">
+                    <a:tint val="75000"/>
+                  </a:schemeClr>
+                </a:solidFill>
+              </a:defRPr>
+            </a:lvl6pPr>
+            <a:lvl7pPr marL="2743200" indent="0">
+              <a:buNone/>
+              <a:defRPr sz="1400">
+                <a:solidFill>
+                  <a:schemeClr val="tx1">
+                    <a:tint val="75000"/>
+                  </a:schemeClr>
+                </a:solidFill>
+              </a:defRPr>
+            </a:lvl7pPr>
+            <a:lvl8pPr marL="3200400" indent="0">
+              <a:buNone/>
+              <a:defRPr sz="1400">
+                <a:solidFill>
+                  <a:schemeClr val="tx1">
+                    <a:tint val="75000"/>
+                  </a:schemeClr>
+                </a:solidFill>
+              </a:defRPr>
+            </a:lvl8pPr>
+            <a:lvl9pPr marL="3657600" indent="0">
+              <a:buNone/>
+              <a:defRPr sz="1400">
+                <a:solidFill>
+                  <a:schemeClr val="tx1">
+                    <a:tint val="75000"/>
+                  </a:schemeClr>
+                </a:solidFill>
+              </a:defRPr>
+            </a:lvl9pPr>
+          </a:lstStyle>
+          <a:p>
+            <a:pPr lvl="0"/>
+            <a:r>
+              <a:rPr lang="en-US"/>
+              <a:t>Click to edit Master text styles</a:t>
+            </a:r>
+          </a:p>
+        </p:txBody>
+      </p:sp>
+      <p:sp>
+        <p:nvSpPr>
+          <p:cNvPr id="4" name="Date Placeholder 3"/>
+          <p:cNvSpPr>
+            <a:spLocks noGrp="1"/>
+          </p:cNvSpPr>
+          <p:nvPr>
+            <p:ph type="dt" sz="half" idx="10"/>
+          </p:nvPr>
+        </p:nvSpPr>
+        <p:spPr/>
+        <p:txBody>
+          <a:bodyPr/>
+          <a:lstStyle/>
+          <a:p>
+            <a:fld id="{5BCAD085-E8A6-8845-BD4E-CB4CCA059FC4}" type="datetimeFigureOut">
+              <a:rPr lang="en-US" smtClean="0"/>
+              <a:t>9/23/2026</a:t>
+            </a:fld>
+            <a:endParaRPr lang="en-US"/>
+          </a:p>
+        </p:txBody>
+      </p:sp>
+      <p:sp>
+        <p:nvSpPr>
+          <p:cNvPr id="5" name="Footer Placeholder 4"/>
+          <p:cNvSpPr>
+            <a:spLocks noGrp="1"/>
+          </p:cNvSpPr>
+          <p:nvPr>
+            <p:ph type="ftr" sz="quarter" idx="11"/>
+          </p:nvPr>
+        </p:nvSpPr>
+        <p:spPr/>
+        <p:txBody>
+          <a:bodyPr/>
+          <a:lstStyle/>
+          <a:p>
+            <a:endParaRPr lang="en-US"/>
+          </a:p>
+        </p:txBody>
+      </p:sp>
+      <p:sp>
+        <p:nvSpPr>
+          <p:cNvPr id="6" name="Slide Number Placeholder 5"/>
+          <p:cNvSpPr>
+            <a:spLocks noGrp="1"/>
+          </p:cNvSpPr>
+          <p:nvPr>
+            <p:ph type="sldNum" sz="quarter" idx="12"/>
+          </p:nvPr>
+        </p:nvSpPr>
+        <p:spPr/>
+        <p:txBody>
+          <a:bodyPr/>
+          <a:lstStyle/>
+          <a:p>
+            <a:fld id="{C1FF6DA9-008F-8B48-92A6-B652298478BF}" type="slidenum">
+              <a:rPr lang="en-US" smtClean="0"/>
+              <a:t>‹#›</a:t>
+            </a:fld>
+            <a:endParaRPr lang="en-US"/>
+          </a:p>
+        </p:txBody>
+      </p:sp>
+    </p:spTree>
+    <p:extLst>
+      <p:ext uri="{BB962C8B-B14F-4D97-AF65-F5344CB8AC3E}">
+        <p14:creationId xmlns:p14="http://schemas.microsoft.com/office/powerpoint/2010/main" val="435755698"/>
+      </p:ext>
+    </p:extLst>
+  </p:cSld>
+  <p:clrMapOvr>
+    <a:masterClrMapping/>
+  </p:clrMapOvr>
+</p:sldLayout>
+</file>
+
+<file path=ppt/slideLayouts/slideLayout12.xml><?xml version="1.0" encoding="utf-8"?>
+<p:sldLayout xmlns:a="http://schemas.openxmlformats.org/drawingml/2006/main" xmlns:r="http://schemas.openxmlformats.org/officeDocument/2006/relationships" xmlns:p="http://schemas.openxmlformats.org/presentationml/2006/main" preserve="1">
+  <p:cSld name="Quote with Caption">
+    <p:spTree>
+      <p:nvGrpSpPr>
+        <p:cNvPr id="1" name=""/>
+        <p:cNvGrpSpPr/>
+        <p:nvPr/>
+      </p:nvGrpSpPr>
+      <p:grpSpPr>
+        <a:xfrm>
+          <a:off x="0" y="0"/>
+          <a:ext cx="0" cy="0"/>
+          <a:chOff x="0" y="0"/>
+          <a:chExt cx="0" cy="0"/>
+        </a:xfrm>
+      </p:grpSpPr>
+      <p:sp>
+        <p:nvSpPr>
+          <p:cNvPr id="2" name="Title 1"/>
+          <p:cNvSpPr>
+            <a:spLocks noGrp="1"/>
+          </p:cNvSpPr>
+          <p:nvPr>
+            <p:ph type="title"/>
+          </p:nvPr>
+        </p:nvSpPr>
+        <p:spPr>
+          <a:xfrm>
+            <a:off x="1141411" y="685800"/>
+            <a:ext cx="9144001" cy="2743200"/>
+          </a:xfrm>
+        </p:spPr>
+        <p:txBody>
+          <a:bodyPr anchor="ctr">
+            <a:normAutofit/>
+          </a:bodyPr>
+          <a:lstStyle>
+            <a:lvl1pPr algn="l">
+              <a:defRPr sz="3200" b="0" cap="all">
+                <a:solidFill>
+                  <a:schemeClr val="tx1"/>
+                </a:solidFill>
+              </a:defRPr>
+            </a:lvl1pPr>
+          </a:lstStyle>
+          <a:p>
+            <a:r>
+              <a:rPr lang="en-US"/>
+              <a:t>Click to edit Master title style</a:t>
+            </a:r>
+            <a:endParaRPr lang="en-US" dirty="0"/>
+          </a:p>
+        </p:txBody>
+      </p:sp>
+      <p:sp>
+        <p:nvSpPr>
+          <p:cNvPr id="10" name="Text Placeholder 9"/>
+          <p:cNvSpPr>
+            <a:spLocks noGrp="1"/>
+          </p:cNvSpPr>
+          <p:nvPr>
+            <p:ph type="body" sz="quarter" idx="13"/>
+          </p:nvPr>
+        </p:nvSpPr>
+        <p:spPr>
+          <a:xfrm>
+            <a:off x="1446212" y="3429000"/>
+            <a:ext cx="8534400" cy="381000"/>
+          </a:xfrm>
+        </p:spPr>
+        <p:txBody>
+          <a:bodyPr anchor="ctr"/>
+          <a:lstStyle>
+            <a:lvl1pPr marL="0" indent="0">
+              <a:buFontTx/>
+              <a:buNone/>
+              <a:defRPr/>
+            </a:lvl1pPr>
+            <a:lvl2pPr marL="457200" indent="0">
+              <a:buFontTx/>
+              <a:buNone/>
+              <a:defRPr/>
+            </a:lvl2pPr>
+            <a:lvl3pPr marL="914400" indent="0">
+              <a:buFontTx/>
+              <a:buNone/>
+              <a:defRPr/>
+            </a:lvl3pPr>
+            <a:lvl4pPr marL="1371600" indent="0">
+              <a:buFontTx/>
+              <a:buNone/>
+              <a:defRPr/>
+            </a:lvl4pPr>
+            <a:lvl5pPr marL="1828800" indent="0">
+              <a:buFontTx/>
+              <a:buNone/>
+              <a:defRPr/>
+            </a:lvl5pPr>
+          </a:lstStyle>
+          <a:p>
+            <a:pPr lvl="0"/>
+            <a:r>
+              <a:rPr lang="en-US"/>
+              <a:t>Click to edit Master text styles</a:t>
+            </a:r>
+          </a:p>
+        </p:txBody>
+      </p:sp>
+      <p:sp>
+        <p:nvSpPr>
+          <p:cNvPr id="3" name="Text Placeholder 2"/>
+          <p:cNvSpPr>
+            <a:spLocks noGrp="1"/>
+          </p:cNvSpPr>
+          <p:nvPr>
+            <p:ph type="body" idx="1"/>
+          </p:nvPr>
+        </p:nvSpPr>
+        <p:spPr>
+          <a:xfrm>
+            <a:off x="684213" y="4301067"/>
+            <a:ext cx="8534400" cy="1684865"/>
+          </a:xfrm>
+        </p:spPr>
+        <p:txBody>
+          <a:bodyPr anchor="ctr">
+            <a:normAutofit/>
+          </a:bodyPr>
+          <a:lstStyle>
+            <a:lvl1pPr marL="0" indent="0" algn="l">
+              <a:buNone/>
+              <a:defRPr sz="2000">
+                <a:solidFill>
+                  <a:schemeClr val="bg2">
+                    <a:lumMod val="50000"/>
+                  </a:schemeClr>
+                </a:solidFill>
+              </a:defRPr>
+            </a:lvl1pPr>
+            <a:lvl2pPr marL="457200" indent="0">
+              <a:buNone/>
+              <a:defRPr sz="1800">
+                <a:solidFill>
+                  <a:schemeClr val="tx1">
+                    <a:tint val="75000"/>
+                  </a:schemeClr>
+                </a:solidFill>
+              </a:defRPr>
+            </a:lvl2pPr>
+            <a:lvl3pPr marL="914400" indent="0">
+              <a:buNone/>
+              <a:defRPr sz="1600">
+                <a:solidFill>
+                  <a:schemeClr val="tx1">
+                    <a:tint val="75000"/>
+                  </a:schemeClr>
+                </a:solidFill>
+              </a:defRPr>
+            </a:lvl3pPr>
+            <a:lvl4pPr marL="1371600" indent="0">
+              <a:buNone/>
+              <a:defRPr sz="1400">
+                <a:solidFill>
+                  <a:schemeClr val="tx1">
+                    <a:tint val="75000"/>
+                  </a:schemeClr>
+                </a:solidFill>
+              </a:defRPr>
+            </a:lvl4pPr>
+            <a:lvl5pPr marL="1828800" indent="0">
+              <a:buNone/>
+              <a:defRPr sz="1400">
+                <a:solidFill>
+                  <a:schemeClr val="tx1">
+                    <a:tint val="75000"/>
+                  </a:schemeClr>
+                </a:solidFill>
+              </a:defRPr>
+            </a:lvl5pPr>
+            <a:lvl6pPr marL="2286000" indent="0">
+              <a:buNone/>
+              <a:defRPr sz="1400">
+                <a:solidFill>
+                  <a:schemeClr val="tx1">
+                    <a:tint val="75000"/>
+                  </a:schemeClr>
+                </a:solidFill>
+              </a:defRPr>
+            </a:lvl6pPr>
+            <a:lvl7pPr marL="2743200" indent="0">
+              <a:buNone/>
+              <a:defRPr sz="1400">
+                <a:solidFill>
+                  <a:schemeClr val="tx1">
+                    <a:tint val="75000"/>
+                  </a:schemeClr>
+                </a:solidFill>
+              </a:defRPr>
+            </a:lvl7pPr>
+            <a:lvl8pPr marL="3200400" indent="0">
+              <a:buNone/>
+              <a:defRPr sz="1400">
+                <a:solidFill>
+                  <a:schemeClr val="tx1">
+                    <a:tint val="75000"/>
+                  </a:schemeClr>
+                </a:solidFill>
+              </a:defRPr>
+            </a:lvl8pPr>
+            <a:lvl9pPr marL="3657600" indent="0">
+              <a:buNone/>
+              <a:defRPr sz="1400">
+                <a:solidFill>
+                  <a:schemeClr val="tx1">
+                    <a:tint val="75000"/>
+                  </a:schemeClr>
+                </a:solidFill>
+              </a:defRPr>
+            </a:lvl9pPr>
+          </a:lstStyle>
+          <a:p>
+            <a:pPr lvl="0"/>
+            <a:r>
+              <a:rPr lang="en-US"/>
+              <a:t>Click to edit Master text styles</a:t>
+            </a:r>
+          </a:p>
+        </p:txBody>
+      </p:sp>
+      <p:sp>
+        <p:nvSpPr>
+          <p:cNvPr id="4" name="Date Placeholder 3"/>
+          <p:cNvSpPr>
+            <a:spLocks noGrp="1"/>
+          </p:cNvSpPr>
+          <p:nvPr>
+            <p:ph type="dt" sz="half" idx="10"/>
+          </p:nvPr>
+        </p:nvSpPr>
+        <p:spPr/>
+        <p:txBody>
+          <a:bodyPr/>
+          <a:lstStyle/>
+          <a:p>
+            <a:fld id="{5BCAD085-E8A6-8845-BD4E-CB4CCA059FC4}" type="datetimeFigureOut">
+              <a:rPr lang="en-US" smtClean="0"/>
+              <a:t>9/23/2026</a:t>
+            </a:fld>
+            <a:endParaRPr lang="en-US"/>
+          </a:p>
+        </p:txBody>
+      </p:sp>
+      <p:sp>
+        <p:nvSpPr>
+          <p:cNvPr id="5" name="Footer Placeholder 4"/>
+          <p:cNvSpPr>
+            <a:spLocks noGrp="1"/>
+          </p:cNvSpPr>
+          <p:nvPr>
+            <p:ph type="ftr" sz="quarter" idx="11"/>
+          </p:nvPr>
+        </p:nvSpPr>
+        <p:spPr/>
+        <p:txBody>
+          <a:bodyPr/>
+          <a:lstStyle/>
+          <a:p>
+            <a:endParaRPr lang="en-US"/>
+          </a:p>
+        </p:txBody>
+      </p:sp>
+      <p:sp>
+        <p:nvSpPr>
+          <p:cNvPr id="6" name="Slide Number Placeholder 5"/>
+          <p:cNvSpPr>
+            <a:spLocks noGrp="1"/>
+          </p:cNvSpPr>
+          <p:nvPr>
+            <p:ph type="sldNum" sz="quarter" idx="12"/>
+          </p:nvPr>
+        </p:nvSpPr>
+        <p:spPr/>
+        <p:txBody>
+          <a:bodyPr/>
+          <a:lstStyle/>
+          <a:p>
+            <a:fld id="{C1FF6DA9-008F-8B48-92A6-B652298478BF}" type="slidenum">
+              <a:rPr lang="en-US" smtClean="0"/>
+              <a:t>‹#›</a:t>
+            </a:fld>
+            <a:endParaRPr lang="en-US"/>
+          </a:p>
+        </p:txBody>
+      </p:sp>
+      <p:sp>
+        <p:nvSpPr>
+          <p:cNvPr id="14" name="TextBox 13"/>
+          <p:cNvSpPr txBox="1"/>
+          <p:nvPr/>
+        </p:nvSpPr>
+        <p:spPr>
+          <a:xfrm>
+            <a:off x="531812" y="812222"/>
+            <a:ext cx="609600" cy="584776"/>
+          </a:xfrm>
+          <a:prstGeom prst="rect">
+            <a:avLst/>
+          </a:prstGeom>
+        </p:spPr>
+        <p:txBody>
+          <a:bodyPr vert="horz" lIns="91440" tIns="45720" rIns="91440" bIns="45720" rtlCol="0" anchor="ctr">
+            <a:noAutofit/>
+          </a:bodyPr>
+          <a:lstStyle/>
+          <a:p>
+            <a:pPr lvl="0"/>
+            <a:r>
+              <a:rPr lang="en-US" sz="8000" dirty="0">
+                <a:solidFill>
+                  <a:schemeClr val="tx1"/>
+                </a:solidFill>
+                <a:effectLst/>
+              </a:rPr>
+              <a:t>“</a:t>
+            </a:r>
+          </a:p>
+        </p:txBody>
+      </p:sp>
+      <p:sp>
+        <p:nvSpPr>
+          <p:cNvPr id="15" name="TextBox 14"/>
+          <p:cNvSpPr txBox="1"/>
+          <p:nvPr/>
+        </p:nvSpPr>
+        <p:spPr>
+          <a:xfrm>
+            <a:off x="10285412" y="2768601"/>
+            <a:ext cx="609600" cy="584776"/>
+          </a:xfrm>
+          <a:prstGeom prst="rect">
+            <a:avLst/>
+          </a:prstGeom>
+        </p:spPr>
+        <p:txBody>
+          <a:bodyPr vert="horz" lIns="91440" tIns="45720" rIns="91440" bIns="45720" rtlCol="0" anchor="ctr">
+            <a:noAutofit/>
+          </a:bodyPr>
+          <a:lstStyle/>
+          <a:p>
+            <a:pPr lvl="0" algn="r"/>
+            <a:r>
+              <a:rPr lang="en-US" sz="8000" dirty="0">
+                <a:solidFill>
+                  <a:schemeClr val="tx1"/>
+                </a:solidFill>
+                <a:effectLst/>
+              </a:rPr>
+              <a:t>”</a:t>
+            </a:r>
+          </a:p>
+        </p:txBody>
+      </p:sp>
+    </p:spTree>
+    <p:extLst>
+      <p:ext uri="{BB962C8B-B14F-4D97-AF65-F5344CB8AC3E}">
+        <p14:creationId xmlns:p14="http://schemas.microsoft.com/office/powerpoint/2010/main" val="3943938472"/>
+      </p:ext>
+    </p:extLst>
+  </p:cSld>
+  <p:clrMapOvr>
+    <a:masterClrMapping/>
+  </p:clrMapOvr>
+</p:sldLayout>
+</file>
+
+<file path=ppt/slideLayouts/slideLayout13.xml><?xml version="1.0" encoding="utf-8"?>
+<p:sldLayout xmlns:a="http://schemas.openxmlformats.org/drawingml/2006/main" xmlns:r="http://schemas.openxmlformats.org/officeDocument/2006/relationships" xmlns:p="http://schemas.openxmlformats.org/presentationml/2006/main" preserve="1">
+  <p:cSld name="Name Card">
+    <p:spTree>
+      <p:nvGrpSpPr>
+        <p:cNvPr id="1" name=""/>
+        <p:cNvGrpSpPr/>
+        <p:nvPr/>
+      </p:nvGrpSpPr>
+      <p:grpSpPr>
+        <a:xfrm>
+          <a:off x="0" y="0"/>
+          <a:ext cx="0" cy="0"/>
+          <a:chOff x="0" y="0"/>
+          <a:chExt cx="0" cy="0"/>
+        </a:xfrm>
+      </p:grpSpPr>
+      <p:sp>
+        <p:nvSpPr>
+          <p:cNvPr id="2" name="Title 1"/>
+          <p:cNvSpPr>
+            <a:spLocks noGrp="1"/>
+          </p:cNvSpPr>
+          <p:nvPr>
+            <p:ph type="title"/>
+          </p:nvPr>
+        </p:nvSpPr>
+        <p:spPr>
+          <a:xfrm>
+            <a:off x="684212" y="3429000"/>
+            <a:ext cx="8534400" cy="1697400"/>
+          </a:xfrm>
+        </p:spPr>
+        <p:txBody>
+          <a:bodyPr anchor="b">
+            <a:normAutofit/>
+          </a:bodyPr>
+          <a:lstStyle>
+            <a:lvl1pPr algn="l">
+              <a:defRPr sz="3200" b="0" cap="all"/>
+            </a:lvl1pPr>
+          </a:lstStyle>
+          <a:p>
+            <a:r>
+              <a:rPr lang="en-US"/>
+              <a:t>Click to edit Master title style</a:t>
+            </a:r>
+            <a:endParaRPr lang="en-US" dirty="0"/>
+          </a:p>
+        </p:txBody>
+      </p:sp>
+      <p:sp>
+        <p:nvSpPr>
+          <p:cNvPr id="3" name="Text Placeholder 2"/>
+          <p:cNvSpPr>
+            <a:spLocks noGrp="1"/>
+          </p:cNvSpPr>
+          <p:nvPr>
+            <p:ph type="body" idx="1"/>
+          </p:nvPr>
+        </p:nvSpPr>
+        <p:spPr>
+          <a:xfrm>
+            <a:off x="684211" y="5132981"/>
+            <a:ext cx="8535990" cy="860400"/>
+          </a:xfrm>
+        </p:spPr>
+        <p:txBody>
+          <a:bodyPr anchor="t">
+            <a:normAutofit/>
+          </a:bodyPr>
+          <a:lstStyle>
+            <a:lvl1pPr marL="0" indent="0" algn="l">
+              <a:buNone/>
+              <a:defRPr sz="2000">
+                <a:solidFill>
+                  <a:schemeClr val="bg2">
+                    <a:lumMod val="50000"/>
+                  </a:schemeClr>
+                </a:solidFill>
+              </a:defRPr>
+            </a:lvl1pPr>
+            <a:lvl2pPr marL="457200" indent="0">
+              <a:buNone/>
+              <a:defRPr sz="1800">
+                <a:solidFill>
+                  <a:schemeClr val="tx1">
+                    <a:tint val="75000"/>
+                  </a:schemeClr>
+                </a:solidFill>
+              </a:defRPr>
+            </a:lvl2pPr>
+            <a:lvl3pPr marL="914400" indent="0">
+              <a:buNone/>
+              <a:defRPr sz="1600">
+                <a:solidFill>
+                  <a:schemeClr val="tx1">
+                    <a:tint val="75000"/>
+                  </a:schemeClr>
+                </a:solidFill>
+              </a:defRPr>
+            </a:lvl3pPr>
+            <a:lvl4pPr marL="1371600" indent="0">
+              <a:buNone/>
+              <a:defRPr sz="1400">
+                <a:solidFill>
+                  <a:schemeClr val="tx1">
+                    <a:tint val="75000"/>
+                  </a:schemeClr>
+                </a:solidFill>
+              </a:defRPr>
+            </a:lvl4pPr>
+            <a:lvl5pPr marL="1828800" indent="0">
+              <a:buNone/>
+              <a:defRPr sz="1400">
+                <a:solidFill>
+                  <a:schemeClr val="tx1">
+                    <a:tint val="75000"/>
+                  </a:schemeClr>
+                </a:solidFill>
+              </a:defRPr>
+            </a:lvl5pPr>
+            <a:lvl6pPr marL="2286000" indent="0">
+              <a:buNone/>
+              <a:defRPr sz="1400">
+                <a:solidFill>
+                  <a:schemeClr val="tx1">
+                    <a:tint val="75000"/>
+                  </a:schemeClr>
+                </a:solidFill>
+              </a:defRPr>
+            </a:lvl6pPr>
+            <a:lvl7pPr marL="2743200" indent="0">
+              <a:buNone/>
+              <a:defRPr sz="1400">
+                <a:solidFill>
+                  <a:schemeClr val="tx1">
+                    <a:tint val="75000"/>
+                  </a:schemeClr>
+                </a:solidFill>
+              </a:defRPr>
+            </a:lvl7pPr>
+            <a:lvl8pPr marL="3200400" indent="0">
+              <a:buNone/>
+              <a:defRPr sz="1400">
+                <a:solidFill>
+                  <a:schemeClr val="tx1">
+                    <a:tint val="75000"/>
+                  </a:schemeClr>
+                </a:solidFill>
+              </a:defRPr>
+            </a:lvl8pPr>
+            <a:lvl9pPr marL="3657600" indent="0">
+              <a:buNone/>
+              <a:defRPr sz="1400">
+                <a:solidFill>
+                  <a:schemeClr val="tx1">
+                    <a:tint val="75000"/>
+                  </a:schemeClr>
+                </a:solidFill>
+              </a:defRPr>
+            </a:lvl9pPr>
+          </a:lstStyle>
+          <a:p>
+            <a:pPr lvl="0"/>
+            <a:r>
+              <a:rPr lang="en-US"/>
+              <a:t>Click to edit Master text styles</a:t>
+            </a:r>
+          </a:p>
+        </p:txBody>
+      </p:sp>
+      <p:sp>
+        <p:nvSpPr>
+          <p:cNvPr id="4" name="Date Placeholder 3"/>
+          <p:cNvSpPr>
+            <a:spLocks noGrp="1"/>
+          </p:cNvSpPr>
+          <p:nvPr>
+            <p:ph type="dt" sz="half" idx="10"/>
+          </p:nvPr>
+        </p:nvSpPr>
+        <p:spPr/>
+        <p:txBody>
+          <a:bodyPr/>
+          <a:lstStyle/>
+          <a:p>
+            <a:fld id="{5BCAD085-E8A6-8845-BD4E-CB4CCA059FC4}" type="datetimeFigureOut">
+              <a:rPr lang="en-US" smtClean="0"/>
+              <a:t>9/23/2026</a:t>
+            </a:fld>
+            <a:endParaRPr lang="en-US"/>
+          </a:p>
+        </p:txBody>
+      </p:sp>
+      <p:sp>
+        <p:nvSpPr>
+          <p:cNvPr id="5" name="Footer Placeholder 4"/>
+          <p:cNvSpPr>
+            <a:spLocks noGrp="1"/>
+          </p:cNvSpPr>
+          <p:nvPr>
+            <p:ph type="ftr" sz="quarter" idx="11"/>
+          </p:nvPr>
+        </p:nvSpPr>
+        <p:spPr/>
+        <p:txBody>
+          <a:bodyPr/>
+          <a:lstStyle/>
+          <a:p>
+            <a:endParaRPr lang="en-US"/>
+          </a:p>
+        </p:txBody>
+      </p:sp>
+      <p:sp>
+        <p:nvSpPr>
+          <p:cNvPr id="6" name="Slide Number Placeholder 5"/>
+          <p:cNvSpPr>
+            <a:spLocks noGrp="1"/>
+          </p:cNvSpPr>
+          <p:nvPr>
+            <p:ph type="sldNum" sz="quarter" idx="12"/>
+          </p:nvPr>
+        </p:nvSpPr>
+        <p:spPr/>
+        <p:txBody>
+          <a:bodyPr/>
+          <a:lstStyle/>
+          <a:p>
+            <a:fld id="{C1FF6DA9-008F-8B48-92A6-B652298478BF}" type="slidenum">
+              <a:rPr lang="en-US" smtClean="0"/>
+              <a:t>‹#›</a:t>
+            </a:fld>
+            <a:endParaRPr lang="en-US"/>
+          </a:p>
+        </p:txBody>
+      </p:sp>
+    </p:spTree>
+    <p:extLst>
+      <p:ext uri="{BB962C8B-B14F-4D97-AF65-F5344CB8AC3E}">
+        <p14:creationId xmlns:p14="http://schemas.microsoft.com/office/powerpoint/2010/main" val="710266498"/>
+      </p:ext>
+    </p:extLst>
+  </p:cSld>
+  <p:clrMapOvr>
+    <a:masterClrMapping/>
+  </p:clrMapOvr>
+</p:sldLayout>
+</file>
+
+<file path=ppt/slideLayouts/slideLayout14.xml><?xml version="1.0" encoding="utf-8"?>
+<p:sldLayout xmlns:a="http://schemas.openxmlformats.org/drawingml/2006/main" xmlns:r="http://schemas.openxmlformats.org/officeDocument/2006/relationships" xmlns:p="http://schemas.openxmlformats.org/presentationml/2006/main" preserve="1">
+  <p:cSld name="Quote Name Card">
+    <p:spTree>
+      <p:nvGrpSpPr>
+        <p:cNvPr id="1" name=""/>
+        <p:cNvGrpSpPr/>
+        <p:nvPr/>
+      </p:nvGrpSpPr>
+      <p:grpSpPr>
+        <a:xfrm>
+          <a:off x="0" y="0"/>
+          <a:ext cx="0" cy="0"/>
+          <a:chOff x="0" y="0"/>
+          <a:chExt cx="0" cy="0"/>
+        </a:xfrm>
+      </p:grpSpPr>
+      <p:sp>
+        <p:nvSpPr>
+          <p:cNvPr id="2" name="Title 1"/>
+          <p:cNvSpPr>
+            <a:spLocks noGrp="1"/>
+          </p:cNvSpPr>
+          <p:nvPr>
+            <p:ph type="title"/>
+          </p:nvPr>
+        </p:nvSpPr>
+        <p:spPr>
+          <a:xfrm>
+            <a:off x="1141413" y="685800"/>
+            <a:ext cx="9144000" cy="2743200"/>
+          </a:xfrm>
+        </p:spPr>
+        <p:txBody>
+          <a:bodyPr anchor="ctr">
+            <a:normAutofit/>
+          </a:bodyPr>
+          <a:lstStyle>
+            <a:lvl1pPr algn="l">
+              <a:defRPr sz="3200" b="0" cap="all">
+                <a:solidFill>
+                  <a:schemeClr val="tx1"/>
+                </a:solidFill>
+              </a:defRPr>
+            </a:lvl1pPr>
+          </a:lstStyle>
+          <a:p>
+            <a:r>
+              <a:rPr lang="en-US"/>
+              <a:t>Click to edit Master title style</a:t>
+            </a:r>
+            <a:endParaRPr lang="en-US" dirty="0"/>
+          </a:p>
+        </p:txBody>
+      </p:sp>
+      <p:sp>
+        <p:nvSpPr>
+          <p:cNvPr id="10" name="Text Placeholder 9"/>
+          <p:cNvSpPr>
+            <a:spLocks noGrp="1"/>
+          </p:cNvSpPr>
+          <p:nvPr>
+            <p:ph type="body" sz="quarter" idx="13"/>
+          </p:nvPr>
+        </p:nvSpPr>
+        <p:spPr>
+          <a:xfrm>
+            <a:off x="684212" y="3928534"/>
+            <a:ext cx="8534401" cy="1049866"/>
+          </a:xfrm>
+        </p:spPr>
+        <p:txBody>
+          <a:bodyPr vert="horz" lIns="91440" tIns="45720" rIns="91440" bIns="45720" rtlCol="0" anchor="b">
+            <a:normAutofit/>
+          </a:bodyPr>
+          <a:lstStyle>
+            <a:lvl1pPr>
+              <a:buNone/>
+              <a:defRPr lang="en-US" sz="2400" b="0" cap="all" dirty="0">
+                <a:ln w="3175" cmpd="sng">
+                  <a:noFill/>
+                </a:ln>
+                <a:solidFill>
+                  <a:schemeClr val="tx1"/>
+                </a:solidFill>
+                <a:effectLst/>
+              </a:defRPr>
+            </a:lvl1pPr>
+          </a:lstStyle>
+          <a:p>
+            <a:pPr marL="0" lvl="0">
+              <a:spcBef>
+                <a:spcPct val="0"/>
+              </a:spcBef>
+              <a:buNone/>
+            </a:pPr>
+            <a:r>
+              <a:rPr lang="en-US"/>
+              <a:t>Click to edit Master text styles</a:t>
+            </a:r>
+          </a:p>
+        </p:txBody>
+      </p:sp>
+      <p:sp>
+        <p:nvSpPr>
+          <p:cNvPr id="3" name="Text Placeholder 2"/>
+          <p:cNvSpPr>
+            <a:spLocks noGrp="1"/>
+          </p:cNvSpPr>
+          <p:nvPr>
+            <p:ph type="body" idx="1"/>
+          </p:nvPr>
+        </p:nvSpPr>
+        <p:spPr>
+          <a:xfrm>
+            <a:off x="684211" y="4978400"/>
+            <a:ext cx="8534401" cy="1016000"/>
+          </a:xfrm>
+        </p:spPr>
+        <p:txBody>
+          <a:bodyPr anchor="t">
+            <a:normAutofit/>
+          </a:bodyPr>
+          <a:lstStyle>
+            <a:lvl1pPr marL="0" indent="0" algn="l">
+              <a:buNone/>
+              <a:defRPr sz="1800">
+                <a:solidFill>
+                  <a:schemeClr val="bg2">
+                    <a:lumMod val="50000"/>
+                  </a:schemeClr>
+                </a:solidFill>
+              </a:defRPr>
+            </a:lvl1pPr>
+            <a:lvl2pPr marL="457200" indent="0">
+              <a:buNone/>
+              <a:defRPr sz="1800">
+                <a:solidFill>
+                  <a:schemeClr val="tx1">
+                    <a:tint val="75000"/>
+                  </a:schemeClr>
+                </a:solidFill>
+              </a:defRPr>
+            </a:lvl2pPr>
+            <a:lvl3pPr marL="914400" indent="0">
+              <a:buNone/>
+              <a:defRPr sz="1600">
+                <a:solidFill>
+                  <a:schemeClr val="tx1">
+                    <a:tint val="75000"/>
+                  </a:schemeClr>
+                </a:solidFill>
+              </a:defRPr>
+            </a:lvl3pPr>
+            <a:lvl4pPr marL="1371600" indent="0">
+              <a:buNone/>
+              <a:defRPr sz="1400">
+                <a:solidFill>
+                  <a:schemeClr val="tx1">
+                    <a:tint val="75000"/>
+                  </a:schemeClr>
+                </a:solidFill>
+              </a:defRPr>
+            </a:lvl4pPr>
+            <a:lvl5pPr marL="1828800" indent="0">
+              <a:buNone/>
+              <a:defRPr sz="1400">
+                <a:solidFill>
+                  <a:schemeClr val="tx1">
+                    <a:tint val="75000"/>
+                  </a:schemeClr>
+                </a:solidFill>
+              </a:defRPr>
+            </a:lvl5pPr>
+            <a:lvl6pPr marL="2286000" indent="0">
+              <a:buNone/>
+              <a:defRPr sz="1400">
+                <a:solidFill>
+                  <a:schemeClr val="tx1">
+                    <a:tint val="75000"/>
+                  </a:schemeClr>
+                </a:solidFill>
+              </a:defRPr>
+            </a:lvl6pPr>
+            <a:lvl7pPr marL="2743200" indent="0">
+              <a:buNone/>
+              <a:defRPr sz="1400">
+                <a:solidFill>
+                  <a:schemeClr val="tx1">
+                    <a:tint val="75000"/>
+                  </a:schemeClr>
+                </a:solidFill>
+              </a:defRPr>
+            </a:lvl7pPr>
+            <a:lvl8pPr marL="3200400" indent="0">
+              <a:buNone/>
+              <a:defRPr sz="1400">
+                <a:solidFill>
+                  <a:schemeClr val="tx1">
+                    <a:tint val="75000"/>
+                  </a:schemeClr>
+                </a:solidFill>
+              </a:defRPr>
+            </a:lvl8pPr>
+            <a:lvl9pPr marL="3657600" indent="0">
+              <a:buNone/>
+              <a:defRPr sz="1400">
+                <a:solidFill>
+                  <a:schemeClr val="tx1">
+                    <a:tint val="75000"/>
+                  </a:schemeClr>
+                </a:solidFill>
+              </a:defRPr>
+            </a:lvl9pPr>
+          </a:lstStyle>
+          <a:p>
+            <a:pPr lvl="0"/>
+            <a:r>
+              <a:rPr lang="en-US"/>
+              <a:t>Click to edit Master text styles</a:t>
+            </a:r>
+          </a:p>
+        </p:txBody>
+      </p:sp>
+      <p:sp>
+        <p:nvSpPr>
+          <p:cNvPr id="4" name="Date Placeholder 3"/>
+          <p:cNvSpPr>
+            <a:spLocks noGrp="1"/>
+          </p:cNvSpPr>
+          <p:nvPr>
+            <p:ph type="dt" sz="half" idx="10"/>
+          </p:nvPr>
+        </p:nvSpPr>
+        <p:spPr/>
+        <p:txBody>
+          <a:bodyPr/>
+          <a:lstStyle/>
+          <a:p>
+            <a:fld id="{5BCAD085-E8A6-8845-BD4E-CB4CCA059FC4}" type="datetimeFigureOut">
+              <a:rPr lang="en-US" smtClean="0"/>
+              <a:t>9/23/2026</a:t>
+            </a:fld>
+            <a:endParaRPr lang="en-US"/>
+          </a:p>
+        </p:txBody>
+      </p:sp>
+      <p:sp>
+        <p:nvSpPr>
+          <p:cNvPr id="5" name="Footer Placeholder 4"/>
+          <p:cNvSpPr>
+            <a:spLocks noGrp="1"/>
+          </p:cNvSpPr>
+          <p:nvPr>
+            <p:ph type="ftr" sz="quarter" idx="11"/>
+          </p:nvPr>
+        </p:nvSpPr>
+        <p:spPr/>
+        <p:txBody>
+          <a:bodyPr/>
+          <a:lstStyle/>
+          <a:p>
+            <a:endParaRPr lang="en-US"/>
+          </a:p>
+        </p:txBody>
+      </p:sp>
+      <p:sp>
+        <p:nvSpPr>
+          <p:cNvPr id="6" name="Slide Number Placeholder 5"/>
+          <p:cNvSpPr>
+            <a:spLocks noGrp="1"/>
+          </p:cNvSpPr>
+          <p:nvPr>
+            <p:ph type="sldNum" sz="quarter" idx="12"/>
+          </p:nvPr>
+        </p:nvSpPr>
+        <p:spPr/>
+        <p:txBody>
+          <a:bodyPr/>
+          <a:lstStyle/>
+          <a:p>
+            <a:fld id="{C1FF6DA9-008F-8B48-92A6-B652298478BF}" type="slidenum">
+              <a:rPr lang="en-US" smtClean="0"/>
+              <a:t>‹#›</a:t>
+            </a:fld>
+            <a:endParaRPr lang="en-US"/>
+          </a:p>
+        </p:txBody>
+      </p:sp>
+      <p:sp>
+        <p:nvSpPr>
+          <p:cNvPr id="11" name="TextBox 10"/>
+          <p:cNvSpPr txBox="1"/>
+          <p:nvPr/>
+        </p:nvSpPr>
+        <p:spPr>
+          <a:xfrm>
+            <a:off x="531812" y="812222"/>
+            <a:ext cx="609600" cy="584776"/>
+          </a:xfrm>
+          <a:prstGeom prst="rect">
+            <a:avLst/>
+          </a:prstGeom>
+        </p:spPr>
+        <p:txBody>
+          <a:bodyPr vert="horz" lIns="91440" tIns="45720" rIns="91440" bIns="45720" rtlCol="0" anchor="ctr">
+            <a:noAutofit/>
+          </a:bodyPr>
+          <a:lstStyle/>
+          <a:p>
+            <a:pPr lvl="0"/>
+            <a:r>
+              <a:rPr lang="en-US" sz="8000" dirty="0">
+                <a:solidFill>
+                  <a:schemeClr val="tx1"/>
+                </a:solidFill>
+                <a:effectLst/>
+              </a:rPr>
+              <a:t>“</a:t>
+            </a:r>
+          </a:p>
+        </p:txBody>
+      </p:sp>
+      <p:sp>
+        <p:nvSpPr>
+          <p:cNvPr id="12" name="TextBox 11"/>
+          <p:cNvSpPr txBox="1"/>
+          <p:nvPr/>
+        </p:nvSpPr>
+        <p:spPr>
+          <a:xfrm>
+            <a:off x="10285412" y="2768601"/>
+            <a:ext cx="609600" cy="584776"/>
+          </a:xfrm>
+          <a:prstGeom prst="rect">
+            <a:avLst/>
+          </a:prstGeom>
+        </p:spPr>
+        <p:txBody>
+          <a:bodyPr vert="horz" lIns="91440" tIns="45720" rIns="91440" bIns="45720" rtlCol="0" anchor="ctr">
+            <a:noAutofit/>
+          </a:bodyPr>
+          <a:lstStyle/>
+          <a:p>
+            <a:pPr lvl="0" algn="r"/>
+            <a:r>
+              <a:rPr lang="en-US" sz="8000" dirty="0">
+                <a:solidFill>
+                  <a:schemeClr val="tx1"/>
+                </a:solidFill>
+                <a:effectLst/>
+              </a:rPr>
+              <a:t>”</a:t>
+            </a:r>
+          </a:p>
+        </p:txBody>
+      </p:sp>
+    </p:spTree>
+    <p:extLst>
+      <p:ext uri="{BB962C8B-B14F-4D97-AF65-F5344CB8AC3E}">
+        <p14:creationId xmlns:p14="http://schemas.microsoft.com/office/powerpoint/2010/main" val="1574618324"/>
+      </p:ext>
+    </p:extLst>
+  </p:cSld>
+  <p:clrMapOvr>
+    <a:masterClrMapping/>
+  </p:clrMapOvr>
+</p:sldLayout>
+</file>
+
+<file path=ppt/slideLayouts/slideLayout15.xml><?xml version="1.0" encoding="utf-8"?>
+<p:sldLayout xmlns:a="http://schemas.openxmlformats.org/drawingml/2006/main" xmlns:r="http://schemas.openxmlformats.org/officeDocument/2006/relationships" xmlns:p="http://schemas.openxmlformats.org/presentationml/2006/main" preserve="1">
+  <p:cSld name="True or False">
+    <p:spTree>
+      <p:nvGrpSpPr>
+        <p:cNvPr id="1" name=""/>
+        <p:cNvGrpSpPr/>
+        <p:nvPr/>
+      </p:nvGrpSpPr>
+      <p:grpSpPr>
+        <a:xfrm>
+          <a:off x="0" y="0"/>
+          <a:ext cx="0" cy="0"/>
+          <a:chOff x="0" y="0"/>
+          <a:chExt cx="0" cy="0"/>
+        </a:xfrm>
+      </p:grpSpPr>
+      <p:sp>
+        <p:nvSpPr>
+          <p:cNvPr id="2" name="Title 1"/>
+          <p:cNvSpPr>
+            <a:spLocks noGrp="1"/>
+          </p:cNvSpPr>
+          <p:nvPr>
+            <p:ph type="title"/>
+          </p:nvPr>
+        </p:nvSpPr>
+        <p:spPr>
+          <a:xfrm>
+            <a:off x="684213" y="685800"/>
+            <a:ext cx="10058400" cy="2743200"/>
+          </a:xfrm>
+        </p:spPr>
+        <p:txBody>
+          <a:bodyPr vert="horz" lIns="91440" tIns="45720" rIns="91440" bIns="45720" rtlCol="0" anchor="ctr">
+            <a:normAutofit/>
+          </a:bodyPr>
+          <a:lstStyle>
+            <a:lvl1pPr>
+              <a:defRPr lang="en-US" b="0" dirty="0"/>
+            </a:lvl1pPr>
+          </a:lstStyle>
+          <a:p>
+            <a:pPr marL="0" lvl="0"/>
+            <a:r>
+              <a:rPr lang="en-US"/>
+              <a:t>Click to edit Master title style</a:t>
+            </a:r>
+            <a:endParaRPr lang="en-US" dirty="0"/>
+          </a:p>
+        </p:txBody>
+      </p:sp>
+      <p:sp>
+        <p:nvSpPr>
+          <p:cNvPr id="10" name="Text Placeholder 9"/>
+          <p:cNvSpPr>
+            <a:spLocks noGrp="1"/>
+          </p:cNvSpPr>
+          <p:nvPr>
+            <p:ph type="body" sz="quarter" idx="13"/>
+          </p:nvPr>
+        </p:nvSpPr>
+        <p:spPr>
+          <a:xfrm>
+            <a:off x="684212" y="3928534"/>
+            <a:ext cx="8534400" cy="838200"/>
+          </a:xfrm>
+        </p:spPr>
+        <p:txBody>
+          <a:bodyPr vert="horz" lIns="91440" tIns="45720" rIns="91440" bIns="45720" rtlCol="0" anchor="b">
+            <a:normAutofit/>
+          </a:bodyPr>
+          <a:lstStyle>
+            <a:lvl1pPr>
+              <a:buNone/>
+              <a:defRPr lang="en-US" sz="2400" b="0" cap="all" dirty="0">
+                <a:ln w="3175" cmpd="sng">
+                  <a:noFill/>
+                </a:ln>
+                <a:solidFill>
+                  <a:schemeClr val="tx1"/>
+                </a:solidFill>
+                <a:effectLst/>
+              </a:defRPr>
+            </a:lvl1pPr>
+          </a:lstStyle>
+          <a:p>
+            <a:pPr marL="0" lvl="0">
+              <a:spcBef>
+                <a:spcPct val="0"/>
+              </a:spcBef>
+              <a:buNone/>
+            </a:pPr>
+            <a:r>
+              <a:rPr lang="en-US"/>
+              <a:t>Click to edit Master text styles</a:t>
+            </a:r>
+          </a:p>
+        </p:txBody>
+      </p:sp>
+      <p:sp>
+        <p:nvSpPr>
+          <p:cNvPr id="3" name="Text Placeholder 2"/>
+          <p:cNvSpPr>
+            <a:spLocks noGrp="1"/>
+          </p:cNvSpPr>
+          <p:nvPr>
+            <p:ph type="body" idx="1"/>
+          </p:nvPr>
+        </p:nvSpPr>
+        <p:spPr>
+          <a:xfrm>
+            <a:off x="684211" y="4766732"/>
+            <a:ext cx="8534401" cy="1227667"/>
+          </a:xfrm>
+        </p:spPr>
+        <p:txBody>
+          <a:bodyPr anchor="t">
+            <a:normAutofit/>
+          </a:bodyPr>
+          <a:lstStyle>
+            <a:lvl1pPr marL="0" indent="0" algn="l">
+              <a:buNone/>
+              <a:defRPr sz="1800">
+                <a:solidFill>
+                  <a:schemeClr val="bg2">
+                    <a:lumMod val="50000"/>
+                  </a:schemeClr>
+                </a:solidFill>
+              </a:defRPr>
+            </a:lvl1pPr>
+            <a:lvl2pPr marL="457200" indent="0">
+              <a:buNone/>
+              <a:defRPr sz="1800">
+                <a:solidFill>
+                  <a:schemeClr val="tx1">
+                    <a:tint val="75000"/>
+                  </a:schemeClr>
+                </a:solidFill>
+              </a:defRPr>
+            </a:lvl2pPr>
+            <a:lvl3pPr marL="914400" indent="0">
+              <a:buNone/>
+              <a:defRPr sz="1600">
+                <a:solidFill>
+                  <a:schemeClr val="tx1">
+                    <a:tint val="75000"/>
+                  </a:schemeClr>
+                </a:solidFill>
+              </a:defRPr>
+            </a:lvl3pPr>
+            <a:lvl4pPr marL="1371600" indent="0">
+              <a:buNone/>
+              <a:defRPr sz="1400">
+                <a:solidFill>
+                  <a:schemeClr val="tx1">
+                    <a:tint val="75000"/>
+                  </a:schemeClr>
+                </a:solidFill>
+              </a:defRPr>
+            </a:lvl4pPr>
+            <a:lvl5pPr marL="1828800" indent="0">
+              <a:buNone/>
+              <a:defRPr sz="1400">
+                <a:solidFill>
+                  <a:schemeClr val="tx1">
+                    <a:tint val="75000"/>
+                  </a:schemeClr>
+                </a:solidFill>
+              </a:defRPr>
+            </a:lvl5pPr>
+            <a:lvl6pPr marL="2286000" indent="0">
+              <a:buNone/>
+              <a:defRPr sz="1400">
+                <a:solidFill>
+                  <a:schemeClr val="tx1">
+                    <a:tint val="75000"/>
+                  </a:schemeClr>
+                </a:solidFill>
+              </a:defRPr>
+            </a:lvl6pPr>
+            <a:lvl7pPr marL="2743200" indent="0">
+              <a:buNone/>
+              <a:defRPr sz="1400">
+                <a:solidFill>
+                  <a:schemeClr val="tx1">
+                    <a:tint val="75000"/>
+                  </a:schemeClr>
+                </a:solidFill>
+              </a:defRPr>
+            </a:lvl7pPr>
+            <a:lvl8pPr marL="3200400" indent="0">
+              <a:buNone/>
+              <a:defRPr sz="1400">
+                <a:solidFill>
+                  <a:schemeClr val="tx1">
+                    <a:tint val="75000"/>
+                  </a:schemeClr>
+                </a:solidFill>
+              </a:defRPr>
+            </a:lvl8pPr>
+            <a:lvl9pPr marL="3657600" indent="0">
+              <a:buNone/>
+              <a:defRPr sz="1400">
+                <a:solidFill>
+                  <a:schemeClr val="tx1">
+                    <a:tint val="75000"/>
+                  </a:schemeClr>
+                </a:solidFill>
+              </a:defRPr>
+            </a:lvl9pPr>
+          </a:lstStyle>
+          <a:p>
+            <a:pPr lvl="0"/>
+            <a:r>
+              <a:rPr lang="en-US"/>
+              <a:t>Click to edit Master text styles</a:t>
+            </a:r>
+          </a:p>
+        </p:txBody>
+      </p:sp>
+      <p:sp>
+        <p:nvSpPr>
+          <p:cNvPr id="4" name="Date Placeholder 3"/>
+          <p:cNvSpPr>
+            <a:spLocks noGrp="1"/>
+          </p:cNvSpPr>
+          <p:nvPr>
+            <p:ph type="dt" sz="half" idx="10"/>
+          </p:nvPr>
+        </p:nvSpPr>
+        <p:spPr/>
+        <p:txBody>
+          <a:bodyPr/>
+          <a:lstStyle/>
+          <a:p>
+            <a:fld id="{5BCAD085-E8A6-8845-BD4E-CB4CCA059FC4}" type="datetimeFigureOut">
+              <a:rPr lang="en-US" smtClean="0"/>
+              <a:t>9/23/2026</a:t>
+            </a:fld>
+            <a:endParaRPr lang="en-US"/>
+          </a:p>
+        </p:txBody>
+      </p:sp>
+      <p:sp>
+        <p:nvSpPr>
+          <p:cNvPr id="5" name="Footer Placeholder 4"/>
+          <p:cNvSpPr>
+            <a:spLocks noGrp="1"/>
+          </p:cNvSpPr>
+          <p:nvPr>
+            <p:ph type="ftr" sz="quarter" idx="11"/>
+          </p:nvPr>
+        </p:nvSpPr>
+        <p:spPr/>
+        <p:txBody>
+          <a:bodyPr/>
+          <a:lstStyle/>
+          <a:p>
+            <a:endParaRPr lang="en-US"/>
+          </a:p>
+        </p:txBody>
+      </p:sp>
+      <p:sp>
+        <p:nvSpPr>
+          <p:cNvPr id="6" name="Slide Number Placeholder 5"/>
+          <p:cNvSpPr>
+            <a:spLocks noGrp="1"/>
+          </p:cNvSpPr>
+          <p:nvPr>
+            <p:ph type="sldNum" sz="quarter" idx="12"/>
+          </p:nvPr>
+        </p:nvSpPr>
+        <p:spPr/>
+        <p:txBody>
+          <a:bodyPr/>
+          <a:lstStyle/>
+          <a:p>
+            <a:fld id="{C1FF6DA9-008F-8B48-92A6-B652298478BF}" type="slidenum">
+              <a:rPr lang="en-US" smtClean="0"/>
+              <a:t>‹#›</a:t>
+            </a:fld>
+            <a:endParaRPr lang="en-US"/>
+          </a:p>
+        </p:txBody>
+      </p:sp>
+    </p:spTree>
+    <p:extLst>
+      <p:ext uri="{BB962C8B-B14F-4D97-AF65-F5344CB8AC3E}">
+        <p14:creationId xmlns:p14="http://schemas.microsoft.com/office/powerpoint/2010/main" val="1518006234"/>
+      </p:ext>
+    </p:extLst>
+  </p:cSld>
+  <p:clrMapOvr>
+    <a:masterClrMapping/>
+  </p:clrMapOvr>
+</p:sldLayout>
+</file>
+
+<file path=ppt/slideLayouts/slideLayout16.xml><?xml version="1.0" encoding="utf-8"?>
 <p:sldLayout xmlns:a="http://schemas.openxmlformats.org/drawingml/2006/main" xmlns:r="http://schemas.openxmlformats.org/officeDocument/2006/relationships" xmlns:p="http://schemas.openxmlformats.org/presentationml/2006/main" type="vertTx" preserve="1">
   <p:cSld name="Title and Vertical Text">
     <p:spTree>
@@ -393,13 +2534,17 @@
         <p:spPr/>
         <p:txBody>
           <a:bodyPr/>
-          <a:lstStyle/>
-          <a:p>
-            <a:r>
-              <a:rPr lang="en-US" smtClean="0"/>
+          <a:lstStyle>
+            <a:lvl1pPr algn="l">
+              <a:defRPr/>
+            </a:lvl1pPr>
+          </a:lstStyle>
+          <a:p>
+            <a:r>
+              <a:rPr lang="en-US"/>
               <a:t>Click to edit Master title style</a:t>
             </a:r>
-            <a:endParaRPr lang="en-US"/>
+            <a:endParaRPr lang="en-US" dirty="0"/>
           </a:p>
         </p:txBody>
       </p:sp>
@@ -415,43 +2560,43 @@
         </p:nvSpPr>
         <p:spPr/>
         <p:txBody>
-          <a:bodyPr vert="eaVert"/>
+          <a:bodyPr vert="eaVert" anchor="t"/>
           <a:lstStyle/>
           <a:p>
             <a:pPr lvl="0"/>
             <a:r>
-              <a:rPr lang="en-US" smtClean="0"/>
+              <a:rPr lang="en-US"/>
               <a:t>Click to edit Master text styles</a:t>
             </a:r>
           </a:p>
           <a:p>
             <a:pPr lvl="1"/>
             <a:r>
-              <a:rPr lang="en-US" smtClean="0"/>
+              <a:rPr lang="en-US"/>
               <a:t>Second level</a:t>
             </a:r>
           </a:p>
           <a:p>
             <a:pPr lvl="2"/>
             <a:r>
-              <a:rPr lang="en-US" smtClean="0"/>
+              <a:rPr lang="en-US"/>
               <a:t>Third level</a:t>
             </a:r>
           </a:p>
           <a:p>
             <a:pPr lvl="3"/>
             <a:r>
-              <a:rPr lang="en-US" smtClean="0"/>
+              <a:rPr lang="en-US"/>
               <a:t>Fourth level</a:t>
             </a:r>
           </a:p>
           <a:p>
             <a:pPr lvl="4"/>
             <a:r>
-              <a:rPr lang="en-US" smtClean="0"/>
+              <a:rPr lang="en-US"/>
               <a:t>Fifth level</a:t>
             </a:r>
-            <a:endParaRPr lang="en-US"/>
+            <a:endParaRPr lang="en-US" dirty="0"/>
           </a:p>
         </p:txBody>
       </p:sp>
@@ -472,7 +2617,7 @@
           <a:p>
             <a:fld id="{5BCAD085-E8A6-8845-BD4E-CB4CCA059FC4}" type="datetimeFigureOut">
               <a:rPr lang="en-US" smtClean="0"/>
-              <a:t>1/27/13</a:t>
+              <a:t>9/23/2026</a:t>
             </a:fld>
             <a:endParaRPr lang="en-US"/>
           </a:p>
@@ -523,7 +2668,7 @@
     </p:spTree>
     <p:extLst>
       <p:ext uri="{BB962C8B-B14F-4D97-AF65-F5344CB8AC3E}">
-        <p14:creationId xmlns:p14="http://schemas.microsoft.com/office/powerpoint/2010/main" val="2910927964"/>
+        <p14:creationId xmlns:p14="http://schemas.microsoft.com/office/powerpoint/2010/main" val="484983038"/>
       </p:ext>
     </p:extLst>
   </p:cSld>
@@ -533,7 +2678,7 @@
 </p:sldLayout>
 </file>
 
-<file path=ppt/slideLayouts/slideLayout11.xml><?xml version="1.0" encoding="utf-8"?>
+<file path=ppt/slideLayouts/slideLayout17.xml><?xml version="1.0" encoding="utf-8"?>
 <p:sldLayout xmlns:a="http://schemas.openxmlformats.org/drawingml/2006/main" xmlns:r="http://schemas.openxmlformats.org/officeDocument/2006/relationships" xmlns:p="http://schemas.openxmlformats.org/presentationml/2006/main" type="vertTitleAndTx" preserve="1">
   <p:cSld name="Vertical Title and Text">
     <p:spTree>
@@ -562,8 +2707,8 @@
         </p:nvSpPr>
         <p:spPr>
           <a:xfrm>
-            <a:off x="6629400" y="274638"/>
-            <a:ext cx="2057400" cy="5851525"/>
+            <a:off x="8685212" y="685800"/>
+            <a:ext cx="2057400" cy="4572000"/>
           </a:xfrm>
         </p:spPr>
         <p:txBody>
@@ -571,10 +2716,10 @@
           <a:lstStyle/>
           <a:p>
             <a:r>
-              <a:rPr lang="en-US" smtClean="0"/>
+              <a:rPr lang="en-US"/>
               <a:t>Click to edit Master title style</a:t>
             </a:r>
-            <a:endParaRPr lang="en-US"/>
+            <a:endParaRPr lang="en-US" dirty="0"/>
           </a:p>
         </p:txBody>
       </p:sp>
@@ -590,48 +2735,48 @@
         </p:nvSpPr>
         <p:spPr>
           <a:xfrm>
-            <a:off x="457200" y="274638"/>
-            <a:ext cx="6019800" cy="5851525"/>
-          </a:xfrm>
-        </p:spPr>
-        <p:txBody>
-          <a:bodyPr vert="eaVert"/>
+            <a:off x="685800" y="685800"/>
+            <a:ext cx="7823200" cy="5308600"/>
+          </a:xfrm>
+        </p:spPr>
+        <p:txBody>
+          <a:bodyPr vert="eaVert" anchor="t"/>
           <a:lstStyle/>
           <a:p>
             <a:pPr lvl="0"/>
             <a:r>
-              <a:rPr lang="en-US" smtClean="0"/>
+              <a:rPr lang="en-US"/>
               <a:t>Click to edit Master text styles</a:t>
             </a:r>
           </a:p>
           <a:p>
             <a:pPr lvl="1"/>
             <a:r>
-              <a:rPr lang="en-US" smtClean="0"/>
+              <a:rPr lang="en-US"/>
               <a:t>Second level</a:t>
             </a:r>
           </a:p>
           <a:p>
             <a:pPr lvl="2"/>
             <a:r>
-              <a:rPr lang="en-US" smtClean="0"/>
+              <a:rPr lang="en-US"/>
               <a:t>Third level</a:t>
             </a:r>
           </a:p>
           <a:p>
             <a:pPr lvl="3"/>
             <a:r>
-              <a:rPr lang="en-US" smtClean="0"/>
+              <a:rPr lang="en-US"/>
               <a:t>Fourth level</a:t>
             </a:r>
           </a:p>
           <a:p>
             <a:pPr lvl="4"/>
             <a:r>
-              <a:rPr lang="en-US" smtClean="0"/>
+              <a:rPr lang="en-US"/>
               <a:t>Fifth level</a:t>
             </a:r>
-            <a:endParaRPr lang="en-US"/>
+            <a:endParaRPr lang="en-US" dirty="0"/>
           </a:p>
         </p:txBody>
       </p:sp>
@@ -652,7 +2797,7 @@
           <a:p>
             <a:fld id="{5BCAD085-E8A6-8845-BD4E-CB4CCA059FC4}" type="datetimeFigureOut">
               <a:rPr lang="en-US" smtClean="0"/>
-              <a:t>1/27/13</a:t>
+              <a:t>9/23/2026</a:t>
             </a:fld>
             <a:endParaRPr lang="en-US"/>
           </a:p>
@@ -703,7 +2848,7 @@
     </p:spTree>
     <p:extLst>
       <p:ext uri="{BB962C8B-B14F-4D97-AF65-F5344CB8AC3E}">
-        <p14:creationId xmlns:p14="http://schemas.microsoft.com/office/powerpoint/2010/main" val="3612223792"/>
+        <p14:creationId xmlns:p14="http://schemas.microsoft.com/office/powerpoint/2010/main" val="429430767"/>
       </p:ext>
     </p:extLst>
   </p:cSld>
@@ -746,10 +2891,10 @@
           <a:lstStyle/>
           <a:p>
             <a:r>
-              <a:rPr lang="en-US" smtClean="0"/>
+              <a:rPr lang="en-US"/>
               <a:t>Click to edit Master title style</a:t>
             </a:r>
-            <a:endParaRPr lang="en-US"/>
+            <a:endParaRPr lang="en-US" dirty="0"/>
           </a:p>
         </p:txBody>
       </p:sp>
@@ -765,43 +2910,43 @@
         </p:nvSpPr>
         <p:spPr/>
         <p:txBody>
-          <a:bodyPr/>
+          <a:bodyPr anchor="ctr"/>
           <a:lstStyle/>
           <a:p>
             <a:pPr lvl="0"/>
             <a:r>
-              <a:rPr lang="en-US" smtClean="0"/>
+              <a:rPr lang="en-US"/>
               <a:t>Click to edit Master text styles</a:t>
             </a:r>
           </a:p>
           <a:p>
             <a:pPr lvl="1"/>
             <a:r>
-              <a:rPr lang="en-US" smtClean="0"/>
+              <a:rPr lang="en-US"/>
               <a:t>Second level</a:t>
             </a:r>
           </a:p>
           <a:p>
             <a:pPr lvl="2"/>
             <a:r>
-              <a:rPr lang="en-US" smtClean="0"/>
+              <a:rPr lang="en-US"/>
               <a:t>Third level</a:t>
             </a:r>
           </a:p>
           <a:p>
             <a:pPr lvl="3"/>
             <a:r>
-              <a:rPr lang="en-US" smtClean="0"/>
+              <a:rPr lang="en-US"/>
               <a:t>Fourth level</a:t>
             </a:r>
           </a:p>
           <a:p>
             <a:pPr lvl="4"/>
             <a:r>
-              <a:rPr lang="en-US" smtClean="0"/>
+              <a:rPr lang="en-US"/>
               <a:t>Fifth level</a:t>
             </a:r>
-            <a:endParaRPr lang="en-US"/>
+            <a:endParaRPr lang="en-US" dirty="0"/>
           </a:p>
         </p:txBody>
       </p:sp>
@@ -822,7 +2967,7 @@
           <a:p>
             <a:fld id="{5BCAD085-E8A6-8845-BD4E-CB4CCA059FC4}" type="datetimeFigureOut">
               <a:rPr lang="en-US" smtClean="0"/>
-              <a:t>1/27/13</a:t>
+              <a:t>9/23/2026</a:t>
             </a:fld>
             <a:endParaRPr lang="en-US"/>
           </a:p>
@@ -873,7 +3018,7 @@
     </p:spTree>
     <p:extLst>
       <p:ext uri="{BB962C8B-B14F-4D97-AF65-F5344CB8AC3E}">
-        <p14:creationId xmlns:p14="http://schemas.microsoft.com/office/powerpoint/2010/main" val="2614314258"/>
+        <p14:creationId xmlns:p14="http://schemas.microsoft.com/office/powerpoint/2010/main" val="3931906224"/>
       </p:ext>
     </p:extLst>
   </p:cSld>
@@ -912,23 +3057,25 @@
         </p:nvSpPr>
         <p:spPr>
           <a:xfrm>
-            <a:off x="722313" y="4406900"/>
-            <a:ext cx="7772400" cy="1362075"/>
-          </a:xfrm>
-        </p:spPr>
-        <p:txBody>
-          <a:bodyPr anchor="t"/>
+            <a:off x="684211" y="2006600"/>
+            <a:ext cx="8534401" cy="2281600"/>
+          </a:xfrm>
+        </p:spPr>
+        <p:txBody>
+          <a:bodyPr anchor="b">
+            <a:normAutofit/>
+          </a:bodyPr>
           <a:lstStyle>
             <a:lvl1pPr algn="l">
-              <a:defRPr sz="4000" b="1" cap="all"/>
+              <a:defRPr sz="3600" b="0" cap="all"/>
             </a:lvl1pPr>
           </a:lstStyle>
           <a:p>
             <a:r>
-              <a:rPr lang="en-US" smtClean="0"/>
+              <a:rPr lang="en-US"/>
               <a:t>Click to edit Master title style</a:t>
             </a:r>
-            <a:endParaRPr lang="en-US"/>
+            <a:endParaRPr lang="en-US" dirty="0"/>
           </a:p>
         </p:txBody>
       </p:sp>
@@ -944,19 +3091,21 @@
         </p:nvSpPr>
         <p:spPr>
           <a:xfrm>
-            <a:off x="722313" y="2906713"/>
-            <a:ext cx="7772400" cy="1500187"/>
-          </a:xfrm>
-        </p:spPr>
-        <p:txBody>
-          <a:bodyPr anchor="b"/>
+            <a:off x="684213" y="4495800"/>
+            <a:ext cx="8534400" cy="1498600"/>
+          </a:xfrm>
+        </p:spPr>
+        <p:txBody>
+          <a:bodyPr anchor="t">
+            <a:normAutofit/>
+          </a:bodyPr>
           <a:lstStyle>
-            <a:lvl1pPr marL="0" indent="0">
-              <a:buNone/>
-              <a:defRPr sz="2000">
+            <a:lvl1pPr marL="0" indent="0" algn="l">
+              <a:buNone/>
+              <a:defRPr sz="1800">
                 <a:solidFill>
-                  <a:schemeClr val="tx1">
-                    <a:tint val="75000"/>
+                  <a:schemeClr val="bg2">
+                    <a:lumMod val="50000"/>
                   </a:schemeClr>
                 </a:solidFill>
               </a:defRPr>
@@ -1045,7 +3194,7 @@
           <a:p>
             <a:pPr lvl="0"/>
             <a:r>
-              <a:rPr lang="en-US" smtClean="0"/>
+              <a:rPr lang="en-US"/>
               <a:t>Click to edit Master text styles</a:t>
             </a:r>
           </a:p>
@@ -1068,7 +3217,7 @@
           <a:p>
             <a:fld id="{5BCAD085-E8A6-8845-BD4E-CB4CCA059FC4}" type="datetimeFigureOut">
               <a:rPr lang="en-US" smtClean="0"/>
-              <a:t>1/27/13</a:t>
+              <a:t>9/23/2026</a:t>
             </a:fld>
             <a:endParaRPr lang="en-US"/>
           </a:p>
@@ -1119,7 +3268,7 @@
     </p:spTree>
     <p:extLst>
       <p:ext uri="{BB962C8B-B14F-4D97-AF65-F5344CB8AC3E}">
-        <p14:creationId xmlns:p14="http://schemas.microsoft.com/office/powerpoint/2010/main" val="960648375"/>
+        <p14:creationId xmlns:p14="http://schemas.microsoft.com/office/powerpoint/2010/main" val="3833493293"/>
       </p:ext>
     </p:extLst>
   </p:cSld>
@@ -1162,10 +3311,10 @@
           <a:lstStyle/>
           <a:p>
             <a:r>
-              <a:rPr lang="en-US" smtClean="0"/>
+              <a:rPr lang="en-US"/>
               <a:t>Click to edit Master title style</a:t>
             </a:r>
-            <a:endParaRPr lang="en-US"/>
+            <a:endParaRPr lang="en-US" dirty="0"/>
           </a:p>
         </p:txBody>
       </p:sp>
@@ -1181,76 +3330,50 @@
         </p:nvSpPr>
         <p:spPr>
           <a:xfrm>
-            <a:off x="457200" y="1600200"/>
-            <a:ext cx="4038600" cy="4525963"/>
-          </a:xfrm>
-        </p:spPr>
-        <p:txBody>
-          <a:bodyPr/>
-          <a:lstStyle>
-            <a:lvl1pPr>
-              <a:defRPr sz="2800"/>
-            </a:lvl1pPr>
-            <a:lvl2pPr>
-              <a:defRPr sz="2400"/>
-            </a:lvl2pPr>
-            <a:lvl3pPr>
-              <a:defRPr sz="2000"/>
-            </a:lvl3pPr>
-            <a:lvl4pPr>
-              <a:defRPr sz="1800"/>
-            </a:lvl4pPr>
-            <a:lvl5pPr>
-              <a:defRPr sz="1800"/>
-            </a:lvl5pPr>
-            <a:lvl6pPr>
-              <a:defRPr sz="1800"/>
-            </a:lvl6pPr>
-            <a:lvl7pPr>
-              <a:defRPr sz="1800"/>
-            </a:lvl7pPr>
-            <a:lvl8pPr>
-              <a:defRPr sz="1800"/>
-            </a:lvl8pPr>
-            <a:lvl9pPr>
-              <a:defRPr sz="1800"/>
-            </a:lvl9pPr>
-          </a:lstStyle>
+            <a:off x="684211" y="685800"/>
+            <a:ext cx="4937655" cy="3615267"/>
+          </a:xfrm>
+        </p:spPr>
+        <p:txBody>
+          <a:bodyPr>
+            <a:normAutofit/>
+          </a:bodyPr>
+          <a:lstStyle/>
           <a:p>
             <a:pPr lvl="0"/>
             <a:r>
-              <a:rPr lang="en-US" smtClean="0"/>
+              <a:rPr lang="en-US"/>
               <a:t>Click to edit Master text styles</a:t>
             </a:r>
           </a:p>
           <a:p>
             <a:pPr lvl="1"/>
             <a:r>
-              <a:rPr lang="en-US" smtClean="0"/>
+              <a:rPr lang="en-US"/>
               <a:t>Second level</a:t>
             </a:r>
           </a:p>
           <a:p>
             <a:pPr lvl="2"/>
             <a:r>
-              <a:rPr lang="en-US" smtClean="0"/>
+              <a:rPr lang="en-US"/>
               <a:t>Third level</a:t>
             </a:r>
           </a:p>
           <a:p>
             <a:pPr lvl="3"/>
             <a:r>
-              <a:rPr lang="en-US" smtClean="0"/>
+              <a:rPr lang="en-US"/>
               <a:t>Fourth level</a:t>
             </a:r>
           </a:p>
           <a:p>
             <a:pPr lvl="4"/>
             <a:r>
-              <a:rPr lang="en-US" smtClean="0"/>
+              <a:rPr lang="en-US"/>
               <a:t>Fifth level</a:t>
             </a:r>
-            <a:endParaRPr lang="en-US"/>
+            <a:endParaRPr lang="en-US" dirty="0"/>
           </a:p>
         </p:txBody>
       </p:sp>
@@ -1266,76 +3389,50 @@
         </p:nvSpPr>
         <p:spPr>
           <a:xfrm>
-            <a:off x="4648200" y="1600200"/>
-            <a:ext cx="4038600" cy="4525963"/>
-          </a:xfrm>
-        </p:spPr>
-        <p:txBody>
-          <a:bodyPr/>
-          <a:lstStyle>
-            <a:lvl1pPr>
-              <a:defRPr sz="2800"/>
-            </a:lvl1pPr>
-            <a:lvl2pPr>
-              <a:defRPr sz="2400"/>
-            </a:lvl2pPr>
-            <a:lvl3pPr>
-              <a:defRPr sz="2000"/>
-            </a:lvl3pPr>
-            <a:lvl4pPr>
-              <a:defRPr sz="1800"/>
-            </a:lvl4pPr>
-            <a:lvl5pPr>
-              <a:defRPr sz="1800"/>
-            </a:lvl5pPr>
-            <a:lvl6pPr>
-              <a:defRPr sz="1800"/>
-            </a:lvl6pPr>
-            <a:lvl7pPr>
-              <a:defRPr sz="1800"/>
-            </a:lvl7pPr>
-            <a:lvl8pPr>
-              <a:defRPr sz="1800"/>
-            </a:lvl8pPr>
-            <a:lvl9pPr>
-              <a:defRPr sz="1800"/>
-            </a:lvl9pPr>
-          </a:lstStyle>
+            <a:off x="5808133" y="685801"/>
+            <a:ext cx="4934479" cy="3615266"/>
+          </a:xfrm>
+        </p:spPr>
+        <p:txBody>
+          <a:bodyPr>
+            <a:normAutofit/>
+          </a:bodyPr>
+          <a:lstStyle/>
           <a:p>
             <a:pPr lvl="0"/>
             <a:r>
-              <a:rPr lang="en-US" smtClean="0"/>
+              <a:rPr lang="en-US"/>
               <a:t>Click to edit Master text styles</a:t>
             </a:r>
           </a:p>
           <a:p>
             <a:pPr lvl="1"/>
             <a:r>
-              <a:rPr lang="en-US" smtClean="0"/>
+              <a:rPr lang="en-US"/>
               <a:t>Second level</a:t>
             </a:r>
           </a:p>
           <a:p>
             <a:pPr lvl="2"/>
             <a:r>
-              <a:rPr lang="en-US" smtClean="0"/>
+              <a:rPr lang="en-US"/>
               <a:t>Third level</a:t>
             </a:r>
           </a:p>
           <a:p>
             <a:pPr lvl="3"/>
             <a:r>
-              <a:rPr lang="en-US" smtClean="0"/>
+              <a:rPr lang="en-US"/>
               <a:t>Fourth level</a:t>
             </a:r>
           </a:p>
           <a:p>
             <a:pPr lvl="4"/>
             <a:r>
-              <a:rPr lang="en-US" smtClean="0"/>
+              <a:rPr lang="en-US"/>
               <a:t>Fifth level</a:t>
             </a:r>
-            <a:endParaRPr lang="en-US"/>
+            <a:endParaRPr lang="en-US" dirty="0"/>
           </a:p>
         </p:txBody>
       </p:sp>
@@ -1356,7 +3453,7 @@
           <a:p>
             <a:fld id="{5BCAD085-E8A6-8845-BD4E-CB4CCA059FC4}" type="datetimeFigureOut">
               <a:rPr lang="en-US" smtClean="0"/>
-              <a:t>1/27/13</a:t>
+              <a:t>9/23/2026</a:t>
             </a:fld>
             <a:endParaRPr lang="en-US"/>
           </a:p>
@@ -1407,7 +3504,7 @@
     </p:spTree>
     <p:extLst>
       <p:ext uri="{BB962C8B-B14F-4D97-AF65-F5344CB8AC3E}">
-        <p14:creationId xmlns:p14="http://schemas.microsoft.com/office/powerpoint/2010/main" val="2782244947"/>
+        <p14:creationId xmlns:p14="http://schemas.microsoft.com/office/powerpoint/2010/main" val="2963741461"/>
       </p:ext>
     </p:extLst>
   </p:cSld>
@@ -1454,10 +3551,10 @@
           </a:lstStyle>
           <a:p>
             <a:r>
-              <a:rPr lang="en-US" smtClean="0"/>
+              <a:rPr lang="en-US"/>
               <a:t>Click to edit Master title style</a:t>
             </a:r>
-            <a:endParaRPr lang="en-US"/>
+            <a:endParaRPr lang="en-US" dirty="0"/>
           </a:p>
         </p:txBody>
       </p:sp>
@@ -1473,16 +3570,22 @@
         </p:nvSpPr>
         <p:spPr>
           <a:xfrm>
-            <a:off x="457200" y="1535113"/>
-            <a:ext cx="4040188" cy="639762"/>
-          </a:xfrm>
-        </p:spPr>
-        <p:txBody>
-          <a:bodyPr anchor="b"/>
+            <a:off x="972080" y="685800"/>
+            <a:ext cx="4649787" cy="576262"/>
+          </a:xfrm>
+        </p:spPr>
+        <p:txBody>
+          <a:bodyPr anchor="b">
+            <a:noAutofit/>
+          </a:bodyPr>
           <a:lstStyle>
             <a:lvl1pPr marL="0" indent="0">
               <a:buNone/>
-              <a:defRPr sz="2400" b="1"/>
+              <a:defRPr sz="2800" b="0">
+                <a:solidFill>
+                  <a:schemeClr val="tx1"/>
+                </a:solidFill>
+              </a:defRPr>
             </a:lvl1pPr>
             <a:lvl2pPr marL="457200" indent="0">
               <a:buNone/>
@@ -1520,7 +3623,7 @@
           <a:p>
             <a:pPr lvl="0"/>
             <a:r>
-              <a:rPr lang="en-US" smtClean="0"/>
+              <a:rPr lang="en-US"/>
               <a:t>Click to edit Master text styles</a:t>
             </a:r>
           </a:p>
@@ -1538,76 +3641,50 @@
         </p:nvSpPr>
         <p:spPr>
           <a:xfrm>
-            <a:off x="457200" y="2174875"/>
-            <a:ext cx="4040188" cy="3951288"/>
-          </a:xfrm>
-        </p:spPr>
-        <p:txBody>
-          <a:bodyPr/>
-          <a:lstStyle>
-            <a:lvl1pPr>
-              <a:defRPr sz="2400"/>
-            </a:lvl1pPr>
-            <a:lvl2pPr>
-              <a:defRPr sz="2000"/>
-            </a:lvl2pPr>
-            <a:lvl3pPr>
-              <a:defRPr sz="1800"/>
-            </a:lvl3pPr>
-            <a:lvl4pPr>
-              <a:defRPr sz="1600"/>
-            </a:lvl4pPr>
-            <a:lvl5pPr>
-              <a:defRPr sz="1600"/>
-            </a:lvl5pPr>
-            <a:lvl6pPr>
-              <a:defRPr sz="1600"/>
-            </a:lvl6pPr>
-            <a:lvl7pPr>
-              <a:defRPr sz="1600"/>
-            </a:lvl7pPr>
-            <a:lvl8pPr>
-              <a:defRPr sz="1600"/>
-            </a:lvl8pPr>
-            <a:lvl9pPr>
-              <a:defRPr sz="1600"/>
-            </a:lvl9pPr>
-          </a:lstStyle>
+            <a:off x="684211" y="1270529"/>
+            <a:ext cx="4937655" cy="3030538"/>
+          </a:xfrm>
+        </p:spPr>
+        <p:txBody>
+          <a:bodyPr anchor="t">
+            <a:normAutofit/>
+          </a:bodyPr>
+          <a:lstStyle/>
           <a:p>
             <a:pPr lvl="0"/>
             <a:r>
-              <a:rPr lang="en-US" smtClean="0"/>
+              <a:rPr lang="en-US"/>
               <a:t>Click to edit Master text styles</a:t>
             </a:r>
           </a:p>
           <a:p>
             <a:pPr lvl="1"/>
             <a:r>
-              <a:rPr lang="en-US" smtClean="0"/>
+              <a:rPr lang="en-US"/>
               <a:t>Second level</a:t>
             </a:r>
           </a:p>
           <a:p>
             <a:pPr lvl="2"/>
             <a:r>
-              <a:rPr lang="en-US" smtClean="0"/>
+              <a:rPr lang="en-US"/>
               <a:t>Third level</a:t>
             </a:r>
           </a:p>
           <a:p>
             <a:pPr lvl="3"/>
             <a:r>
-              <a:rPr lang="en-US" smtClean="0"/>
+              <a:rPr lang="en-US"/>
               <a:t>Fourth level</a:t>
             </a:r>
           </a:p>
           <a:p>
             <a:pPr lvl="4"/>
             <a:r>
-              <a:rPr lang="en-US" smtClean="0"/>
+              <a:rPr lang="en-US"/>
               <a:t>Fifth level</a:t>
             </a:r>
-            <a:endParaRPr lang="en-US"/>
+            <a:endParaRPr lang="en-US" dirty="0"/>
           </a:p>
         </p:txBody>
       </p:sp>
@@ -1623,16 +3700,22 @@
         </p:nvSpPr>
         <p:spPr>
           <a:xfrm>
-            <a:off x="4645025" y="1535113"/>
-            <a:ext cx="4041775" cy="639762"/>
-          </a:xfrm>
-        </p:spPr>
-        <p:txBody>
-          <a:bodyPr anchor="b"/>
+            <a:off x="6079066" y="685800"/>
+            <a:ext cx="4665134" cy="576262"/>
+          </a:xfrm>
+        </p:spPr>
+        <p:txBody>
+          <a:bodyPr anchor="b">
+            <a:noAutofit/>
+          </a:bodyPr>
           <a:lstStyle>
             <a:lvl1pPr marL="0" indent="0">
               <a:buNone/>
-              <a:defRPr sz="2400" b="1"/>
+              <a:defRPr sz="2800" b="0">
+                <a:solidFill>
+                  <a:schemeClr val="tx1"/>
+                </a:solidFill>
+              </a:defRPr>
             </a:lvl1pPr>
             <a:lvl2pPr marL="457200" indent="0">
               <a:buNone/>
@@ -1670,7 +3753,7 @@
           <a:p>
             <a:pPr lvl="0"/>
             <a:r>
-              <a:rPr lang="en-US" smtClean="0"/>
+              <a:rPr lang="en-US"/>
               <a:t>Click to edit Master text styles</a:t>
             </a:r>
           </a:p>
@@ -1688,76 +3771,50 @@
         </p:nvSpPr>
         <p:spPr>
           <a:xfrm>
-            <a:off x="4645025" y="2174875"/>
-            <a:ext cx="4041775" cy="3951288"/>
-          </a:xfrm>
-        </p:spPr>
-        <p:txBody>
-          <a:bodyPr/>
-          <a:lstStyle>
-            <a:lvl1pPr>
-              <a:defRPr sz="2400"/>
-            </a:lvl1pPr>
-            <a:lvl2pPr>
-              <a:defRPr sz="2000"/>
-            </a:lvl2pPr>
-            <a:lvl3pPr>
-              <a:defRPr sz="1800"/>
-            </a:lvl3pPr>
-            <a:lvl4pPr>
-              <a:defRPr sz="1600"/>
-            </a:lvl4pPr>
-            <a:lvl5pPr>
-              <a:defRPr sz="1600"/>
-            </a:lvl5pPr>
-            <a:lvl6pPr>
-              <a:defRPr sz="1600"/>
-            </a:lvl6pPr>
-            <a:lvl7pPr>
-              <a:defRPr sz="1600"/>
-            </a:lvl7pPr>
-            <a:lvl8pPr>
-              <a:defRPr sz="1600"/>
-            </a:lvl8pPr>
-            <a:lvl9pPr>
-              <a:defRPr sz="1600"/>
-            </a:lvl9pPr>
-          </a:lstStyle>
+            <a:off x="5806545" y="1262062"/>
+            <a:ext cx="4929188" cy="3030538"/>
+          </a:xfrm>
+        </p:spPr>
+        <p:txBody>
+          <a:bodyPr anchor="t">
+            <a:normAutofit/>
+          </a:bodyPr>
+          <a:lstStyle/>
           <a:p>
             <a:pPr lvl="0"/>
             <a:r>
-              <a:rPr lang="en-US" smtClean="0"/>
+              <a:rPr lang="en-US"/>
               <a:t>Click to edit Master text styles</a:t>
             </a:r>
           </a:p>
           <a:p>
             <a:pPr lvl="1"/>
             <a:r>
-              <a:rPr lang="en-US" smtClean="0"/>
+              <a:rPr lang="en-US"/>
               <a:t>Second level</a:t>
             </a:r>
           </a:p>
           <a:p>
             <a:pPr lvl="2"/>
             <a:r>
-              <a:rPr lang="en-US" smtClean="0"/>
+              <a:rPr lang="en-US"/>
               <a:t>Third level</a:t>
             </a:r>
           </a:p>
           <a:p>
             <a:pPr lvl="3"/>
             <a:r>
-              <a:rPr lang="en-US" smtClean="0"/>
+              <a:rPr lang="en-US"/>
               <a:t>Fourth level</a:t>
             </a:r>
           </a:p>
           <a:p>
             <a:pPr lvl="4"/>
             <a:r>
-              <a:rPr lang="en-US" smtClean="0"/>
+              <a:rPr lang="en-US"/>
               <a:t>Fifth level</a:t>
             </a:r>
-            <a:endParaRPr lang="en-US"/>
+            <a:endParaRPr lang="en-US" dirty="0"/>
           </a:p>
         </p:txBody>
       </p:sp>
@@ -1778,7 +3835,7 @@
           <a:p>
             <a:fld id="{5BCAD085-E8A6-8845-BD4E-CB4CCA059FC4}" type="datetimeFigureOut">
               <a:rPr lang="en-US" smtClean="0"/>
-              <a:t>1/27/13</a:t>
+              <a:t>9/23/2026</a:t>
             </a:fld>
             <a:endParaRPr lang="en-US"/>
           </a:p>
@@ -1829,7 +3886,7 @@
     </p:spTree>
     <p:extLst>
       <p:ext uri="{BB962C8B-B14F-4D97-AF65-F5344CB8AC3E}">
-        <p14:creationId xmlns:p14="http://schemas.microsoft.com/office/powerpoint/2010/main" val="990158736"/>
+        <p14:creationId xmlns:p14="http://schemas.microsoft.com/office/powerpoint/2010/main" val="805498152"/>
       </p:ext>
     </p:extLst>
   </p:cSld>
@@ -1872,10 +3929,10 @@
           <a:lstStyle/>
           <a:p>
             <a:r>
-              <a:rPr lang="en-US" smtClean="0"/>
+              <a:rPr lang="en-US"/>
               <a:t>Click to edit Master title style</a:t>
             </a:r>
-            <a:endParaRPr lang="en-US"/>
+            <a:endParaRPr lang="en-US" dirty="0"/>
           </a:p>
         </p:txBody>
       </p:sp>
@@ -1896,7 +3953,7 @@
           <a:p>
             <a:fld id="{5BCAD085-E8A6-8845-BD4E-CB4CCA059FC4}" type="datetimeFigureOut">
               <a:rPr lang="en-US" smtClean="0"/>
-              <a:t>1/27/13</a:t>
+              <a:t>9/23/2026</a:t>
             </a:fld>
             <a:endParaRPr lang="en-US"/>
           </a:p>
@@ -1947,7 +4004,7 @@
     </p:spTree>
     <p:extLst>
       <p:ext uri="{BB962C8B-B14F-4D97-AF65-F5344CB8AC3E}">
-        <p14:creationId xmlns:p14="http://schemas.microsoft.com/office/powerpoint/2010/main" val="727027711"/>
+        <p14:creationId xmlns:p14="http://schemas.microsoft.com/office/powerpoint/2010/main" val="3000023261"/>
       </p:ext>
     </p:extLst>
   </p:cSld>
@@ -1991,7 +4048,7 @@
           <a:p>
             <a:fld id="{5BCAD085-E8A6-8845-BD4E-CB4CCA059FC4}" type="datetimeFigureOut">
               <a:rPr lang="en-US" smtClean="0"/>
-              <a:t>1/27/13</a:t>
+              <a:t>9/23/2026</a:t>
             </a:fld>
             <a:endParaRPr lang="en-US"/>
           </a:p>
@@ -2042,7 +4099,7 @@
     </p:spTree>
     <p:extLst>
       <p:ext uri="{BB962C8B-B14F-4D97-AF65-F5344CB8AC3E}">
-        <p14:creationId xmlns:p14="http://schemas.microsoft.com/office/powerpoint/2010/main" val="1212999818"/>
+        <p14:creationId xmlns:p14="http://schemas.microsoft.com/office/powerpoint/2010/main" val="3230047493"/>
       </p:ext>
     </p:extLst>
   </p:cSld>
@@ -2081,23 +4138,25 @@
         </p:nvSpPr>
         <p:spPr>
           <a:xfrm>
-            <a:off x="457200" y="273050"/>
-            <a:ext cx="3008313" cy="1162050"/>
-          </a:xfrm>
-        </p:spPr>
-        <p:txBody>
-          <a:bodyPr anchor="b"/>
+            <a:off x="7085012" y="685800"/>
+            <a:ext cx="3657600" cy="1371600"/>
+          </a:xfrm>
+        </p:spPr>
+        <p:txBody>
+          <a:bodyPr anchor="b">
+            <a:normAutofit/>
+          </a:bodyPr>
           <a:lstStyle>
             <a:lvl1pPr algn="l">
-              <a:defRPr sz="2000" b="1"/>
+              <a:defRPr sz="2400" b="0"/>
             </a:lvl1pPr>
           </a:lstStyle>
           <a:p>
             <a:r>
-              <a:rPr lang="en-US" smtClean="0"/>
+              <a:rPr lang="en-US"/>
               <a:t>Click to edit Master title style</a:t>
             </a:r>
-            <a:endParaRPr lang="en-US"/>
+            <a:endParaRPr lang="en-US" dirty="0"/>
           </a:p>
         </p:txBody>
       </p:sp>
@@ -2113,76 +4172,50 @@
         </p:nvSpPr>
         <p:spPr>
           <a:xfrm>
-            <a:off x="3575050" y="273050"/>
-            <a:ext cx="5111750" cy="5853113"/>
-          </a:xfrm>
-        </p:spPr>
-        <p:txBody>
-          <a:bodyPr/>
-          <a:lstStyle>
-            <a:lvl1pPr>
-              <a:defRPr sz="3200"/>
-            </a:lvl1pPr>
-            <a:lvl2pPr>
-              <a:defRPr sz="2800"/>
-            </a:lvl2pPr>
-            <a:lvl3pPr>
-              <a:defRPr sz="2400"/>
-            </a:lvl3pPr>
-            <a:lvl4pPr>
-              <a:defRPr sz="2000"/>
-            </a:lvl4pPr>
-            <a:lvl5pPr>
-              <a:defRPr sz="2000"/>
-            </a:lvl5pPr>
-            <a:lvl6pPr>
-              <a:defRPr sz="2000"/>
-            </a:lvl6pPr>
-            <a:lvl7pPr>
-              <a:defRPr sz="2000"/>
-            </a:lvl7pPr>
-            <a:lvl8pPr>
-              <a:defRPr sz="2000"/>
-            </a:lvl8pPr>
-            <a:lvl9pPr>
-              <a:defRPr sz="2000"/>
-            </a:lvl9pPr>
-          </a:lstStyle>
+            <a:off x="684212" y="685800"/>
+            <a:ext cx="5943601" cy="5308600"/>
+          </a:xfrm>
+        </p:spPr>
+        <p:txBody>
+          <a:bodyPr anchor="ctr">
+            <a:normAutofit/>
+          </a:bodyPr>
+          <a:lstStyle/>
           <a:p>
             <a:pPr lvl="0"/>
             <a:r>
-              <a:rPr lang="en-US" smtClean="0"/>
+              <a:rPr lang="en-US"/>
               <a:t>Click to edit Master text styles</a:t>
             </a:r>
           </a:p>
           <a:p>
             <a:pPr lvl="1"/>
             <a:r>
-              <a:rPr lang="en-US" smtClean="0"/>
+              <a:rPr lang="en-US"/>
               <a:t>Second level</a:t>
             </a:r>
           </a:p>
           <a:p>
             <a:pPr lvl="2"/>
             <a:r>
-              <a:rPr lang="en-US" smtClean="0"/>
+              <a:rPr lang="en-US"/>
               <a:t>Third level</a:t>
             </a:r>
           </a:p>
           <a:p>
             <a:pPr lvl="3"/>
             <a:r>
-              <a:rPr lang="en-US" smtClean="0"/>
+              <a:rPr lang="en-US"/>
               <a:t>Fourth level</a:t>
             </a:r>
           </a:p>
           <a:p>
             <a:pPr lvl="4"/>
             <a:r>
-              <a:rPr lang="en-US" smtClean="0"/>
+              <a:rPr lang="en-US"/>
               <a:t>Fifth level</a:t>
             </a:r>
-            <a:endParaRPr lang="en-US"/>
+            <a:endParaRPr lang="en-US" dirty="0"/>
           </a:p>
         </p:txBody>
       </p:sp>
@@ -2198,16 +4231,18 @@
         </p:nvSpPr>
         <p:spPr>
           <a:xfrm>
-            <a:off x="457200" y="1435100"/>
-            <a:ext cx="3008313" cy="4691063"/>
-          </a:xfrm>
-        </p:spPr>
-        <p:txBody>
-          <a:bodyPr/>
+            <a:off x="7085012" y="2209799"/>
+            <a:ext cx="3657600" cy="2091267"/>
+          </a:xfrm>
+        </p:spPr>
+        <p:txBody>
+          <a:bodyPr anchor="t">
+            <a:normAutofit/>
+          </a:bodyPr>
           <a:lstStyle>
             <a:lvl1pPr marL="0" indent="0">
               <a:buNone/>
-              <a:defRPr sz="1400"/>
+              <a:defRPr sz="1600"/>
             </a:lvl1pPr>
             <a:lvl2pPr marL="457200" indent="0">
               <a:buNone/>
@@ -2245,7 +4280,7 @@
           <a:p>
             <a:pPr lvl="0"/>
             <a:r>
-              <a:rPr lang="en-US" smtClean="0"/>
+              <a:rPr lang="en-US"/>
               <a:t>Click to edit Master text styles</a:t>
             </a:r>
           </a:p>
@@ -2268,7 +4303,7 @@
           <a:p>
             <a:fld id="{5BCAD085-E8A6-8845-BD4E-CB4CCA059FC4}" type="datetimeFigureOut">
               <a:rPr lang="en-US" smtClean="0"/>
-              <a:t>1/27/13</a:t>
+              <a:t>9/23/2026</a:t>
             </a:fld>
             <a:endParaRPr lang="en-US"/>
           </a:p>
@@ -2319,7 +4354,7 @@
     </p:spTree>
     <p:extLst>
       <p:ext uri="{BB962C8B-B14F-4D97-AF65-F5344CB8AC3E}">
-        <p14:creationId xmlns:p14="http://schemas.microsoft.com/office/powerpoint/2010/main" val="1840726560"/>
+        <p14:creationId xmlns:p14="http://schemas.microsoft.com/office/powerpoint/2010/main" val="605141397"/>
       </p:ext>
     </p:extLst>
   </p:cSld>
@@ -2358,31 +4393,33 @@
         </p:nvSpPr>
         <p:spPr>
           <a:xfrm>
-            <a:off x="1792288" y="4800600"/>
-            <a:ext cx="5486400" cy="566738"/>
-          </a:xfrm>
-        </p:spPr>
-        <p:txBody>
-          <a:bodyPr anchor="b"/>
+            <a:off x="4722812" y="1447800"/>
+            <a:ext cx="6019800" cy="1143000"/>
+          </a:xfrm>
+        </p:spPr>
+        <p:txBody>
+          <a:bodyPr anchor="b">
+            <a:normAutofit/>
+          </a:bodyPr>
           <a:lstStyle>
             <a:lvl1pPr algn="l">
-              <a:defRPr sz="2000" b="1"/>
+              <a:defRPr sz="2800" b="0"/>
             </a:lvl1pPr>
           </a:lstStyle>
           <a:p>
             <a:r>
-              <a:rPr lang="en-US" smtClean="0"/>
+              <a:rPr lang="en-US"/>
               <a:t>Click to edit Master title style</a:t>
             </a:r>
-            <a:endParaRPr lang="en-US"/>
-          </a:p>
-        </p:txBody>
-      </p:sp>
-      <p:sp>
-        <p:nvSpPr>
-          <p:cNvPr id="3" name="Picture Placeholder 2"/>
-          <p:cNvSpPr>
-            <a:spLocks noGrp="1"/>
+            <a:endParaRPr lang="en-US" dirty="0"/>
+          </a:p>
+        </p:txBody>
+      </p:sp>
+      <p:sp>
+        <p:nvSpPr>
+          <p:cNvPr id="14" name="Picture Placeholder 2"/>
+          <p:cNvSpPr>
+            <a:spLocks noGrp="1" noChangeAspect="1"/>
           </p:cNvSpPr>
           <p:nvPr>
             <p:ph type="pic" idx="1"/>
@@ -2390,77 +4427,105 @@
         </p:nvSpPr>
         <p:spPr>
           <a:xfrm>
-            <a:off x="1792288" y="612775"/>
-            <a:ext cx="5486400" cy="4114800"/>
-          </a:xfrm>
-        </p:spPr>
-        <p:txBody>
-          <a:bodyPr/>
+            <a:off x="989012" y="914400"/>
+            <a:ext cx="3280974" cy="4572000"/>
+          </a:xfrm>
+          <a:prstGeom prst="snip2DiagRect">
+            <a:avLst>
+              <a:gd name="adj1" fmla="val 10815"/>
+              <a:gd name="adj2" fmla="val 0"/>
+            </a:avLst>
+          </a:prstGeom>
+          <a:ln w="15875">
+            <a:solidFill>
+              <a:schemeClr val="tx1">
+                <a:alpha val="40000"/>
+              </a:schemeClr>
+            </a:solidFill>
+          </a:ln>
+          <a:effectLst>
+            <a:innerShdw blurRad="57150" dist="38100" dir="14460000">
+              <a:srgbClr val="000000">
+                <a:alpha val="70000"/>
+              </a:srgbClr>
+            </a:innerShdw>
+          </a:effectLst>
+        </p:spPr>
+        <p:txBody>
+          <a:bodyPr anchor="t">
+            <a:normAutofit/>
+          </a:bodyPr>
+          <a:lstStyle>
+            <a:lvl1pPr marL="0" indent="0" algn="ctr">
+              <a:buNone/>
+              <a:defRPr sz="1600"/>
+            </a:lvl1pPr>
+            <a:lvl2pPr marL="457200" indent="0">
+              <a:buNone/>
+              <a:defRPr sz="1600"/>
+            </a:lvl2pPr>
+            <a:lvl3pPr marL="914400" indent="0">
+              <a:buNone/>
+              <a:defRPr sz="1600"/>
+            </a:lvl3pPr>
+            <a:lvl4pPr marL="1371600" indent="0">
+              <a:buNone/>
+              <a:defRPr sz="1600"/>
+            </a:lvl4pPr>
+            <a:lvl5pPr marL="1828800" indent="0">
+              <a:buNone/>
+              <a:defRPr sz="1600"/>
+            </a:lvl5pPr>
+            <a:lvl6pPr marL="2286000" indent="0">
+              <a:buNone/>
+              <a:defRPr sz="1600"/>
+            </a:lvl6pPr>
+            <a:lvl7pPr marL="2743200" indent="0">
+              <a:buNone/>
+              <a:defRPr sz="1600"/>
+            </a:lvl7pPr>
+            <a:lvl8pPr marL="3200400" indent="0">
+              <a:buNone/>
+              <a:defRPr sz="1600"/>
+            </a:lvl8pPr>
+            <a:lvl9pPr marL="3657600" indent="0">
+              <a:buNone/>
+              <a:defRPr sz="1600"/>
+            </a:lvl9pPr>
+          </a:lstStyle>
+          <a:p>
+            <a:r>
+              <a:rPr lang="en-US"/>
+              <a:t>Click icon to add picture</a:t>
+            </a:r>
+            <a:endParaRPr lang="en-US" dirty="0"/>
+          </a:p>
+        </p:txBody>
+      </p:sp>
+      <p:sp>
+        <p:nvSpPr>
+          <p:cNvPr id="4" name="Text Placeholder 3"/>
+          <p:cNvSpPr>
+            <a:spLocks noGrp="1"/>
+          </p:cNvSpPr>
+          <p:nvPr>
+            <p:ph type="body" sz="half" idx="2"/>
+          </p:nvPr>
+        </p:nvSpPr>
+        <p:spPr>
+          <a:xfrm>
+            <a:off x="4722812" y="2777066"/>
+            <a:ext cx="6021388" cy="2048933"/>
+          </a:xfrm>
+        </p:spPr>
+        <p:txBody>
+          <a:bodyPr anchor="t">
+            <a:normAutofit/>
+          </a:bodyPr>
           <a:lstStyle>
             <a:lvl1pPr marL="0" indent="0">
               <a:buNone/>
-              <a:defRPr sz="3200"/>
-            </a:lvl1pPr>
-            <a:lvl2pPr marL="457200" indent="0">
-              <a:buNone/>
-              <a:defRPr sz="2800"/>
-            </a:lvl2pPr>
-            <a:lvl3pPr marL="914400" indent="0">
-              <a:buNone/>
-              <a:defRPr sz="2400"/>
-            </a:lvl3pPr>
-            <a:lvl4pPr marL="1371600" indent="0">
-              <a:buNone/>
-              <a:defRPr sz="2000"/>
-            </a:lvl4pPr>
-            <a:lvl5pPr marL="1828800" indent="0">
-              <a:buNone/>
-              <a:defRPr sz="2000"/>
-            </a:lvl5pPr>
-            <a:lvl6pPr marL="2286000" indent="0">
-              <a:buNone/>
-              <a:defRPr sz="2000"/>
-            </a:lvl6pPr>
-            <a:lvl7pPr marL="2743200" indent="0">
-              <a:buNone/>
-              <a:defRPr sz="2000"/>
-            </a:lvl7pPr>
-            <a:lvl8pPr marL="3200400" indent="0">
-              <a:buNone/>
-              <a:defRPr sz="2000"/>
-            </a:lvl8pPr>
-            <a:lvl9pPr marL="3657600" indent="0">
-              <a:buNone/>
-              <a:defRPr sz="2000"/>
-            </a:lvl9pPr>
-          </a:lstStyle>
-          <a:p>
-            <a:endParaRPr lang="en-US"/>
-          </a:p>
-        </p:txBody>
-      </p:sp>
-      <p:sp>
-        <p:nvSpPr>
-          <p:cNvPr id="4" name="Text Placeholder 3"/>
-          <p:cNvSpPr>
-            <a:spLocks noGrp="1"/>
-          </p:cNvSpPr>
-          <p:nvPr>
-            <p:ph type="body" sz="half" idx="2"/>
-          </p:nvPr>
-        </p:nvSpPr>
-        <p:spPr>
-          <a:xfrm>
-            <a:off x="1792288" y="5367338"/>
-            <a:ext cx="5486400" cy="804862"/>
-          </a:xfrm>
-        </p:spPr>
-        <p:txBody>
-          <a:bodyPr/>
-          <a:lstStyle>
-            <a:lvl1pPr marL="0" indent="0">
-              <a:buNone/>
-              <a:defRPr sz="1400"/>
+              <a:defRPr sz="1800"/>
             </a:lvl1pPr>
             <a:lvl2pPr marL="457200" indent="0">
               <a:buNone/>
@@ -2498,7 +4563,7 @@
           <a:p>
             <a:pPr lvl="0"/>
             <a:r>
-              <a:rPr lang="en-US" smtClean="0"/>
+              <a:rPr lang="en-US"/>
               <a:t>Click to edit Master text styles</a:t>
             </a:r>
           </a:p>
@@ -2521,7 +4586,7 @@
           <a:p>
             <a:fld id="{5BCAD085-E8A6-8845-BD4E-CB4CCA059FC4}" type="datetimeFigureOut">
               <a:rPr lang="en-US" smtClean="0"/>
-              <a:t>1/27/13</a:t>
+              <a:t>9/23/2026</a:t>
             </a:fld>
             <a:endParaRPr lang="en-US"/>
           </a:p>
@@ -2572,7 +4637,7 @@
     </p:spTree>
     <p:extLst>
       <p:ext uri="{BB962C8B-B14F-4D97-AF65-F5344CB8AC3E}">
-        <p14:creationId xmlns:p14="http://schemas.microsoft.com/office/powerpoint/2010/main" val="3889236939"/>
+        <p14:creationId xmlns:p14="http://schemas.microsoft.com/office/powerpoint/2010/main" val="1905779769"/>
       </p:ext>
     </p:extLst>
   </p:cSld>
@@ -2586,8 +4651,8 @@
 <p:sldMaster xmlns:a="http://schemas.openxmlformats.org/drawingml/2006/main" xmlns:r="http://schemas.openxmlformats.org/officeDocument/2006/relationships" xmlns:p="http://schemas.openxmlformats.org/presentationml/2006/main">
   <p:cSld>
     <p:bg>
-      <p:bgRef idx="1001">
-        <a:schemeClr val="bg1"/>
+      <p:bgRef idx="1002">
+        <a:schemeClr val="bg2"/>
       </p:bgRef>
     </p:bg>
     <p:spTree>
@@ -2604,6 +4669,196 @@
           <a:chExt cx="0" cy="0"/>
         </a:xfrm>
       </p:grpSpPr>
+      <p:grpSp>
+        <p:nvGrpSpPr>
+          <p:cNvPr id="7" name="Group 6"/>
+          <p:cNvGrpSpPr/>
+          <p:nvPr/>
+        </p:nvGrpSpPr>
+        <p:grpSpPr>
+          <a:xfrm>
+            <a:off x="9206969" y="2963333"/>
+            <a:ext cx="2981858" cy="3208867"/>
+            <a:chOff x="9206969" y="2963333"/>
+            <a:chExt cx="2981858" cy="3208867"/>
+          </a:xfrm>
+        </p:grpSpPr>
+        <p:cxnSp>
+          <p:nvCxnSpPr>
+            <p:cNvPr id="8" name="Straight Connector 7"/>
+            <p:cNvCxnSpPr/>
+            <p:nvPr/>
+          </p:nvCxnSpPr>
+          <p:spPr>
+            <a:xfrm flipH="1">
+              <a:off x="11276012" y="2963333"/>
+              <a:ext cx="912814" cy="912812"/>
+            </a:xfrm>
+            <a:prstGeom prst="line">
+              <a:avLst/>
+            </a:prstGeom>
+            <a:ln w="9525">
+              <a:solidFill>
+                <a:schemeClr val="tx1"/>
+              </a:solidFill>
+            </a:ln>
+          </p:spPr>
+          <p:style>
+            <a:lnRef idx="2">
+              <a:schemeClr val="accent1"/>
+            </a:lnRef>
+            <a:fillRef idx="0">
+              <a:schemeClr val="accent1"/>
+            </a:fillRef>
+            <a:effectRef idx="1">
+              <a:schemeClr val="accent1"/>
+            </a:effectRef>
+            <a:fontRef idx="minor">
+              <a:schemeClr val="tx1"/>
+            </a:fontRef>
+          </p:style>
+        </p:cxnSp>
+        <p:cxnSp>
+          <p:nvCxnSpPr>
+            <p:cNvPr id="9" name="Straight Connector 8"/>
+            <p:cNvCxnSpPr/>
+            <p:nvPr/>
+          </p:nvCxnSpPr>
+          <p:spPr>
+            <a:xfrm flipH="1">
+              <a:off x="9206969" y="3190344"/>
+              <a:ext cx="2981857" cy="2981856"/>
+            </a:xfrm>
+            <a:prstGeom prst="line">
+              <a:avLst/>
+            </a:prstGeom>
+            <a:ln w="9525">
+              <a:solidFill>
+                <a:schemeClr val="tx1"/>
+              </a:solidFill>
+            </a:ln>
+          </p:spPr>
+          <p:style>
+            <a:lnRef idx="2">
+              <a:schemeClr val="accent1"/>
+            </a:lnRef>
+            <a:fillRef idx="0">
+              <a:schemeClr val="accent1"/>
+            </a:fillRef>
+            <a:effectRef idx="1">
+              <a:schemeClr val="accent1"/>
+            </a:effectRef>
+            <a:fontRef idx="minor">
+              <a:schemeClr val="tx1"/>
+            </a:fontRef>
+          </p:style>
+        </p:cxnSp>
+        <p:cxnSp>
+          <p:nvCxnSpPr>
+            <p:cNvPr id="10" name="Straight Connector 9"/>
+            <p:cNvCxnSpPr/>
+            <p:nvPr/>
+          </p:nvCxnSpPr>
+          <p:spPr>
+            <a:xfrm flipH="1">
+              <a:off x="10292292" y="3285067"/>
+              <a:ext cx="1896534" cy="1896533"/>
+            </a:xfrm>
+            <a:prstGeom prst="line">
+              <a:avLst/>
+            </a:prstGeom>
+            <a:ln w="9525">
+              <a:solidFill>
+                <a:schemeClr val="tx1"/>
+              </a:solidFill>
+            </a:ln>
+          </p:spPr>
+          <p:style>
+            <a:lnRef idx="2">
+              <a:schemeClr val="accent1"/>
+            </a:lnRef>
+            <a:fillRef idx="0">
+              <a:schemeClr val="accent1"/>
+            </a:fillRef>
+            <a:effectRef idx="1">
+              <a:schemeClr val="accent1"/>
+            </a:effectRef>
+            <a:fontRef idx="minor">
+              <a:schemeClr val="tx1"/>
+            </a:fontRef>
+          </p:style>
+        </p:cxnSp>
+        <p:cxnSp>
+          <p:nvCxnSpPr>
+            <p:cNvPr id="11" name="Straight Connector 10"/>
+            <p:cNvCxnSpPr/>
+            <p:nvPr/>
+          </p:nvCxnSpPr>
+          <p:spPr>
+            <a:xfrm flipH="1">
+              <a:off x="10443103" y="3131080"/>
+              <a:ext cx="1745722" cy="1745720"/>
+            </a:xfrm>
+            <a:prstGeom prst="line">
+              <a:avLst/>
+            </a:prstGeom>
+            <a:ln w="28575">
+              <a:solidFill>
+                <a:schemeClr val="tx1"/>
+              </a:solidFill>
+            </a:ln>
+          </p:spPr>
+          <p:style>
+            <a:lnRef idx="2">
+              <a:schemeClr val="accent1"/>
+            </a:lnRef>
+            <a:fillRef idx="0">
+              <a:schemeClr val="accent1"/>
+            </a:fillRef>
+            <a:effectRef idx="1">
+              <a:schemeClr val="accent1"/>
+            </a:effectRef>
+            <a:fontRef idx="minor">
+              <a:schemeClr val="tx1"/>
+            </a:fontRef>
+          </p:style>
+        </p:cxnSp>
+        <p:cxnSp>
+          <p:nvCxnSpPr>
+            <p:cNvPr id="12" name="Straight Connector 11"/>
+            <p:cNvCxnSpPr/>
+            <p:nvPr/>
+          </p:nvCxnSpPr>
+          <p:spPr>
+            <a:xfrm flipH="1">
+              <a:off x="10918826" y="3683001"/>
+              <a:ext cx="1270001" cy="1269999"/>
+            </a:xfrm>
+            <a:prstGeom prst="line">
+              <a:avLst/>
+            </a:prstGeom>
+            <a:ln w="28575">
+              <a:solidFill>
+                <a:schemeClr val="tx1"/>
+              </a:solidFill>
+            </a:ln>
+          </p:spPr>
+          <p:style>
+            <a:lnRef idx="2">
+              <a:schemeClr val="accent1"/>
+            </a:lnRef>
+            <a:fillRef idx="0">
+              <a:schemeClr val="accent1"/>
+            </a:fillRef>
+            <a:effectRef idx="1">
+              <a:schemeClr val="accent1"/>
+            </a:effectRef>
+            <a:fontRef idx="minor">
+              <a:schemeClr val="tx1"/>
+            </a:fontRef>
+          </p:style>
+        </p:cxnSp>
+      </p:grpSp>
       <p:sp>
         <p:nvSpPr>
           <p:cNvPr id="2" name="Title Placeholder 1"/>
@@ -2616,12 +4871,13 @@
         </p:nvSpPr>
         <p:spPr>
           <a:xfrm>
-            <a:off x="457200" y="274638"/>
-            <a:ext cx="8229600" cy="1143000"/>
+            <a:off x="684212" y="4487332"/>
+            <a:ext cx="8534400" cy="1507067"/>
           </a:xfrm>
           <a:prstGeom prst="rect">
             <a:avLst/>
           </a:prstGeom>
+          <a:effectLst/>
         </p:spPr>
         <p:txBody>
           <a:bodyPr vert="horz" lIns="91440" tIns="45720" rIns="91440" bIns="45720" rtlCol="0" anchor="ctr">
@@ -2630,10 +4886,10 @@
           <a:lstStyle/>
           <a:p>
             <a:r>
-              <a:rPr lang="en-US" smtClean="0"/>
+              <a:rPr lang="en-US"/>
               <a:t>Click to edit Master title style</a:t>
             </a:r>
-            <a:endParaRPr lang="en-US"/>
+            <a:endParaRPr lang="en-US" dirty="0"/>
           </a:p>
         </p:txBody>
       </p:sp>
@@ -2649,53 +4905,53 @@
         </p:nvSpPr>
         <p:spPr>
           <a:xfrm>
-            <a:off x="457200" y="1600200"/>
-            <a:ext cx="8229600" cy="4525963"/>
+            <a:off x="684212" y="685800"/>
+            <a:ext cx="8534400" cy="3615267"/>
           </a:xfrm>
           <a:prstGeom prst="rect">
             <a:avLst/>
           </a:prstGeom>
         </p:spPr>
         <p:txBody>
-          <a:bodyPr vert="horz" lIns="91440" tIns="45720" rIns="91440" bIns="45720" rtlCol="0">
+          <a:bodyPr vert="horz" lIns="91440" tIns="45720" rIns="91440" bIns="45720" rtlCol="0" anchor="ctr">
             <a:normAutofit/>
           </a:bodyPr>
           <a:lstStyle/>
           <a:p>
             <a:pPr lvl="0"/>
             <a:r>
-              <a:rPr lang="en-US" smtClean="0"/>
+              <a:rPr lang="en-US"/>
               <a:t>Click to edit Master text styles</a:t>
             </a:r>
           </a:p>
           <a:p>
             <a:pPr lvl="1"/>
             <a:r>
-              <a:rPr lang="en-US" smtClean="0"/>
+              <a:rPr lang="en-US"/>
               <a:t>Second level</a:t>
             </a:r>
           </a:p>
           <a:p>
             <a:pPr lvl="2"/>
             <a:r>
-              <a:rPr lang="en-US" smtClean="0"/>
+              <a:rPr lang="en-US"/>
               <a:t>Third level</a:t>
             </a:r>
           </a:p>
           <a:p>
             <a:pPr lvl="3"/>
             <a:r>
-              <a:rPr lang="en-US" smtClean="0"/>
+              <a:rPr lang="en-US"/>
               <a:t>Fourth level</a:t>
             </a:r>
           </a:p>
           <a:p>
             <a:pPr lvl="4"/>
             <a:r>
-              <a:rPr lang="en-US" smtClean="0"/>
+              <a:rPr lang="en-US"/>
               <a:t>Fifth level</a:t>
             </a:r>
-            <a:endParaRPr lang="en-US"/>
+            <a:endParaRPr lang="en-US" dirty="0"/>
           </a:p>
         </p:txBody>
       </p:sp>
@@ -2711,30 +4967,32 @@
         </p:nvSpPr>
         <p:spPr>
           <a:xfrm>
-            <a:off x="457200" y="6356350"/>
-            <a:ext cx="2133600" cy="365125"/>
+            <a:off x="9904412" y="6172200"/>
+            <a:ext cx="1600200" cy="365125"/>
           </a:xfrm>
           <a:prstGeom prst="rect">
             <a:avLst/>
           </a:prstGeom>
         </p:spPr>
         <p:txBody>
-          <a:bodyPr vert="horz" lIns="91440" tIns="45720" rIns="91440" bIns="45720" rtlCol="0" anchor="ctr"/>
+          <a:bodyPr vert="horz" lIns="91440" tIns="45720" rIns="91440" bIns="45720" rtlCol="0" anchor="t"/>
           <a:lstStyle>
-            <a:lvl1pPr algn="l">
-              <a:defRPr sz="1200">
+            <a:lvl1pPr algn="r">
+              <a:defRPr sz="1000" b="0" i="0">
                 <a:solidFill>
-                  <a:schemeClr val="tx1">
-                    <a:tint val="75000"/>
+                  <a:schemeClr val="bg2">
+                    <a:lumMod val="50000"/>
                   </a:schemeClr>
                 </a:solidFill>
+                <a:effectLst/>
+                <a:latin typeface="+mn-lt"/>
               </a:defRPr>
             </a:lvl1pPr>
           </a:lstStyle>
           <a:p>
             <a:fld id="{5BCAD085-E8A6-8845-BD4E-CB4CCA059FC4}" type="datetimeFigureOut">
               <a:rPr lang="en-US" smtClean="0"/>
-              <a:t>1/27/13</a:t>
+              <a:t>9/23/2026</a:t>
             </a:fld>
             <a:endParaRPr lang="en-US"/>
           </a:p>
@@ -2752,23 +5010,25 @@
         </p:nvSpPr>
         <p:spPr>
           <a:xfrm>
-            <a:off x="3124200" y="6356350"/>
-            <a:ext cx="2895600" cy="365125"/>
+            <a:off x="684212" y="6172200"/>
+            <a:ext cx="7543800" cy="365125"/>
           </a:xfrm>
           <a:prstGeom prst="rect">
             <a:avLst/>
           </a:prstGeom>
         </p:spPr>
         <p:txBody>
-          <a:bodyPr vert="horz" lIns="91440" tIns="45720" rIns="91440" bIns="45720" rtlCol="0" anchor="ctr"/>
+          <a:bodyPr vert="horz" lIns="91440" tIns="45720" rIns="91440" bIns="45720" rtlCol="0" anchor="t"/>
           <a:lstStyle>
-            <a:lvl1pPr algn="ctr">
-              <a:defRPr sz="1200">
+            <a:lvl1pPr algn="l">
+              <a:defRPr sz="1000" b="0" i="0">
                 <a:solidFill>
-                  <a:schemeClr val="tx1">
-                    <a:tint val="75000"/>
+                  <a:schemeClr val="bg2">
+                    <a:lumMod val="50000"/>
                   </a:schemeClr>
                 </a:solidFill>
+                <a:effectLst/>
+                <a:latin typeface="+mn-lt"/>
               </a:defRPr>
             </a:lvl1pPr>
           </a:lstStyle>
@@ -2789,23 +5049,25 @@
         </p:nvSpPr>
         <p:spPr>
           <a:xfrm>
-            <a:off x="6553200" y="6356350"/>
-            <a:ext cx="2133600" cy="365125"/>
+            <a:off x="10363200" y="5578475"/>
+            <a:ext cx="1142245" cy="669925"/>
           </a:xfrm>
           <a:prstGeom prst="rect">
             <a:avLst/>
           </a:prstGeom>
         </p:spPr>
         <p:txBody>
-          <a:bodyPr vert="horz" lIns="91440" tIns="45720" rIns="91440" bIns="45720" rtlCol="0" anchor="ctr"/>
+          <a:bodyPr vert="horz" lIns="91440" tIns="45720" rIns="91440" bIns="45720" rtlCol="0" anchor="b"/>
           <a:lstStyle>
             <a:lvl1pPr algn="r">
-              <a:defRPr sz="1200">
+              <a:defRPr sz="3200" b="0" i="0">
                 <a:solidFill>
-                  <a:schemeClr val="tx1">
-                    <a:tint val="75000"/>
+                  <a:schemeClr val="bg2">
+                    <a:lumMod val="50000"/>
                   </a:schemeClr>
                 </a:solidFill>
+                <a:effectLst/>
+                <a:latin typeface="+mn-lt"/>
               </a:defRPr>
             </a:lvl1pPr>
           </a:lstStyle>
@@ -2821,52 +5083,128 @@
     </p:spTree>
     <p:extLst>
       <p:ext uri="{BB962C8B-B14F-4D97-AF65-F5344CB8AC3E}">
-        <p14:creationId xmlns:p14="http://schemas.microsoft.com/office/powerpoint/2010/main" val="2209977519"/>
+        <p14:creationId xmlns:p14="http://schemas.microsoft.com/office/powerpoint/2010/main" val="910410092"/>
       </p:ext>
     </p:extLst>
   </p:cSld>
-  <p:clrMap bg1="lt1" tx1="dk1" bg2="lt2" tx2="dk2" accent1="accent1" accent2="accent2" accent3="accent3" accent4="accent4" accent5="accent5" accent6="accent6" hlink="hlink" folHlink="folHlink"/>
+  <p:clrMap bg1="dk1" tx1="lt1" bg2="dk2" tx2="lt2" accent1="accent1" accent2="accent2" accent3="accent3" accent4="accent4" accent5="accent5" accent6="accent6" hlink="hlink" folHlink="folHlink"/>
   <p:sldLayoutIdLst>
-    <p:sldLayoutId id="2147483649" r:id="rId1"/>
-    <p:sldLayoutId id="2147483650" r:id="rId2"/>
-    <p:sldLayoutId id="2147483651" r:id="rId3"/>
-    <p:sldLayoutId id="2147483652" r:id="rId4"/>
-    <p:sldLayoutId id="2147483653" r:id="rId5"/>
-    <p:sldLayoutId id="2147483654" r:id="rId6"/>
-    <p:sldLayoutId id="2147483655" r:id="rId7"/>
-    <p:sldLayoutId id="2147483656" r:id="rId8"/>
-    <p:sldLayoutId id="2147483657" r:id="rId9"/>
-    <p:sldLayoutId id="2147483658" r:id="rId10"/>
-    <p:sldLayoutId id="2147483659" r:id="rId11"/>
+    <p:sldLayoutId id="2147483930" r:id="rId1"/>
+    <p:sldLayoutId id="2147483931" r:id="rId2"/>
+    <p:sldLayoutId id="2147483932" r:id="rId3"/>
+    <p:sldLayoutId id="2147483933" r:id="rId4"/>
+    <p:sldLayoutId id="2147483934" r:id="rId5"/>
+    <p:sldLayoutId id="2147483935" r:id="rId6"/>
+    <p:sldLayoutId id="2147483936" r:id="rId7"/>
+    <p:sldLayoutId id="2147483937" r:id="rId8"/>
+    <p:sldLayoutId id="2147483938" r:id="rId9"/>
+    <p:sldLayoutId id="2147483939" r:id="rId10"/>
+    <p:sldLayoutId id="2147483940" r:id="rId11"/>
+    <p:sldLayoutId id="2147483941" r:id="rId12"/>
+    <p:sldLayoutId id="2147483942" r:id="rId13"/>
+    <p:sldLayoutId id="2147483943" r:id="rId14"/>
+    <p:sldLayoutId id="2147483944" r:id="rId15"/>
+    <p:sldLayoutId id="2147483945" r:id="rId16"/>
+    <p:sldLayoutId id="2147483946" r:id="rId17"/>
   </p:sldLayoutIdLst>
   <p:txStyles>
     <p:titleStyle>
-      <a:lvl1pPr algn="ctr" defTabSz="457200" rtl="0" eaLnBrk="1" latinLnBrk="0" hangingPunct="1">
+      <a:lvl1pPr algn="l" defTabSz="457200" rtl="0" eaLnBrk="1" latinLnBrk="0" hangingPunct="1">
         <a:spcBef>
           <a:spcPct val="0"/>
         </a:spcBef>
         <a:buNone/>
-        <a:defRPr sz="4400" kern="1200">
+        <a:defRPr sz="3600" kern="1200" cap="all">
+          <a:ln w="3175" cmpd="sng">
+            <a:noFill/>
+          </a:ln>
           <a:solidFill>
             <a:schemeClr val="tx1"/>
           </a:solidFill>
+          <a:effectLst/>
           <a:latin typeface="+mj-lt"/>
           <a:ea typeface="+mj-ea"/>
           <a:cs typeface="+mj-cs"/>
         </a:defRPr>
       </a:lvl1pPr>
+      <a:lvl2pPr eaLnBrk="1" hangingPunct="1">
+        <a:defRPr>
+          <a:solidFill>
+            <a:schemeClr val="tx2"/>
+          </a:solidFill>
+        </a:defRPr>
+      </a:lvl2pPr>
+      <a:lvl3pPr eaLnBrk="1" hangingPunct="1">
+        <a:defRPr>
+          <a:solidFill>
+            <a:schemeClr val="tx2"/>
+          </a:solidFill>
+        </a:defRPr>
+      </a:lvl3pPr>
+      <a:lvl4pPr eaLnBrk="1" hangingPunct="1">
+        <a:defRPr>
+          <a:solidFill>
+            <a:schemeClr val="tx2"/>
+          </a:solidFill>
+        </a:defRPr>
+      </a:lvl4pPr>
+      <a:lvl5pPr eaLnBrk="1" hangingPunct="1">
+        <a:defRPr>
+          <a:solidFill>
+            <a:schemeClr val="tx2"/>
+          </a:solidFill>
+        </a:defRPr>
+      </a:lvl5pPr>
+      <a:lvl6pPr eaLnBrk="1" hangingPunct="1">
+        <a:defRPr>
+          <a:solidFill>
+            <a:schemeClr val="tx2"/>
+          </a:solidFill>
+        </a:defRPr>
+      </a:lvl6pPr>
+      <a:lvl7pPr eaLnBrk="1" hangingPunct="1">
+        <a:defRPr>
+          <a:solidFill>
+            <a:schemeClr val="tx2"/>
+          </a:solidFill>
+        </a:defRPr>
+      </a:lvl7pPr>
+      <a:lvl8pPr eaLnBrk="1" hangingPunct="1">
+        <a:defRPr>
+          <a:solidFill>
+            <a:schemeClr val="tx2"/>
+          </a:solidFill>
+        </a:defRPr>
+      </a:lvl8pPr>
+      <a:lvl9pPr eaLnBrk="1" hangingPunct="1">
+        <a:defRPr>
+          <a:solidFill>
+            <a:schemeClr val="tx2"/>
+          </a:solidFill>
+        </a:defRPr>
+      </a:lvl9pPr>
     </p:titleStyle>
     <p:bodyStyle>
-      <a:lvl1pPr marL="342900" indent="-342900" algn="l" defTabSz="457200" rtl="0" eaLnBrk="1" latinLnBrk="0" hangingPunct="1">
+      <a:lvl1pPr marL="285750" indent="-285750" algn="l" defTabSz="457200" rtl="0" eaLnBrk="1" latinLnBrk="0" hangingPunct="1">
         <a:spcBef>
           <a:spcPct val="20000"/>
         </a:spcBef>
-        <a:buFont typeface="Arial"/>
-        <a:buChar char="•"/>
-        <a:defRPr sz="3200" kern="1200">
+        <a:spcAft>
+          <a:spcPts val="600"/>
+        </a:spcAft>
+        <a:buClr>
+          <a:schemeClr val="tx1"/>
+        </a:buClr>
+        <a:buSzPct val="80000"/>
+        <a:buFont typeface="Wingdings 3" panose="05040102010807070707" pitchFamily="18" charset="2"/>
+        <a:buChar char=""/>
+        <a:defRPr sz="2000" kern="1200" cap="none">
           <a:solidFill>
-            <a:schemeClr val="tx1"/>
+            <a:schemeClr val="bg2">
+              <a:lumMod val="50000"/>
+            </a:schemeClr>
           </a:solidFill>
+          <a:effectLst/>
           <a:latin typeface="+mn-lt"/>
           <a:ea typeface="+mn-ea"/>
           <a:cs typeface="+mn-cs"/>
@@ -2876,57 +5214,97 @@
         <a:spcBef>
           <a:spcPct val="20000"/>
         </a:spcBef>
-        <a:buFont typeface="Arial"/>
-        <a:buChar char="–"/>
-        <a:defRPr sz="2800" kern="1200">
+        <a:spcAft>
+          <a:spcPts val="600"/>
+        </a:spcAft>
+        <a:buClr>
+          <a:schemeClr val="tx1"/>
+        </a:buClr>
+        <a:buSzPct val="80000"/>
+        <a:buFont typeface="Wingdings 3" panose="05040102010807070707" pitchFamily="18" charset="2"/>
+        <a:buChar char=""/>
+        <a:defRPr sz="1800" kern="1200" cap="none">
           <a:solidFill>
-            <a:schemeClr val="tx1"/>
+            <a:schemeClr val="bg2">
+              <a:lumMod val="50000"/>
+            </a:schemeClr>
           </a:solidFill>
+          <a:effectLst/>
           <a:latin typeface="+mn-lt"/>
           <a:ea typeface="+mn-ea"/>
           <a:cs typeface="+mn-cs"/>
         </a:defRPr>
       </a:lvl2pPr>
-      <a:lvl3pPr marL="1143000" indent="-228600" algn="l" defTabSz="457200" rtl="0" eaLnBrk="1" latinLnBrk="0" hangingPunct="1">
+      <a:lvl3pPr marL="1200150" indent="-285750" algn="l" defTabSz="457200" rtl="0" eaLnBrk="1" latinLnBrk="0" hangingPunct="1">
         <a:spcBef>
           <a:spcPct val="20000"/>
         </a:spcBef>
-        <a:buFont typeface="Arial"/>
-        <a:buChar char="•"/>
-        <a:defRPr sz="2400" kern="1200">
+        <a:spcAft>
+          <a:spcPts val="600"/>
+        </a:spcAft>
+        <a:buClr>
+          <a:schemeClr val="tx1"/>
+        </a:buClr>
+        <a:buSzPct val="80000"/>
+        <a:buFont typeface="Wingdings 3" panose="05040102010807070707" pitchFamily="18" charset="2"/>
+        <a:buChar char=""/>
+        <a:defRPr sz="1600" kern="1200" cap="none">
           <a:solidFill>
-            <a:schemeClr val="tx1"/>
+            <a:schemeClr val="bg2">
+              <a:lumMod val="50000"/>
+            </a:schemeClr>
           </a:solidFill>
+          <a:effectLst/>
           <a:latin typeface="+mn-lt"/>
           <a:ea typeface="+mn-ea"/>
           <a:cs typeface="+mn-cs"/>
         </a:defRPr>
       </a:lvl3pPr>
-      <a:lvl4pPr marL="1600200" indent="-228600" algn="l" defTabSz="457200" rtl="0" eaLnBrk="1" latinLnBrk="0" hangingPunct="1">
+      <a:lvl4pPr marL="1543050" indent="-171450" algn="l" defTabSz="457200" rtl="0" eaLnBrk="1" latinLnBrk="0" hangingPunct="1">
         <a:spcBef>
           <a:spcPct val="20000"/>
         </a:spcBef>
-        <a:buFont typeface="Arial"/>
-        <a:buChar char="–"/>
-        <a:defRPr sz="2000" kern="1200">
+        <a:spcAft>
+          <a:spcPts val="600"/>
+        </a:spcAft>
+        <a:buClr>
+          <a:schemeClr val="tx1"/>
+        </a:buClr>
+        <a:buSzPct val="80000"/>
+        <a:buFont typeface="Wingdings 3" panose="05040102010807070707" pitchFamily="18" charset="2"/>
+        <a:buChar char=""/>
+        <a:defRPr sz="1400" kern="1200" cap="none">
           <a:solidFill>
-            <a:schemeClr val="tx1"/>
+            <a:schemeClr val="bg2">
+              <a:lumMod val="50000"/>
+            </a:schemeClr>
           </a:solidFill>
+          <a:effectLst/>
           <a:latin typeface="+mn-lt"/>
           <a:ea typeface="+mn-ea"/>
           <a:cs typeface="+mn-cs"/>
         </a:defRPr>
       </a:lvl4pPr>
-      <a:lvl5pPr marL="2057400" indent="-228600" algn="l" defTabSz="457200" rtl="0" eaLnBrk="1" latinLnBrk="0" hangingPunct="1">
+      <a:lvl5pPr marL="2114550" indent="-285750" algn="l" defTabSz="457200" rtl="0" eaLnBrk="1" latinLnBrk="0" hangingPunct="1">
         <a:spcBef>
           <a:spcPct val="20000"/>
         </a:spcBef>
-        <a:buFont typeface="Arial"/>
-        <a:buChar char="»"/>
-        <a:defRPr sz="2000" kern="1200">
+        <a:spcAft>
+          <a:spcPts val="600"/>
+        </a:spcAft>
+        <a:buClr>
+          <a:schemeClr val="tx1"/>
+        </a:buClr>
+        <a:buSzPct val="80000"/>
+        <a:buFont typeface="Wingdings 3" panose="05040102010807070707" pitchFamily="18" charset="2"/>
+        <a:buChar char=""/>
+        <a:defRPr sz="1400" kern="1200" cap="none">
           <a:solidFill>
-            <a:schemeClr val="tx1"/>
+            <a:schemeClr val="bg2">
+              <a:lumMod val="50000"/>
+            </a:schemeClr>
           </a:solidFill>
+          <a:effectLst/>
           <a:latin typeface="+mn-lt"/>
           <a:ea typeface="+mn-ea"/>
           <a:cs typeface="+mn-cs"/>
@@ -2936,12 +5314,22 @@
         <a:spcBef>
           <a:spcPct val="20000"/>
         </a:spcBef>
-        <a:buFont typeface="Arial"/>
-        <a:buChar char="•"/>
-        <a:defRPr sz="2000" kern="1200">
+        <a:spcAft>
+          <a:spcPts val="600"/>
+        </a:spcAft>
+        <a:buClr>
+          <a:schemeClr val="tx1"/>
+        </a:buClr>
+        <a:buSzPct val="80000"/>
+        <a:buFont typeface="Wingdings 3" panose="05040102010807070707" pitchFamily="18" charset="2"/>
+        <a:buChar char=""/>
+        <a:defRPr sz="1400" kern="1200" cap="none">
           <a:solidFill>
-            <a:schemeClr val="tx1"/>
+            <a:schemeClr val="bg2">
+              <a:lumMod val="50000"/>
+            </a:schemeClr>
           </a:solidFill>
+          <a:effectLst/>
           <a:latin typeface="+mn-lt"/>
           <a:ea typeface="+mn-ea"/>
           <a:cs typeface="+mn-cs"/>
@@ -2951,12 +5339,22 @@
         <a:spcBef>
           <a:spcPct val="20000"/>
         </a:spcBef>
-        <a:buFont typeface="Arial"/>
-        <a:buChar char="•"/>
-        <a:defRPr sz="2000" kern="1200">
+        <a:spcAft>
+          <a:spcPts val="600"/>
+        </a:spcAft>
+        <a:buClr>
+          <a:schemeClr val="tx1"/>
+        </a:buClr>
+        <a:buSzPct val="80000"/>
+        <a:buFont typeface="Wingdings 3" panose="05040102010807070707" pitchFamily="18" charset="2"/>
+        <a:buChar char=""/>
+        <a:defRPr sz="1400" kern="1200" cap="none">
           <a:solidFill>
-            <a:schemeClr val="tx1"/>
+            <a:schemeClr val="bg2">
+              <a:lumMod val="50000"/>
+            </a:schemeClr>
           </a:solidFill>
+          <a:effectLst/>
           <a:latin typeface="+mn-lt"/>
           <a:ea typeface="+mn-ea"/>
           <a:cs typeface="+mn-cs"/>
@@ -2966,12 +5364,22 @@
         <a:spcBef>
           <a:spcPct val="20000"/>
         </a:spcBef>
-        <a:buFont typeface="Arial"/>
-        <a:buChar char="•"/>
-        <a:defRPr sz="2000" kern="1200">
+        <a:spcAft>
+          <a:spcPts val="600"/>
+        </a:spcAft>
+        <a:buClr>
+          <a:schemeClr val="tx1"/>
+        </a:buClr>
+        <a:buSzPct val="80000"/>
+        <a:buFont typeface="Wingdings 3" panose="05040102010807070707" pitchFamily="18" charset="2"/>
+        <a:buChar char=""/>
+        <a:defRPr sz="1400" kern="1200" cap="none">
           <a:solidFill>
-            <a:schemeClr val="tx1"/>
+            <a:schemeClr val="bg2">
+              <a:lumMod val="50000"/>
+            </a:schemeClr>
           </a:solidFill>
+          <a:effectLst/>
           <a:latin typeface="+mn-lt"/>
           <a:ea typeface="+mn-ea"/>
           <a:cs typeface="+mn-cs"/>
@@ -2981,12 +5389,22 @@
         <a:spcBef>
           <a:spcPct val="20000"/>
         </a:spcBef>
-        <a:buFont typeface="Arial"/>
-        <a:buChar char="•"/>
-        <a:defRPr sz="2000" kern="1200">
+        <a:spcAft>
+          <a:spcPts val="600"/>
+        </a:spcAft>
+        <a:buClr>
+          <a:schemeClr val="tx1"/>
+        </a:buClr>
+        <a:buSzPct val="80000"/>
+        <a:buFont typeface="Wingdings 3" panose="05040102010807070707" pitchFamily="18" charset="2"/>
+        <a:buChar char=""/>
+        <a:defRPr sz="1400" kern="1200" cap="none">
           <a:solidFill>
-            <a:schemeClr val="tx1"/>
+            <a:schemeClr val="bg2">
+              <a:lumMod val="50000"/>
+            </a:schemeClr>
           </a:solidFill>
+          <a:effectLst/>
           <a:latin typeface="+mn-lt"/>
           <a:ea typeface="+mn-ea"/>
           <a:cs typeface="+mn-cs"/>
@@ -3093,7 +5511,7 @@
 </file>
 
 <file path=ppt/slides/slide1.xml><?xml version="1.0" encoding="utf-8"?>
-<p:sld xmlns:a="http://schemas.openxmlformats.org/drawingml/2006/main" xmlns:p="http://schemas.openxmlformats.org/presentationml/2006/main" xmlns:r="http://schemas.openxmlformats.org/officeDocument/2006/relationships">
+<p:sld xmlns:a="http://schemas.openxmlformats.org/drawingml/2006/main" xmlns:r="http://schemas.openxmlformats.org/officeDocument/2006/relationships" xmlns:p="http://schemas.openxmlformats.org/presentationml/2006/main">
   <p:cSld>
     <p:spTree>
       <p:nvGrpSpPr>
@@ -3101,7 +5519,14 @@
         <p:cNvGrpSpPr/>
         <p:nvPr/>
       </p:nvGrpSpPr>
-      <p:grpSpPr/>
+      <p:grpSpPr>
+        <a:xfrm>
+          <a:off x="0" y="0"/>
+          <a:ext cx="0" cy="0"/>
+          <a:chOff x="0" y="0"/>
+          <a:chExt cx="0" cy="0"/>
+        </a:xfrm>
+      </p:grpSpPr>
       <p:sp>
         <p:nvSpPr>
           <p:cNvPr id="2" name="TextBox 1"/>
@@ -3110,8 +5535,8 @@
         </p:nvSpPr>
         <p:spPr>
           <a:xfrm>
-            <a:off x="640080" y="1280160"/>
-            <a:ext cx="10972800" cy="2194560"/>
+            <a:off x="3114501" y="1280160"/>
+            <a:ext cx="6023957" cy="1631216"/>
           </a:xfrm>
           <a:prstGeom prst="rect">
             <a:avLst/>
@@ -3128,6 +5553,7 @@
               <a:defRPr sz="3100" b="1"/>
             </a:pPr>
             <a:r>
+              <a:rPr dirty="0"/>
               <a:t>IBSU LUNCH ORDERING SYSTEM</a:t>
             </a:r>
           </a:p>
@@ -3136,14 +5562,47 @@
               <a:defRPr sz="1800"/>
             </a:pPr>
             <a:r>
-              <a:t>IT0206 Advanced Computer Programming 2 • Assessment 2</a:t>
-            </a:r>
+              <a:rPr dirty="0"/>
+              <a:t>IT0206 Advanced Computer Programming 2</a:t>
+            </a:r>
+            <a:r>
+              <a:rPr lang="en-US" dirty="0"/>
+              <a:t>C</a:t>
+            </a:r>
+            <a:r>
+              <a:rPr dirty="0"/>
+              <a:t> • Assessment 2</a:t>
+            </a:r>
+            <a:r>
+              <a:rPr lang="en-US" dirty="0"/>
+              <a:t>C</a:t>
+            </a:r>
+          </a:p>
+          <a:p>
+            <a:pPr algn="ctr">
+              <a:defRPr sz="1800"/>
+            </a:pPr>
+            <a:r>
+              <a:rPr lang="en-US" dirty="0"/>
+              <a:t>Team Members</a:t>
+            </a:r>
+          </a:p>
+          <a:p>
+            <a:pPr algn="ctr">
+              <a:defRPr sz="1800"/>
+            </a:pPr>
+            <a:r>
+              <a:rPr lang="en-US" dirty="0"/>
+              <a:t>Johannesh Pesh -- ST240723</a:t>
+            </a:r>
+            <a:endParaRPr dirty="0"/>
           </a:p>
           <a:p>
             <a:pPr algn="ctr">
               <a:defRPr sz="1500"/>
             </a:pPr>
             <a:r>
+              <a:rPr dirty="0"/>
               <a:t>Gunther Darius — ST240158</a:t>
             </a:r>
           </a:p>
@@ -3158,7 +5617,7 @@
 </file>
 
 <file path=ppt/slides/slide10.xml><?xml version="1.0" encoding="utf-8"?>
-<p:sld xmlns:a="http://schemas.openxmlformats.org/drawingml/2006/main" xmlns:p="http://schemas.openxmlformats.org/presentationml/2006/main" xmlns:r="http://schemas.openxmlformats.org/officeDocument/2006/relationships">
+<p:sld xmlns:a="http://schemas.openxmlformats.org/drawingml/2006/main" xmlns:r="http://schemas.openxmlformats.org/officeDocument/2006/relationships" xmlns:p="http://schemas.openxmlformats.org/presentationml/2006/main">
   <p:cSld>
     <p:spTree>
       <p:nvGrpSpPr>
@@ -3166,7 +5625,14 @@
         <p:cNvGrpSpPr/>
         <p:nvPr/>
       </p:nvGrpSpPr>
-      <p:grpSpPr/>
+      <p:grpSpPr>
+        <a:xfrm>
+          <a:off x="0" y="0"/>
+          <a:ext cx="0" cy="0"/>
+          <a:chOff x="0" y="0"/>
+          <a:chExt cx="0" cy="0"/>
+        </a:xfrm>
+      </p:grpSpPr>
       <p:sp>
         <p:nvSpPr>
           <p:cNvPr id="2" name="TextBox 1"/>
@@ -3215,7 +5681,7 @@
         <p:spPr>
           <a:xfrm>
             <a:off x="6400800" y="1097280"/>
-            <a:ext cx="5212080" cy="2055876"/>
+            <a:ext cx="5212080" cy="2331720"/>
           </a:xfrm>
           <a:prstGeom prst="rect">
             <a:avLst/>
@@ -3309,7 +5775,7 @@
 </file>
 
 <file path=ppt/slides/slide11.xml><?xml version="1.0" encoding="utf-8"?>
-<p:sld xmlns:a="http://schemas.openxmlformats.org/drawingml/2006/main" xmlns:p="http://schemas.openxmlformats.org/presentationml/2006/main" xmlns:r="http://schemas.openxmlformats.org/officeDocument/2006/relationships">
+<p:sld xmlns:a="http://schemas.openxmlformats.org/drawingml/2006/main" xmlns:r="http://schemas.openxmlformats.org/officeDocument/2006/relationships" xmlns:p="http://schemas.openxmlformats.org/presentationml/2006/main">
   <p:cSld>
     <p:spTree>
       <p:nvGrpSpPr>
@@ -3317,7 +5783,14 @@
         <p:cNvGrpSpPr/>
         <p:nvPr/>
       </p:nvGrpSpPr>
-      <p:grpSpPr/>
+      <p:grpSpPr>
+        <a:xfrm>
+          <a:off x="0" y="0"/>
+          <a:ext cx="0" cy="0"/>
+          <a:chOff x="0" y="0"/>
+          <a:chExt cx="0" cy="0"/>
+        </a:xfrm>
+      </p:grpSpPr>
       <p:sp>
         <p:nvSpPr>
           <p:cNvPr id="2" name="TextBox 1"/>
@@ -3366,7 +5839,7 @@
         <p:spPr>
           <a:xfrm>
             <a:off x="6400800" y="1097280"/>
-            <a:ext cx="5212080" cy="1094775"/>
+            <a:ext cx="5212080" cy="1950720"/>
           </a:xfrm>
           <a:prstGeom prst="rect">
             <a:avLst/>
@@ -3449,7 +5922,7 @@
 </file>
 
 <file path=ppt/slides/slide12.xml><?xml version="1.0" encoding="utf-8"?>
-<p:sld xmlns:a="http://schemas.openxmlformats.org/drawingml/2006/main" xmlns:p="http://schemas.openxmlformats.org/presentationml/2006/main" xmlns:r="http://schemas.openxmlformats.org/officeDocument/2006/relationships">
+<p:sld xmlns:a="http://schemas.openxmlformats.org/drawingml/2006/main" xmlns:r="http://schemas.openxmlformats.org/officeDocument/2006/relationships" xmlns:p="http://schemas.openxmlformats.org/presentationml/2006/main">
   <p:cSld>
     <p:spTree>
       <p:nvGrpSpPr>
@@ -3457,7 +5930,14 @@
         <p:cNvGrpSpPr/>
         <p:nvPr/>
       </p:nvGrpSpPr>
-      <p:grpSpPr/>
+      <p:grpSpPr>
+        <a:xfrm>
+          <a:off x="0" y="0"/>
+          <a:ext cx="0" cy="0"/>
+          <a:chOff x="0" y="0"/>
+          <a:chExt cx="0" cy="0"/>
+        </a:xfrm>
+      </p:grpSpPr>
       <p:sp>
         <p:nvSpPr>
           <p:cNvPr id="2" name="TextBox 1"/>
@@ -3576,7 +6056,7 @@
 </file>
 
 <file path=ppt/slides/slide13.xml><?xml version="1.0" encoding="utf-8"?>
-<p:sld xmlns:a="http://schemas.openxmlformats.org/drawingml/2006/main" xmlns:p="http://schemas.openxmlformats.org/presentationml/2006/main" xmlns:r="http://schemas.openxmlformats.org/officeDocument/2006/relationships">
+<p:sld xmlns:a="http://schemas.openxmlformats.org/drawingml/2006/main" xmlns:r="http://schemas.openxmlformats.org/officeDocument/2006/relationships" xmlns:p="http://schemas.openxmlformats.org/presentationml/2006/main">
   <p:cSld>
     <p:spTree>
       <p:nvGrpSpPr>
@@ -3584,7 +6064,14 @@
         <p:cNvGrpSpPr/>
         <p:nvPr/>
       </p:nvGrpSpPr>
-      <p:grpSpPr/>
+      <p:grpSpPr>
+        <a:xfrm>
+          <a:off x="0" y="0"/>
+          <a:ext cx="0" cy="0"/>
+          <a:chOff x="0" y="0"/>
+          <a:chExt cx="0" cy="0"/>
+        </a:xfrm>
+      </p:grpSpPr>
       <p:sp>
         <p:nvSpPr>
           <p:cNvPr id="2" name="TextBox 1"/>
@@ -3703,7 +6190,7 @@
 </file>
 
 <file path=ppt/slides/slide14.xml><?xml version="1.0" encoding="utf-8"?>
-<p:sld xmlns:a="http://schemas.openxmlformats.org/drawingml/2006/main" xmlns:p="http://schemas.openxmlformats.org/presentationml/2006/main" xmlns:r="http://schemas.openxmlformats.org/officeDocument/2006/relationships">
+<p:sld xmlns:a="http://schemas.openxmlformats.org/drawingml/2006/main" xmlns:r="http://schemas.openxmlformats.org/officeDocument/2006/relationships" xmlns:p="http://schemas.openxmlformats.org/presentationml/2006/main">
   <p:cSld>
     <p:spTree>
       <p:nvGrpSpPr>
@@ -3711,7 +6198,14 @@
         <p:cNvGrpSpPr/>
         <p:nvPr/>
       </p:nvGrpSpPr>
-      <p:grpSpPr/>
+      <p:grpSpPr>
+        <a:xfrm>
+          <a:off x="0" y="0"/>
+          <a:ext cx="0" cy="0"/>
+          <a:chOff x="0" y="0"/>
+          <a:chExt cx="0" cy="0"/>
+        </a:xfrm>
+      </p:grpSpPr>
       <p:sp>
         <p:nvSpPr>
           <p:cNvPr id="2" name="TextBox 1"/>
@@ -3819,7 +6313,7 @@
 </file>
 
 <file path=ppt/slides/slide15.xml><?xml version="1.0" encoding="utf-8"?>
-<p:sld xmlns:a="http://schemas.openxmlformats.org/drawingml/2006/main" xmlns:p="http://schemas.openxmlformats.org/presentationml/2006/main" xmlns:r="http://schemas.openxmlformats.org/officeDocument/2006/relationships">
+<p:sld xmlns:a="http://schemas.openxmlformats.org/drawingml/2006/main" xmlns:r="http://schemas.openxmlformats.org/officeDocument/2006/relationships" xmlns:p="http://schemas.openxmlformats.org/presentationml/2006/main">
   <p:cSld>
     <p:spTree>
       <p:nvGrpSpPr>
@@ -3827,7 +6321,14 @@
         <p:cNvGrpSpPr/>
         <p:nvPr/>
       </p:nvGrpSpPr>
-      <p:grpSpPr/>
+      <p:grpSpPr>
+        <a:xfrm>
+          <a:off x="0" y="0"/>
+          <a:ext cx="0" cy="0"/>
+          <a:chOff x="0" y="0"/>
+          <a:chExt cx="0" cy="0"/>
+        </a:xfrm>
+      </p:grpSpPr>
       <p:sp>
         <p:nvSpPr>
           <p:cNvPr id="2" name="TextBox 1"/>
@@ -3924,7 +6425,7 @@
 </file>
 
 <file path=ppt/slides/slide2.xml><?xml version="1.0" encoding="utf-8"?>
-<p:sld xmlns:a="http://schemas.openxmlformats.org/drawingml/2006/main" xmlns:p="http://schemas.openxmlformats.org/presentationml/2006/main" xmlns:r="http://schemas.openxmlformats.org/officeDocument/2006/relationships">
+<p:sld xmlns:a="http://schemas.openxmlformats.org/drawingml/2006/main" xmlns:r="http://schemas.openxmlformats.org/officeDocument/2006/relationships" xmlns:p="http://schemas.openxmlformats.org/presentationml/2006/main">
   <p:cSld>
     <p:spTree>
       <p:nvGrpSpPr>
@@ -3932,7 +6433,14 @@
         <p:cNvGrpSpPr/>
         <p:nvPr/>
       </p:nvGrpSpPr>
-      <p:grpSpPr/>
+      <p:grpSpPr>
+        <a:xfrm>
+          <a:off x="0" y="0"/>
+          <a:ext cx="0" cy="0"/>
+          <a:chOff x="0" y="0"/>
+          <a:chExt cx="0" cy="0"/>
+        </a:xfrm>
+      </p:grpSpPr>
       <p:sp>
         <p:nvSpPr>
           <p:cNvPr id="2" name="TextBox 1"/>
@@ -4029,7 +6537,7 @@
 </file>
 
 <file path=ppt/slides/slide3.xml><?xml version="1.0" encoding="utf-8"?>
-<p:sld xmlns:a="http://schemas.openxmlformats.org/drawingml/2006/main" xmlns:p="http://schemas.openxmlformats.org/presentationml/2006/main" xmlns:r="http://schemas.openxmlformats.org/officeDocument/2006/relationships">
+<p:sld xmlns:a="http://schemas.openxmlformats.org/drawingml/2006/main" xmlns:r="http://schemas.openxmlformats.org/officeDocument/2006/relationships" xmlns:p="http://schemas.openxmlformats.org/presentationml/2006/main">
   <p:cSld>
     <p:spTree>
       <p:nvGrpSpPr>
@@ -4037,7 +6545,14 @@
         <p:cNvGrpSpPr/>
         <p:nvPr/>
       </p:nvGrpSpPr>
-      <p:grpSpPr/>
+      <p:grpSpPr>
+        <a:xfrm>
+          <a:off x="0" y="0"/>
+          <a:ext cx="0" cy="0"/>
+          <a:chOff x="0" y="0"/>
+          <a:chExt cx="0" cy="0"/>
+        </a:xfrm>
+      </p:grpSpPr>
       <p:sp>
         <p:nvSpPr>
           <p:cNvPr id="2" name="TextBox 1"/>
@@ -4145,7 +6660,7 @@
 </file>
 
 <file path=ppt/slides/slide4.xml><?xml version="1.0" encoding="utf-8"?>
-<p:sld xmlns:a="http://schemas.openxmlformats.org/drawingml/2006/main" xmlns:p="http://schemas.openxmlformats.org/presentationml/2006/main" xmlns:r="http://schemas.openxmlformats.org/officeDocument/2006/relationships">
+<p:sld xmlns:a="http://schemas.openxmlformats.org/drawingml/2006/main" xmlns:r="http://schemas.openxmlformats.org/officeDocument/2006/relationships" xmlns:p="http://schemas.openxmlformats.org/presentationml/2006/main">
   <p:cSld>
     <p:spTree>
       <p:nvGrpSpPr>
@@ -4153,7 +6668,14 @@
         <p:cNvGrpSpPr/>
         <p:nvPr/>
       </p:nvGrpSpPr>
-      <p:grpSpPr/>
+      <p:grpSpPr>
+        <a:xfrm>
+          <a:off x="0" y="0"/>
+          <a:ext cx="0" cy="0"/>
+          <a:chOff x="0" y="0"/>
+          <a:chExt cx="0" cy="0"/>
+        </a:xfrm>
+      </p:grpSpPr>
       <p:sp>
         <p:nvSpPr>
           <p:cNvPr id="2" name="TextBox 1"/>
@@ -4272,7 +6794,7 @@
 </file>
 
 <file path=ppt/slides/slide5.xml><?xml version="1.0" encoding="utf-8"?>
-<p:sld xmlns:a="http://schemas.openxmlformats.org/drawingml/2006/main" xmlns:p="http://schemas.openxmlformats.org/presentationml/2006/main" xmlns:r="http://schemas.openxmlformats.org/officeDocument/2006/relationships">
+<p:sld xmlns:a="http://schemas.openxmlformats.org/drawingml/2006/main" xmlns:r="http://schemas.openxmlformats.org/officeDocument/2006/relationships" xmlns:p="http://schemas.openxmlformats.org/presentationml/2006/main">
   <p:cSld>
     <p:spTree>
       <p:nvGrpSpPr>
@@ -4280,7 +6802,14 @@
         <p:cNvGrpSpPr/>
         <p:nvPr/>
       </p:nvGrpSpPr>
-      <p:grpSpPr/>
+      <p:grpSpPr>
+        <a:xfrm>
+          <a:off x="0" y="0"/>
+          <a:ext cx="0" cy="0"/>
+          <a:chOff x="0" y="0"/>
+          <a:chExt cx="0" cy="0"/>
+        </a:xfrm>
+      </p:grpSpPr>
       <p:sp>
         <p:nvSpPr>
           <p:cNvPr id="2" name="TextBox 1"/>
@@ -4328,8 +6857,8 @@
         </p:blipFill>
         <p:spPr>
           <a:xfrm>
-            <a:off x="6400800" y="1097280"/>
-            <a:ext cx="5212080" cy="706989"/>
+            <a:off x="6400800" y="925287"/>
+            <a:ext cx="5212080" cy="2155370"/>
           </a:xfrm>
           <a:prstGeom prst="rect">
             <a:avLst/>
@@ -4412,7 +6941,7 @@
 </file>
 
 <file path=ppt/slides/slide6.xml><?xml version="1.0" encoding="utf-8"?>
-<p:sld xmlns:a="http://schemas.openxmlformats.org/drawingml/2006/main" xmlns:p="http://schemas.openxmlformats.org/presentationml/2006/main" xmlns:r="http://schemas.openxmlformats.org/officeDocument/2006/relationships">
+<p:sld xmlns:a="http://schemas.openxmlformats.org/drawingml/2006/main" xmlns:r="http://schemas.openxmlformats.org/officeDocument/2006/relationships" xmlns:p="http://schemas.openxmlformats.org/presentationml/2006/main">
   <p:cSld>
     <p:spTree>
       <p:nvGrpSpPr>
@@ -4420,7 +6949,14 @@
         <p:cNvGrpSpPr/>
         <p:nvPr/>
       </p:nvGrpSpPr>
-      <p:grpSpPr/>
+      <p:grpSpPr>
+        <a:xfrm>
+          <a:off x="0" y="0"/>
+          <a:ext cx="0" cy="0"/>
+          <a:chOff x="0" y="0"/>
+          <a:chExt cx="0" cy="0"/>
+        </a:xfrm>
+      </p:grpSpPr>
       <p:sp>
         <p:nvSpPr>
           <p:cNvPr id="2" name="TextBox 1"/>
@@ -4468,8 +7004,8 @@
         </p:blipFill>
         <p:spPr>
           <a:xfrm>
-            <a:off x="6400800" y="1097280"/>
-            <a:ext cx="5212080" cy="2304142"/>
+            <a:off x="6400800" y="936171"/>
+            <a:ext cx="5212080" cy="2465251"/>
           </a:xfrm>
           <a:prstGeom prst="rect">
             <a:avLst/>
@@ -4552,7 +7088,7 @@
 </file>
 
 <file path=ppt/slides/slide7.xml><?xml version="1.0" encoding="utf-8"?>
-<p:sld xmlns:a="http://schemas.openxmlformats.org/drawingml/2006/main" xmlns:p="http://schemas.openxmlformats.org/presentationml/2006/main" xmlns:r="http://schemas.openxmlformats.org/officeDocument/2006/relationships">
+<p:sld xmlns:a="http://schemas.openxmlformats.org/drawingml/2006/main" xmlns:r="http://schemas.openxmlformats.org/officeDocument/2006/relationships" xmlns:p="http://schemas.openxmlformats.org/presentationml/2006/main">
   <p:cSld>
     <p:spTree>
       <p:nvGrpSpPr>
@@ -4560,7 +7096,14 @@
         <p:cNvGrpSpPr/>
         <p:nvPr/>
       </p:nvGrpSpPr>
-      <p:grpSpPr/>
+      <p:grpSpPr>
+        <a:xfrm>
+          <a:off x="0" y="0"/>
+          <a:ext cx="0" cy="0"/>
+          <a:chOff x="0" y="0"/>
+          <a:chExt cx="0" cy="0"/>
+        </a:xfrm>
+      </p:grpSpPr>
       <p:sp>
         <p:nvSpPr>
           <p:cNvPr id="2" name="TextBox 1"/>
@@ -4609,7 +7152,7 @@
         <p:spPr>
           <a:xfrm>
             <a:off x="6400800" y="1097280"/>
-            <a:ext cx="5212080" cy="2246883"/>
+            <a:ext cx="5212080" cy="2723606"/>
           </a:xfrm>
           <a:prstGeom prst="rect">
             <a:avLst/>
@@ -4692,7 +7235,7 @@
 </file>
 
 <file path=ppt/slides/slide8.xml><?xml version="1.0" encoding="utf-8"?>
-<p:sld xmlns:a="http://schemas.openxmlformats.org/drawingml/2006/main" xmlns:p="http://schemas.openxmlformats.org/presentationml/2006/main" xmlns:r="http://schemas.openxmlformats.org/officeDocument/2006/relationships">
+<p:sld xmlns:a="http://schemas.openxmlformats.org/drawingml/2006/main" xmlns:r="http://schemas.openxmlformats.org/officeDocument/2006/relationships" xmlns:p="http://schemas.openxmlformats.org/presentationml/2006/main">
   <p:cSld>
     <p:spTree>
       <p:nvGrpSpPr>
@@ -4700,7 +7243,14 @@
         <p:cNvGrpSpPr/>
         <p:nvPr/>
       </p:nvGrpSpPr>
-      <p:grpSpPr/>
+      <p:grpSpPr>
+        <a:xfrm>
+          <a:off x="0" y="0"/>
+          <a:ext cx="0" cy="0"/>
+          <a:chOff x="0" y="0"/>
+          <a:chExt cx="0" cy="0"/>
+        </a:xfrm>
+      </p:grpSpPr>
       <p:sp>
         <p:nvSpPr>
           <p:cNvPr id="2" name="TextBox 1"/>
@@ -4748,8 +7298,8 @@
         </p:blipFill>
         <p:spPr>
           <a:xfrm>
-            <a:off x="6400800" y="1097280"/>
-            <a:ext cx="5212080" cy="1476756"/>
+            <a:off x="6400800" y="1097279"/>
+            <a:ext cx="5212080" cy="2222863"/>
           </a:xfrm>
           <a:prstGeom prst="rect">
             <a:avLst/>
@@ -4843,7 +7393,7 @@
 </file>
 
 <file path=ppt/slides/slide9.xml><?xml version="1.0" encoding="utf-8"?>
-<p:sld xmlns:a="http://schemas.openxmlformats.org/drawingml/2006/main" xmlns:p="http://schemas.openxmlformats.org/presentationml/2006/main" xmlns:r="http://schemas.openxmlformats.org/officeDocument/2006/relationships">
+<p:sld xmlns:a="http://schemas.openxmlformats.org/drawingml/2006/main" xmlns:r="http://schemas.openxmlformats.org/officeDocument/2006/relationships" xmlns:p="http://schemas.openxmlformats.org/presentationml/2006/main">
   <p:cSld>
     <p:spTree>
       <p:nvGrpSpPr>
@@ -4851,7 +7401,14 @@
         <p:cNvGrpSpPr/>
         <p:nvPr/>
       </p:nvGrpSpPr>
-      <p:grpSpPr/>
+      <p:grpSpPr>
+        <a:xfrm>
+          <a:off x="0" y="0"/>
+          <a:ext cx="0" cy="0"/>
+          <a:chOff x="0" y="0"/>
+          <a:chExt cx="0" cy="0"/>
+        </a:xfrm>
+      </p:grpSpPr>
       <p:sp>
         <p:nvSpPr>
           <p:cNvPr id="2" name="TextBox 1"/>
@@ -4899,7 +7456,7 @@
         </p:blipFill>
         <p:spPr>
           <a:xfrm>
-            <a:off x="6400800" y="1097280"/>
+            <a:off x="6446520" y="1097280"/>
             <a:ext cx="5212080" cy="2345436"/>
           </a:xfrm>
           <a:prstGeom prst="rect">
@@ -4994,9 +7551,9 @@
 </file>
 
 <file path=ppt/theme/theme1.xml><?xml version="1.0" encoding="utf-8"?>
-<a:theme xmlns:a="http://schemas.openxmlformats.org/drawingml/2006/main" name="Office Theme">
+<a:theme xmlns:a="http://schemas.openxmlformats.org/drawingml/2006/main" name="Slice">
   <a:themeElements>
-    <a:clrScheme name="Office">
+    <a:clrScheme name="Violet II">
       <a:dk1>
         <a:sysClr val="windowText" lastClr="000000"/>
       </a:dk1>
@@ -5004,83 +7561,48 @@
         <a:sysClr val="window" lastClr="FFFFFF"/>
       </a:lt1>
       <a:dk2>
-        <a:srgbClr val="1F497D"/>
+        <a:srgbClr val="632E62"/>
       </a:dk2>
       <a:lt2>
-        <a:srgbClr val="EEECE1"/>
+        <a:srgbClr val="EAE5EB"/>
       </a:lt2>
       <a:accent1>
-        <a:srgbClr val="4F81BD"/>
+        <a:srgbClr val="92278F"/>
       </a:accent1>
       <a:accent2>
-        <a:srgbClr val="C0504D"/>
+        <a:srgbClr val="9B57D3"/>
       </a:accent2>
       <a:accent3>
-        <a:srgbClr val="9BBB59"/>
+        <a:srgbClr val="755DD9"/>
       </a:accent3>
       <a:accent4>
-        <a:srgbClr val="8064A2"/>
+        <a:srgbClr val="665EB8"/>
       </a:accent4>
       <a:accent5>
-        <a:srgbClr val="4BACC6"/>
+        <a:srgbClr val="45A5ED"/>
       </a:accent5>
       <a:accent6>
-        <a:srgbClr val="F79646"/>
+        <a:srgbClr val="5982DB"/>
       </a:accent6>
       <a:hlink>
-        <a:srgbClr val="0000FF"/>
+        <a:srgbClr val="0066FF"/>
       </a:hlink>
       <a:folHlink>
-        <a:srgbClr val="800080"/>
+        <a:srgbClr val="666699"/>
       </a:folHlink>
     </a:clrScheme>
-    <a:fontScheme name="Office">
+    <a:fontScheme name="Slice">
       <a:majorFont>
-        <a:latin typeface="Calibri"/>
+        <a:latin typeface="Century Gothic" panose="020B0502020202020204"/>
         <a:ea typeface=""/>
         <a:cs typeface=""/>
-        <a:font script="Jpan" typeface="ＭＳ Ｐゴシック"/>
-        <a:font script="Hang" typeface="맑은 고딕"/>
-        <a:font script="Hans" typeface="宋体"/>
-        <a:font script="Hant" typeface="新細明體"/>
-        <a:font script="Arab" typeface="Times New Roman"/>
-        <a:font script="Hebr" typeface="Times New Roman"/>
-        <a:font script="Thai" typeface="Angsana New"/>
-        <a:font script="Ethi" typeface="Nyala"/>
-        <a:font script="Beng" typeface="Vrinda"/>
-        <a:font script="Gujr" typeface="Shruti"/>
-        <a:font script="Khmr" typeface="MoolBoran"/>
-        <a:font script="Knda" typeface="Tunga"/>
-        <a:font script="Guru" typeface="Raavi"/>
-        <a:font script="Cans" typeface="Euphemia"/>
-        <a:font script="Cher" typeface="Plantagenet Cherokee"/>
-        <a:font script="Yiii" typeface="Microsoft Yi Baiti"/>
-        <a:font script="Tibt" typeface="Microsoft Himalaya"/>
-        <a:font script="Thaa" typeface="MV Boli"/>
-        <a:font script="Deva" typeface="Mangal"/>
-        <a:font script="Telu" typeface="Gautami"/>
-        <a:font script="Taml" typeface="Latha"/>
-        <a:font script="Syrc" typeface="Estrangelo Edessa"/>
-        <a:font script="Orya" typeface="Kalinga"/>
-        <a:font script="Mlym" typeface="Kartika"/>
-        <a:font script="Laoo" typeface="DokChampa"/>
-        <a:font script="Sinh" typeface="Iskoola Pota"/>
-        <a:font script="Mong" typeface="Mongolian Baiti"/>
-        <a:font script="Viet" typeface="Times New Roman"/>
-        <a:font script="Uigh" typeface="Microsoft Uighur"/>
-        <a:font script="Geor" typeface="Sylfaen"/>
-      </a:majorFont>
-      <a:minorFont>
-        <a:latin typeface="Calibri"/>
-        <a:ea typeface=""/>
-        <a:cs typeface=""/>
-        <a:font script="Jpan" typeface="ＭＳ Ｐゴシック"/>
-        <a:font script="Hang" typeface="맑은 고딕"/>
-        <a:font script="Hans" typeface="宋体"/>
-        <a:font script="Hant" typeface="新細明體"/>
-        <a:font script="Arab" typeface="Arial"/>
-        <a:font script="Hebr" typeface="Arial"/>
-        <a:font script="Thai" typeface="Cordia New"/>
+        <a:font script="Jpan" typeface="メイリオ"/>
+        <a:font script="Hang" typeface="HY중고딕"/>
+        <a:font script="Hans" typeface="幼圆"/>
+        <a:font script="Hant" typeface="微軟正黑體"/>
+        <a:font script="Arab" typeface="Tahoma"/>
+        <a:font script="Hebr" typeface="Gisha"/>
+        <a:font script="Thai" typeface="DilleniaUPC"/>
         <a:font script="Ethi" typeface="Nyala"/>
         <a:font script="Beng" typeface="Vrinda"/>
         <a:font script="Gujr" typeface="Shruti"/>
@@ -5101,12 +7623,47 @@
         <a:font script="Laoo" typeface="DokChampa"/>
         <a:font script="Sinh" typeface="Iskoola Pota"/>
         <a:font script="Mong" typeface="Mongolian Baiti"/>
-        <a:font script="Viet" typeface="Arial"/>
+        <a:font script="Viet" typeface="Tahoma"/>
+        <a:font script="Uigh" typeface="Microsoft Uighur"/>
+        <a:font script="Geor" typeface="Sylfaen"/>
+      </a:majorFont>
+      <a:minorFont>
+        <a:latin typeface="Century Gothic" panose="020B0502020202020204"/>
+        <a:ea typeface=""/>
+        <a:cs typeface=""/>
+        <a:font script="Jpan" typeface="メイリオ"/>
+        <a:font script="Hang" typeface="HY중고딕"/>
+        <a:font script="Hans" typeface="幼圆"/>
+        <a:font script="Hant" typeface="微軟正黑體"/>
+        <a:font script="Arab" typeface="Tahoma"/>
+        <a:font script="Hebr" typeface="Gisha"/>
+        <a:font script="Thai" typeface="DilleniaUPC"/>
+        <a:font script="Ethi" typeface="Nyala"/>
+        <a:font script="Beng" typeface="Vrinda"/>
+        <a:font script="Gujr" typeface="Shruti"/>
+        <a:font script="Khmr" typeface="DaunPenh"/>
+        <a:font script="Knda" typeface="Tunga"/>
+        <a:font script="Guru" typeface="Raavi"/>
+        <a:font script="Cans" typeface="Euphemia"/>
+        <a:font script="Cher" typeface="Plantagenet Cherokee"/>
+        <a:font script="Yiii" typeface="Microsoft Yi Baiti"/>
+        <a:font script="Tibt" typeface="Microsoft Himalaya"/>
+        <a:font script="Thaa" typeface="MV Boli"/>
+        <a:font script="Deva" typeface="Mangal"/>
+        <a:font script="Telu" typeface="Gautami"/>
+        <a:font script="Taml" typeface="Latha"/>
+        <a:font script="Syrc" typeface="Estrangelo Edessa"/>
+        <a:font script="Orya" typeface="Kalinga"/>
+        <a:font script="Mlym" typeface="Kartika"/>
+        <a:font script="Laoo" typeface="DokChampa"/>
+        <a:font script="Sinh" typeface="Iskoola Pota"/>
+        <a:font script="Mong" typeface="Mongolian Baiti"/>
+        <a:font script="Viet" typeface="Tahoma"/>
         <a:font script="Uigh" typeface="Microsoft Uighur"/>
         <a:font script="Geor" typeface="Sylfaen"/>
       </a:minorFont>
     </a:fontScheme>
-    <a:fmtScheme name="Office">
+    <a:fmtScheme name="Slice">
       <a:fillStyleLst>
         <a:solidFill>
           <a:schemeClr val="phClr"/>
@@ -5115,62 +7672,61 @@
           <a:gsLst>
             <a:gs pos="0">
               <a:schemeClr val="phClr">
-                <a:tint val="50000"/>
-                <a:satMod val="300000"/>
-              </a:schemeClr>
-            </a:gs>
-            <a:gs pos="35000">
-              <a:schemeClr val="phClr">
-                <a:tint val="37000"/>
-                <a:satMod val="300000"/>
+                <a:tint val="62000"/>
+                <a:hueMod val="94000"/>
+                <a:satMod val="140000"/>
+                <a:lumMod val="110000"/>
               </a:schemeClr>
             </a:gs>
             <a:gs pos="100000">
               <a:schemeClr val="phClr">
-                <a:tint val="15000"/>
-                <a:satMod val="350000"/>
+                <a:tint val="84000"/>
+                <a:satMod val="160000"/>
               </a:schemeClr>
             </a:gs>
           </a:gsLst>
-          <a:lin ang="16200000" scaled="1"/>
+          <a:lin ang="5400000" scaled="0"/>
         </a:gradFill>
         <a:gradFill rotWithShape="1">
           <a:gsLst>
             <a:gs pos="0">
               <a:schemeClr val="phClr">
-                <a:tint val="100000"/>
-                <a:shade val="100000"/>
+                <a:tint val="98000"/>
+                <a:hueMod val="94000"/>
                 <a:satMod val="130000"/>
+                <a:lumMod val="128000"/>
               </a:schemeClr>
             </a:gs>
             <a:gs pos="100000">
               <a:schemeClr val="phClr">
-                <a:tint val="50000"/>
-                <a:shade val="100000"/>
-                <a:satMod val="350000"/>
+                <a:shade val="94000"/>
+                <a:lumMod val="88000"/>
               </a:schemeClr>
             </a:gs>
           </a:gsLst>
-          <a:lin ang="16200000" scaled="0"/>
+          <a:lin ang="5400000" scaled="0"/>
         </a:gradFill>
       </a:fillStyleLst>
       <a:lnStyleLst>
-        <a:ln w="9525" cap="flat" cmpd="sng" algn="ctr">
+        <a:ln w="9525" cap="rnd" cmpd="sng" algn="ctr">
           <a:solidFill>
             <a:schemeClr val="phClr">
-              <a:shade val="95000"/>
-              <a:satMod val="105000"/>
+              <a:tint val="76000"/>
+              <a:alpha val="60000"/>
+              <a:hueMod val="94000"/>
             </a:schemeClr>
           </a:solidFill>
           <a:prstDash val="solid"/>
         </a:ln>
-        <a:ln w="25400" cap="flat" cmpd="sng" algn="ctr">
+        <a:ln w="15875" cap="rnd" cmpd="sng" algn="ctr">
           <a:solidFill>
-            <a:schemeClr val="phClr"/>
+            <a:schemeClr val="phClr">
+              <a:hueMod val="94000"/>
+            </a:schemeClr>
           </a:solidFill>
           <a:prstDash val="solid"/>
         </a:ln>
-        <a:ln w="38100" cap="flat" cmpd="sng" algn="ctr">
+        <a:ln w="28575" cap="rnd" cmpd="sng" algn="ctr">
           <a:solidFill>
             <a:schemeClr val="phClr"/>
           </a:solidFill>
@@ -5179,28 +7735,22 @@
       </a:lnStyleLst>
       <a:effectStyleLst>
         <a:effectStyle>
+          <a:effectLst/>
+        </a:effectStyle>
+        <a:effectStyle>
           <a:effectLst>
-            <a:outerShdw blurRad="40000" dist="20000" dir="5400000" rotWithShape="0">
+            <a:innerShdw blurRad="25400" dist="12700" dir="13500000">
               <a:srgbClr val="000000">
-                <a:alpha val="38000"/>
+                <a:alpha val="45000"/>
               </a:srgbClr>
-            </a:outerShdw>
+            </a:innerShdw>
           </a:effectLst>
         </a:effectStyle>
         <a:effectStyle>
           <a:effectLst>
-            <a:outerShdw blurRad="40000" dist="23000" dir="5400000" rotWithShape="0">
+            <a:outerShdw blurRad="50800" dist="38100" dir="5400000" rotWithShape="0">
               <a:srgbClr val="000000">
-                <a:alpha val="35000"/>
-              </a:srgbClr>
-            </a:outerShdw>
-          </a:effectLst>
-        </a:effectStyle>
-        <a:effectStyle>
-          <a:effectLst>
-            <a:outerShdw blurRad="40000" dist="23000" dir="5400000" rotWithShape="0">
-              <a:srgbClr val="000000">
-                <a:alpha val="35000"/>
+                <a:alpha val="46000"/>
               </a:srgbClr>
             </a:outerShdw>
           </a:effectLst>
@@ -5208,12 +7758,10 @@
             <a:camera prst="orthographicFront">
               <a:rot lat="0" lon="0" rev="0"/>
             </a:camera>
-            <a:lightRig rig="threePt" dir="t">
-              <a:rot lat="0" lon="0" rev="1200000"/>
-            </a:lightRig>
+            <a:lightRig rig="threePt" dir="t"/>
           </a:scene3d>
-          <a:sp3d>
-            <a:bevelT w="63500" h="25400"/>
+          <a:sp3d prstMaterial="plastic">
+            <a:bevelT w="25400" h="25400"/>
           </a:sp3d>
         </a:effectStyle>
       </a:effectStyleLst>
@@ -5223,92 +7771,57 @@
         </a:solidFill>
         <a:gradFill rotWithShape="1">
           <a:gsLst>
-            <a:gs pos="0">
+            <a:gs pos="10000">
               <a:schemeClr val="phClr">
-                <a:tint val="40000"/>
-                <a:satMod val="350000"/>
-              </a:schemeClr>
-            </a:gs>
-            <a:gs pos="40000">
-              <a:schemeClr val="phClr">
-                <a:tint val="45000"/>
-                <a:shade val="99000"/>
-                <a:satMod val="350000"/>
+                <a:tint val="97000"/>
+                <a:hueMod val="162000"/>
+                <a:satMod val="200000"/>
+                <a:lumMod val="124000"/>
               </a:schemeClr>
             </a:gs>
             <a:gs pos="100000">
               <a:schemeClr val="phClr">
-                <a:shade val="20000"/>
-                <a:satMod val="255000"/>
+                <a:shade val="96000"/>
+                <a:hueMod val="88000"/>
+                <a:satMod val="220000"/>
+                <a:lumMod val="82000"/>
               </a:schemeClr>
             </a:gs>
           </a:gsLst>
-          <a:path path="circle">
-            <a:fillToRect l="50000" t="-80000" r="50000" b="180000"/>
-          </a:path>
+          <a:lin ang="6120000" scaled="1"/>
         </a:gradFill>
         <a:gradFill rotWithShape="1">
           <a:gsLst>
             <a:gs pos="0">
               <a:schemeClr val="phClr">
-                <a:tint val="80000"/>
-                <a:satMod val="300000"/>
+                <a:tint val="97000"/>
+                <a:hueMod val="142000"/>
+                <a:satMod val="200000"/>
+                <a:lumMod val="118000"/>
               </a:schemeClr>
             </a:gs>
             <a:gs pos="100000">
               <a:schemeClr val="phClr">
-                <a:shade val="30000"/>
-                <a:satMod val="200000"/>
+                <a:shade val="92000"/>
+                <a:hueMod val="22000"/>
+                <a:satMod val="220000"/>
+                <a:lumMod val="62000"/>
               </a:schemeClr>
             </a:gs>
           </a:gsLst>
           <a:path path="circle">
-            <a:fillToRect l="50000" t="50000" r="50000" b="50000"/>
+            <a:fillToRect b="100000"/>
           </a:path>
         </a:gradFill>
       </a:bgFillStyleLst>
     </a:fmtScheme>
   </a:themeElements>
-  <a:objectDefaults>
-    <a:spDef>
-      <a:spPr/>
-      <a:bodyPr/>
-      <a:lstStyle/>
-      <a:style>
-        <a:lnRef idx="1">
-          <a:schemeClr val="accent1"/>
-        </a:lnRef>
-        <a:fillRef idx="3">
-          <a:schemeClr val="accent1"/>
-        </a:fillRef>
-        <a:effectRef idx="2">
-          <a:schemeClr val="accent1"/>
-        </a:effectRef>
-        <a:fontRef idx="minor">
-          <a:schemeClr val="lt1"/>
-        </a:fontRef>
-      </a:style>
-    </a:spDef>
-    <a:lnDef>
-      <a:spPr/>
-      <a:bodyPr/>
-      <a:lstStyle/>
-      <a:style>
-        <a:lnRef idx="2">
-          <a:schemeClr val="accent1"/>
-        </a:lnRef>
-        <a:fillRef idx="0">
-          <a:schemeClr val="accent1"/>
-        </a:fillRef>
-        <a:effectRef idx="1">
-          <a:schemeClr val="accent1"/>
-        </a:effectRef>
-        <a:fontRef idx="minor">
-          <a:schemeClr val="tx1"/>
-        </a:fontRef>
-      </a:style>
-    </a:lnDef>
-  </a:objectDefaults>
+  <a:objectDefaults/>
   <a:extraClrSchemeLst/>
+  <a:extLst>
+    <a:ext uri="{05A4C25C-085E-4340-85A3-A5531E510DB2}">
+      <thm15:themeFamily xmlns:thm15="http://schemas.microsoft.com/office/thememl/2012/main" name="Slice" id="{0507925B-6AC9-4358-8E18-C330545D08F8}" vid="{282EB108-EDE6-4B8E-957B-D4A69BF580EA}"/>
+    </a:ext>
+  </a:extLst>
 </a:theme>
 </file>
--- a/docs/IT0206_IBSU_Lunch_Ordering_System_Presentation.pptx
+++ b/docs/IT0206_IBSU_Lunch_Ordering_System_Presentation.pptx
@@ -142,7 +142,7 @@
   <pc:docChgLst>
     <pc:chgData name="Gunther Darius" userId="8d2b46eae991de6c" providerId="LiveId" clId="{A6C91EE9-2DD3-49A5-8165-D560F60A6B62}"/>
     <pc:docChg chg="custSel modSld">
-      <pc:chgData name="Gunther Darius" userId="8d2b46eae991de6c" providerId="LiveId" clId="{A6C91EE9-2DD3-49A5-8165-D560F60A6B62}" dt="2026-09-23T02:47:13.160" v="31" actId="14100"/>
+      <pc:chgData name="Gunther Darius" userId="8d2b46eae991de6c" providerId="LiveId" clId="{A6C91EE9-2DD3-49A5-8165-D560F60A6B62}" dt="2026-09-23T23:10:28.145" v="38" actId="14100"/>
       <pc:docMkLst>
         <pc:docMk/>
       </pc:docMkLst>
@@ -162,13 +162,13 @@
         </pc:spChg>
       </pc:sldChg>
       <pc:sldChg chg="modSp mod">
-        <pc:chgData name="Gunther Darius" userId="8d2b46eae991de6c" providerId="LiveId" clId="{A6C91EE9-2DD3-49A5-8165-D560F60A6B62}" dt="2026-09-23T02:45:38.162" v="25" actId="14100"/>
+        <pc:chgData name="Gunther Darius" userId="8d2b46eae991de6c" providerId="LiveId" clId="{A6C91EE9-2DD3-49A5-8165-D560F60A6B62}" dt="2026-09-23T23:10:28.145" v="38" actId="14100"/>
         <pc:sldMkLst>
           <pc:docMk/>
           <pc:sldMk cId="0" sldId="260"/>
         </pc:sldMkLst>
         <pc:picChg chg="mod">
-          <ac:chgData name="Gunther Darius" userId="8d2b46eae991de6c" providerId="LiveId" clId="{A6C91EE9-2DD3-49A5-8165-D560F60A6B62}" dt="2026-09-23T02:45:38.162" v="25" actId="14100"/>
+          <ac:chgData name="Gunther Darius" userId="8d2b46eae991de6c" providerId="LiveId" clId="{A6C91EE9-2DD3-49A5-8165-D560F60A6B62}" dt="2026-09-23T23:10:28.145" v="38" actId="14100"/>
           <ac:picMkLst>
             <pc:docMk/>
             <pc:sldMk cId="0" sldId="260"/>
@@ -192,13 +192,13 @@
         </pc:picChg>
       </pc:sldChg>
       <pc:sldChg chg="modSp mod">
-        <pc:chgData name="Gunther Darius" userId="8d2b46eae991de6c" providerId="LiveId" clId="{A6C91EE9-2DD3-49A5-8165-D560F60A6B62}" dt="2026-09-23T02:46:22.100" v="27" actId="14100"/>
+        <pc:chgData name="Gunther Darius" userId="8d2b46eae991de6c" providerId="LiveId" clId="{A6C91EE9-2DD3-49A5-8165-D560F60A6B62}" dt="2026-09-23T23:02:28.697" v="33" actId="14100"/>
         <pc:sldMkLst>
           <pc:docMk/>
           <pc:sldMk cId="0" sldId="262"/>
         </pc:sldMkLst>
         <pc:picChg chg="mod">
-          <ac:chgData name="Gunther Darius" userId="8d2b46eae991de6c" providerId="LiveId" clId="{A6C91EE9-2DD3-49A5-8165-D560F60A6B62}" dt="2026-09-23T02:46:22.100" v="27" actId="14100"/>
+          <ac:chgData name="Gunther Darius" userId="8d2b46eae991de6c" providerId="LiveId" clId="{A6C91EE9-2DD3-49A5-8165-D560F60A6B62}" dt="2026-09-23T23:02:28.697" v="33" actId="14100"/>
           <ac:picMkLst>
             <pc:docMk/>
             <pc:sldMk cId="0" sldId="262"/>
@@ -237,13 +237,13 @@
         </pc:picChg>
       </pc:sldChg>
       <pc:sldChg chg="modSp mod">
-        <pc:chgData name="Gunther Darius" userId="8d2b46eae991de6c" providerId="LiveId" clId="{A6C91EE9-2DD3-49A5-8165-D560F60A6B62}" dt="2026-09-23T02:47:07.951" v="30" actId="14100"/>
+        <pc:chgData name="Gunther Darius" userId="8d2b46eae991de6c" providerId="LiveId" clId="{A6C91EE9-2DD3-49A5-8165-D560F60A6B62}" dt="2026-09-23T23:02:34.356" v="34" actId="14100"/>
         <pc:sldMkLst>
           <pc:docMk/>
           <pc:sldMk cId="0" sldId="265"/>
         </pc:sldMkLst>
         <pc:picChg chg="mod">
-          <ac:chgData name="Gunther Darius" userId="8d2b46eae991de6c" providerId="LiveId" clId="{A6C91EE9-2DD3-49A5-8165-D560F60A6B62}" dt="2026-09-23T02:47:07.951" v="30" actId="14100"/>
+          <ac:chgData name="Gunther Darius" userId="8d2b46eae991de6c" providerId="LiveId" clId="{A6C91EE9-2DD3-49A5-8165-D560F60A6B62}" dt="2026-09-23T23:02:34.356" v="34" actId="14100"/>
           <ac:picMkLst>
             <pc:docMk/>
             <pc:sldMk cId="0" sldId="265"/>
@@ -462,7 +462,7 @@
           <a:p>
             <a:fld id="{5BCAD085-E8A6-8845-BD4E-CB4CCA059FC4}" type="datetimeFigureOut">
               <a:rPr lang="en-US" smtClean="0"/>
-              <a:t>9/23/2026</a:t>
+              <a:t>9/24/2026</a:t>
             </a:fld>
             <a:endParaRPr lang="en-US"/>
           </a:p>
@@ -898,7 +898,7 @@
           <a:p>
             <a:fld id="{5BCAD085-E8A6-8845-BD4E-CB4CCA059FC4}" type="datetimeFigureOut">
               <a:rPr lang="en-US" smtClean="0"/>
-              <a:t>9/23/2026</a:t>
+              <a:t>9/24/2026</a:t>
             </a:fld>
             <a:endParaRPr lang="en-US"/>
           </a:p>
@@ -1148,7 +1148,7 @@
           <a:p>
             <a:fld id="{5BCAD085-E8A6-8845-BD4E-CB4CCA059FC4}" type="datetimeFigureOut">
               <a:rPr lang="en-US" smtClean="0"/>
-              <a:t>9/23/2026</a:t>
+              <a:t>9/24/2026</a:t>
             </a:fld>
             <a:endParaRPr lang="en-US"/>
           </a:p>
@@ -1456,7 +1456,7 @@
           <a:p>
             <a:fld id="{5BCAD085-E8A6-8845-BD4E-CB4CCA059FC4}" type="datetimeFigureOut">
               <a:rPr lang="en-US" smtClean="0"/>
-              <a:t>9/23/2026</a:t>
+              <a:t>9/24/2026</a:t>
             </a:fld>
             <a:endParaRPr lang="en-US"/>
           </a:p>
@@ -1774,7 +1774,7 @@
           <a:p>
             <a:fld id="{5BCAD085-E8A6-8845-BD4E-CB4CCA059FC4}" type="datetimeFigureOut">
               <a:rPr lang="en-US" smtClean="0"/>
-              <a:t>9/23/2026</a:t>
+              <a:t>9/24/2026</a:t>
             </a:fld>
             <a:endParaRPr lang="en-US"/>
           </a:p>
@@ -2076,7 +2076,7 @@
           <a:p>
             <a:fld id="{5BCAD085-E8A6-8845-BD4E-CB4CCA059FC4}" type="datetimeFigureOut">
               <a:rPr lang="en-US" smtClean="0"/>
-              <a:t>9/23/2026</a:t>
+              <a:t>9/24/2026</a:t>
             </a:fld>
             <a:endParaRPr lang="en-US"/>
           </a:p>
@@ -2443,7 +2443,7 @@
           <a:p>
             <a:fld id="{5BCAD085-E8A6-8845-BD4E-CB4CCA059FC4}" type="datetimeFigureOut">
               <a:rPr lang="en-US" smtClean="0"/>
-              <a:t>9/23/2026</a:t>
+              <a:t>9/24/2026</a:t>
             </a:fld>
             <a:endParaRPr lang="en-US"/>
           </a:p>
@@ -2617,7 +2617,7 @@
           <a:p>
             <a:fld id="{5BCAD085-E8A6-8845-BD4E-CB4CCA059FC4}" type="datetimeFigureOut">
               <a:rPr lang="en-US" smtClean="0"/>
-              <a:t>9/23/2026</a:t>
+              <a:t>9/24/2026</a:t>
             </a:fld>
             <a:endParaRPr lang="en-US"/>
           </a:p>
@@ -2797,7 +2797,7 @@
           <a:p>
             <a:fld id="{5BCAD085-E8A6-8845-BD4E-CB4CCA059FC4}" type="datetimeFigureOut">
               <a:rPr lang="en-US" smtClean="0"/>
-              <a:t>9/23/2026</a:t>
+              <a:t>9/24/2026</a:t>
             </a:fld>
             <a:endParaRPr lang="en-US"/>
           </a:p>
@@ -2967,7 +2967,7 @@
           <a:p>
             <a:fld id="{5BCAD085-E8A6-8845-BD4E-CB4CCA059FC4}" type="datetimeFigureOut">
               <a:rPr lang="en-US" smtClean="0"/>
-              <a:t>9/23/2026</a:t>
+              <a:t>9/24/2026</a:t>
             </a:fld>
             <a:endParaRPr lang="en-US"/>
           </a:p>
@@ -3217,7 +3217,7 @@
           <a:p>
             <a:fld id="{5BCAD085-E8A6-8845-BD4E-CB4CCA059FC4}" type="datetimeFigureOut">
               <a:rPr lang="en-US" smtClean="0"/>
-              <a:t>9/23/2026</a:t>
+              <a:t>9/24/2026</a:t>
             </a:fld>
             <a:endParaRPr lang="en-US"/>
           </a:p>
@@ -3453,7 +3453,7 @@
           <a:p>
             <a:fld id="{5BCAD085-E8A6-8845-BD4E-CB4CCA059FC4}" type="datetimeFigureOut">
               <a:rPr lang="en-US" smtClean="0"/>
-              <a:t>9/23/2026</a:t>
+              <a:t>9/24/2026</a:t>
             </a:fld>
             <a:endParaRPr lang="en-US"/>
           </a:p>
@@ -3835,7 +3835,7 @@
           <a:p>
             <a:fld id="{5BCAD085-E8A6-8845-BD4E-CB4CCA059FC4}" type="datetimeFigureOut">
               <a:rPr lang="en-US" smtClean="0"/>
-              <a:t>9/23/2026</a:t>
+              <a:t>9/24/2026</a:t>
             </a:fld>
             <a:endParaRPr lang="en-US"/>
           </a:p>
@@ -3953,7 +3953,7 @@
           <a:p>
             <a:fld id="{5BCAD085-E8A6-8845-BD4E-CB4CCA059FC4}" type="datetimeFigureOut">
               <a:rPr lang="en-US" smtClean="0"/>
-              <a:t>9/23/2026</a:t>
+              <a:t>9/24/2026</a:t>
             </a:fld>
             <a:endParaRPr lang="en-US"/>
           </a:p>
@@ -4048,7 +4048,7 @@
           <a:p>
             <a:fld id="{5BCAD085-E8A6-8845-BD4E-CB4CCA059FC4}" type="datetimeFigureOut">
               <a:rPr lang="en-US" smtClean="0"/>
-              <a:t>9/23/2026</a:t>
+              <a:t>9/24/2026</a:t>
             </a:fld>
             <a:endParaRPr lang="en-US"/>
           </a:p>
@@ -4303,7 +4303,7 @@
           <a:p>
             <a:fld id="{5BCAD085-E8A6-8845-BD4E-CB4CCA059FC4}" type="datetimeFigureOut">
               <a:rPr lang="en-US" smtClean="0"/>
-              <a:t>9/23/2026</a:t>
+              <a:t>9/24/2026</a:t>
             </a:fld>
             <a:endParaRPr lang="en-US"/>
           </a:p>
@@ -4586,7 +4586,7 @@
           <a:p>
             <a:fld id="{5BCAD085-E8A6-8845-BD4E-CB4CCA059FC4}" type="datetimeFigureOut">
               <a:rPr lang="en-US" smtClean="0"/>
-              <a:t>9/23/2026</a:t>
+              <a:t>9/24/2026</a:t>
             </a:fld>
             <a:endParaRPr lang="en-US"/>
           </a:p>
@@ -4992,7 +4992,7 @@
           <a:p>
             <a:fld id="{5BCAD085-E8A6-8845-BD4E-CB4CCA059FC4}" type="datetimeFigureOut">
               <a:rPr lang="en-US" smtClean="0"/>
-              <a:t>9/23/2026</a:t>
+              <a:t>9/24/2026</a:t>
             </a:fld>
             <a:endParaRPr lang="en-US"/>
           </a:p>
@@ -5680,8 +5680,8 @@
         </p:blipFill>
         <p:spPr>
           <a:xfrm>
-            <a:off x="6400800" y="1097280"/>
-            <a:ext cx="5212080" cy="2331720"/>
+            <a:off x="6400800" y="1097279"/>
+            <a:ext cx="5212080" cy="2538549"/>
           </a:xfrm>
           <a:prstGeom prst="rect">
             <a:avLst/>
@@ -6857,8 +6857,8 @@
         </p:blipFill>
         <p:spPr>
           <a:xfrm>
-            <a:off x="6400800" y="925287"/>
-            <a:ext cx="5212080" cy="2155370"/>
+            <a:off x="5897880" y="925287"/>
+            <a:ext cx="5715000" cy="2993570"/>
           </a:xfrm>
           <a:prstGeom prst="rect">
             <a:avLst/>
@@ -7152,7 +7152,7 @@
         <p:spPr>
           <a:xfrm>
             <a:off x="6400800" y="1097280"/>
-            <a:ext cx="5212080" cy="2723606"/>
+            <a:ext cx="5212080" cy="3213464"/>
           </a:xfrm>
           <a:prstGeom prst="rect">
             <a:avLst/>
